--- a/presentations/technical.pptx
+++ b/presentations/technical.pptx
@@ -10559,7 +10559,7 @@
                 </a:solidFill>
                 <a:latin typeface="Calibri"/>
               </a:rPr>
-              <a:t> lands sixth on mutual information at 0.0534, above every raw column it was built from.</a:t>
+              <a:t> lands sixth on mutual information at 0.0534, below the raw age column it bends. Mutual information sees the whole age signal, so a threshold drawn from it ranks lower, as it should.</a:t>
             </a:r>
           </a:p>
         </p:txBody>

--- a/presentations/technical.pptx
+++ b/presentations/technical.pptx
@@ -3433,7 +3433,7 @@
                 </a:solidFill>
                 <a:latin typeface="Cambria"/>
               </a:rPr>
-              <a:t>Demographic parity asked the wrong question</a:t>
+              <a:t>Equal flagging asked the wrong question</a:t>
             </a:r>
           </a:p>
         </p:txBody>
@@ -5172,7 +5172,7 @@
                 </a:solidFill>
                 <a:latin typeface="Calibri"/>
               </a:rPr>
-              <a:t>That is the finding. Not that every attribute fails disparate impact, which was true and useless.</a:t>
+              <a:t>That is the finding. Not that every group fails the equal-rate test, which was true and useless.</a:t>
             </a:r>
           </a:p>
         </p:txBody>
@@ -5324,7 +5324,7 @@
                 </a:solidFill>
                 <a:latin typeface="Calibri"/>
               </a:rPr>
-              <a:t>Step 4 refused to call a 0.005 lead real against a 0.020 fold swing. Then I came here and quoted fairness numbers to three decimals off a single 726-row split, without asking what the noise was. So I went back and asked. 2,000 seeded bootstrap resamples.</a:t>
+              <a:t>Step 4 refused to call a 0.005 lead real against a 0.020 slice swing. Then I came here and quoted fairness numbers to three decimals off one 726-row split, without asking what the noise was. So I went back and asked. 2,000 seeded bootstrap resamples.</a:t>
             </a:r>
           </a:p>
         </p:txBody>
@@ -7043,7 +7043,7 @@
                 </a:solidFill>
                 <a:latin typeface="Calibri"/>
               </a:rPr>
-              <a:t>726 test students at the operating threshold of 0.445.</a:t>
+              <a:t>726 test students at the operating cutoff of 0.445.</a:t>
             </a:r>
           </a:p>
         </p:txBody>
@@ -7639,7 +7639,7 @@
                 </a:solidFill>
                 <a:latin typeface="Calibri"/>
               </a:rPr>
-              <a:t>students, after 794 with no settled outcome come out</a:t>
+              <a:t>students, after 794 with no settled outcome removed</a:t>
             </a:r>
           </a:p>
         </p:txBody>
@@ -7720,7 +7720,7 @@
                 </a:solidFill>
                 <a:latin typeface="Calibri"/>
               </a:rPr>
-              <a:t>drop out. Mildly uneven, handled with class weights</a:t>
+              <a:t>drop out. Mildly uneven, balanced during training</a:t>
             </a:r>
           </a:p>
         </p:txBody>
@@ -7801,7 +7801,7 @@
                 </a:solidFill>
                 <a:latin typeface="Calibri"/>
               </a:rPr>
-              <a:t>curricular columns dropped as leakage</a:t>
+              <a:t>curricular columns dropped, they leak</a:t>
             </a:r>
           </a:p>
         </p:txBody>
@@ -7843,7 +7843,7 @@
                 </a:solidFill>
                 <a:latin typeface="Calibri"/>
               </a:rPr>
-              <a:t>The task is binary classification, Dropout against Graduate. Enrolled means the outcome is not settled, so those rows cannot teach the model what dropout looks like.</a:t>
+              <a:t>The task is a yes or no call, Dropout against Graduate. Enrolled means the outcome is not settled, so those rows cannot teach the model what dropout looks like.</a:t>
             </a:r>
           </a:p>
           <a:p>
@@ -7909,7 +7909,7 @@
                 </a:solidFill>
                 <a:latin typeface="Calibri"/>
               </a:rPr>
-              <a:t>, because they hold across every cutoff.</a:t>
+              <a:t>, two scores that hold at every cutoff.</a:t>
             </a:r>
           </a:p>
           <a:p>
@@ -7937,7 +7937,7 @@
                 </a:solidFill>
                 <a:latin typeface="Calibri"/>
               </a:rPr>
-              <a:t>, and only once a cutoff exists. Recall is not a property of a model. It is a property of a model and a cutoff.</a:t>
+              <a:t>, once a cutoff exists. Recall is the share of real dropouts caught, set by the model and the cutoff together.</a:t>
             </a:r>
           </a:p>
           <a:p>
@@ -8827,7 +8827,7 @@
                 </a:solidFill>
                 <a:latin typeface="Calibri"/>
               </a:rPr>
-              <a:t>That is not a background fact. A student who has stopped paying is often a student already leaving. It is a near-outcome signal, kept but watched, and Step 3 measures what the model loses without it.</a:t>
+              <a:t>That is not a background fact. A student who has stopped paying is often a student already leaving. It nearly is the outcome, kept but watched, and Step 3 measures what the model loses without it.</a:t>
             </a:r>
           </a:p>
         </p:txBody>
@@ -9102,7 +9102,7 @@
                 </a:solidFill>
                 <a:latin typeface="Calibri"/>
               </a:rPr>
-              <a:t> But VIF only ever looks at the six numerics.</a:t>
+              <a:t> VIF spots overlap in the six numbers only.</a:t>
             </a:r>
           </a:p>
         </p:txBody>
@@ -9737,7 +9737,7 @@
                 </a:solidFill>
                 <a:latin typeface="Calibri"/>
               </a:rPr>
-              <a:t>Slide 4 said collinearity was fine. VIF said so.</a:t>
+              <a:t>Slide 4 said overlap was fine. VIF said so.</a:t>
             </a:r>
             <a:r>
               <a:rPr sz="1200" b="0">
@@ -9746,7 +9746,7 @@
                 </a:solidFill>
                 <a:latin typeface="Calibri"/>
               </a:rPr>
-              <a:t> VIF only reads the six numerics. It never saw the one-hot columns, and it never saw a feature built after it ran.</a:t>
+              <a:t> VIF only reads the six numbers. It never saw the category columns, and never saw a feature built after it ran.</a:t>
             </a:r>
           </a:p>
         </p:txBody>
@@ -10531,7 +10531,7 @@
                 </a:solidFill>
                 <a:latin typeface="Calibri"/>
               </a:rPr>
-              <a:t>Five engineered features replace their sources. Four weak columns come out. Then the cost gets measured, on training folds, rather than assumed.</a:t>
+              <a:t>Five engineered features replace their sources. Four weak columns come out. Then the cost is measured, on training slices, rather than assumed.</a:t>
             </a:r>
           </a:p>
           <a:p>
@@ -10559,7 +10559,7 @@
                 </a:solidFill>
                 <a:latin typeface="Calibri"/>
               </a:rPr>
-              <a:t> lands sixth on mutual information at 0.0534, below the raw age column it bends. Mutual information sees the whole age signal, so a threshold drawn from it ranks lower, as it should.</a:t>
+              <a:t> lands sixth on mutual information at 0.0534, below the raw age column it bends. That score reads the whole age signal, so a cutoff drawn from it ranks lower, as it should.</a:t>
             </a:r>
           </a:p>
         </p:txBody>
@@ -10904,7 +10904,7 @@
                 </a:solidFill>
                 <a:latin typeface="Calibri"/>
               </a:rPr>
-              <a:t>PCA takes seven of nine components to reach 90 percent of the variance. Nothing to compress, which matches the low VIF. So PCA rides into Step 4 as a seventh model rather than sitting in a chart nobody consumes.</a:t>
+              <a:t>PCA takes seven of nine parts to reach 90 percent of the variation. Nothing to compress, which matches the low VIF. So PCA rides into Step 4 as a seventh model rather than sitting in a chart nobody uses.</a:t>
             </a:r>
           </a:p>
         </p:txBody>
@@ -11042,7 +11042,7 @@
                 </a:solidFill>
                 <a:latin typeface="Calibri"/>
               </a:rPr>
-              <a:t>Tuned inside five-fold stratified cross-validation on the training set. The test set is scored once.</a:t>
+              <a:t>Tuned by cross-validation, five held-out slices of the training set. The test set is scored once.</a:t>
             </a:r>
           </a:p>
         </p:txBody>
@@ -11888,7 +11888,7 @@
                 </a:solidFill>
                 <a:latin typeface="Calibri"/>
               </a:rPr>
-              <a:t>The gap is 0.005. The folds swing by 0.020.</a:t>
+              <a:t>The gap is 0.005. Slices swing by 0.020.</a:t>
             </a:r>
           </a:p>
           <a:p>
@@ -11907,7 +11907,7 @@
                 </a:solidFill>
                 <a:latin typeface="Calibri"/>
               </a:rPr>
-              <a:t>Each dot is one fold. The two ranges overlap almost completely, and the distance between the means disappears inside them.</a:t>
+              <a:t>Each dot is one slice. The two ranges overlap almost completely, and the gap between the means disappears inside them.</a:t>
             </a:r>
           </a:p>
           <a:p>
@@ -12086,7 +12086,7 @@
                 </a:solidFill>
                 <a:latin typeface="Cambria"/>
               </a:rPr>
-              <a:t>The threshold nobody chose</a:t>
+              <a:t>The cutoff nobody chose</a:t>
             </a:r>
           </a:p>
         </p:txBody>
@@ -12125,7 +12125,7 @@
                 </a:solidFill>
                 <a:latin typeface="Calibri"/>
               </a:rPr>
-              <a:t>Recall is not a property of a model. It is a property of a model and a cutoff. The default cutoff is 0.5, and nobody chose it.</a:t>
+              <a:t>Recall depends on the model and the cutoff together, not the model alone. The default cutoff is 0.5, and nobody chose it.</a:t>
             </a:r>
           </a:p>
         </p:txBody>
@@ -13628,7 +13628,7 @@
                 </a:solidFill>
                 <a:latin typeface="Calibri"/>
               </a:rPr>
-              <a:t>The first chart plotted one bar per column of the design matrix. But Course is not a column. It is seventeen one-hot columns, so its importance got chopped into seventeen small bars while a single flag kept all of its weight in one place.</a:t>
+              <a:t>The first SHAP chart plotted one bar per column of the design matrix. But Course is not a column. It is seventeen category columns, so its importance got split into seventeen small bars while a single flag kept all its weight in one place.</a:t>
             </a:r>
           </a:p>
         </p:txBody>
@@ -14365,7 +14365,7 @@
                 </a:solidFill>
                 <a:latin typeface="Calibri"/>
               </a:rPr>
-              <a:t> The largest single fragment of the strongest feature in the model sat fifth, behind three binary flags. Mother's occupation did not appear at all.</a:t>
+              <a:t> The largest single fragment of the strongest feature in the model sat fifth, behind four binary flags. Mother's occupation did not appear at all.</a:t>
             </a:r>
           </a:p>
         </p:txBody>
@@ -14452,7 +14452,7 @@
                 </a:solidFill>
                 <a:latin typeface="Calibri"/>
               </a:rPr>
-              <a:t>Partial dependence with ICE. The lines run parallel, a check passing rather than a finding.</a:t>
+              <a:t>Prediction vs one feature. The lines run parallel, a check passing rather than a finding.</a:t>
             </a:r>
           </a:p>
         </p:txBody>

--- a/presentations/technical.pptx
+++ b/presentations/technical.pptx
@@ -5172,7 +5172,7 @@
                 </a:solidFill>
                 <a:latin typeface="Calibri"/>
               </a:rPr>
-              <a:t>That is the finding. Not that every group fails the equal-rate test, which was true and useless.</a:t>
+              <a:t>These gaps use the 726 test students, a little below the full-data rates on slide 3. The finding is not that every group fails the equal-rate test, which was true and useless.</a:t>
             </a:r>
           </a:p>
         </p:txBody>
@@ -7109,7 +7109,7 @@
                 </a:solidFill>
                 <a:latin typeface="Calibri"/>
               </a:rPr>
-              <a:t>Recall 0.796</a:t>
+              <a:t>Recall 0.796 before the fix</a:t>
             </a:r>
             <a:r>
               <a:rPr sz="1200" b="0">
@@ -7118,7 +7118,7 @@
                 </a:solidFill>
                 <a:latin typeface="Calibri"/>
               </a:rPr>
-              <a:t> at a cutoff chosen against staffing, on enrollment-time data only.</a:t>
+              <a:t> at a cutoff chosen against staffing, on enrollment-time data only. The shipped system adds the exponentiated-gradient fairness fix, recall 0.718, gender gap down from 0.177 to 0.009.</a:t>
             </a:r>
           </a:p>
           <a:p>
@@ -7174,7 +7174,7 @@
                 </a:solidFill>
                 <a:latin typeface="Calibri"/>
               </a:rPr>
-              <a:t>, because those gaps are reported rather than invented. Age band is unresolved, error gap 0.572, and it needs its own pass.</a:t>
+              <a:t>, because neither is a protected trait and both track real risk. Age band is unresolved, error gap 0.572, and it needs its own pass.</a:t>
             </a:r>
           </a:p>
         </p:txBody>
@@ -7720,7 +7720,7 @@
                 </a:solidFill>
                 <a:latin typeface="Calibri"/>
               </a:rPr>
-              <a:t>drop out. Mildly uneven, balanced during training</a:t>
+              <a:t>drop out. Mildly uneven, handled with class weights</a:t>
             </a:r>
           </a:p>
         </p:txBody>
@@ -8827,7 +8827,7 @@
                 </a:solidFill>
                 <a:latin typeface="Calibri"/>
               </a:rPr>
-              <a:t>That is not a background fact. A student who has stopped paying is often a student already leaving. It nearly is the outcome, kept but watched, and Step 3 measures what the model loses without it.</a:t>
+              <a:t>That is not a background fact. A student who has stopped paying is often a student already leaving. It nearly is the outcome, kept but watched, and removing it costs about five points of PR AUC.</a:t>
             </a:r>
           </a:p>
         </p:txBody>
@@ -8869,7 +8869,7 @@
                 </a:solidFill>
                 <a:latin typeface="Calibri"/>
               </a:rPr>
-              <a:t>These numbers come back on slide 10. They are the reason the fairness audit had to be rewritten.</a:t>
+              <a:t>These group rates come back on slide 10. They are the reason the fairness audit had to be rewritten.</a:t>
             </a:r>
           </a:p>
         </p:txBody>
@@ -14365,7 +14365,7 @@
                 </a:solidFill>
                 <a:latin typeface="Calibri"/>
               </a:rPr>
-              <a:t> The largest single fragment of the strongest feature in the model sat fifth, behind four binary flags. Mother's occupation did not appear at all.</a:t>
+              <a:t> The largest single fragment of the strongest feature in the model sat fifth, behind four binary flags. Mother's occupation did not appear at all. A second bug hid here too. Unseeded 100-row sampling made the numbers drift, 0.90 one run and 0.68 the next, until the fix read all 2,904 rows.</a:t>
             </a:r>
           </a:p>
         </p:txBody>
@@ -14494,7 +14494,7 @@
                 </a:solidFill>
                 <a:latin typeface="Calibri"/>
               </a:rPr>
-              <a:t>Course far ahead at 1.126. Neither a course nor a parent's occupation is a warning a student can act on. The model substantially finds students who started from further back.</a:t>
+              <a:t>Course far ahead at 1.126. On raw association tuition led, but inside the model course leads. Neither a course nor a parent's occupation is a warning a student can act on. The model substantially finds students who started from further back.</a:t>
             </a:r>
           </a:p>
         </p:txBody>

--- a/presentations/technical.pptx
+++ b/presentations/technical.pptx
@@ -7175,6 +7175,34 @@
                 <a:latin typeface="Calibri"/>
               </a:rPr>
               <a:t>, because neither is a protected trait and both track real risk. Age band is unresolved, error gap 0.572, and it needs its own pass.</a:t>
+            </a:r>
+          </a:p>
+          <a:p>
+            <a:pPr algn="l">
+              <a:lnSpc>
+                <a:spcPct val="125000"/>
+              </a:lnSpc>
+              <a:spcAft>
+                <a:spcPts val="800"/>
+              </a:spcAft>
+            </a:pPr>
+            <a:r>
+              <a:rPr sz="1200" b="1">
+                <a:solidFill>
+                  <a:srgbClr val="1A1A1A"/>
+                </a:solidFill>
+                <a:latin typeface="Calibri"/>
+              </a:rPr>
+              <a:t>The fair model decides who is on the list</a:t>
+            </a:r>
+            <a:r>
+              <a:rPr sz="1200" b="0">
+                <a:solidFill>
+                  <a:srgbClr val="595959"/>
+                </a:solidFill>
+                <a:latin typeface="Calibri"/>
+              </a:rPr>
+              <a:t>, the base model orders it, and the fair set of 410 fits the 450 the team can staff.</a:t>
             </a:r>
           </a:p>
         </p:txBody>

--- a/presentations/technical.pptx
+++ b/presentations/technical.pptx
@@ -7118,7 +7118,7 @@
                 </a:solidFill>
                 <a:latin typeface="Calibri"/>
               </a:rPr>
-              <a:t> at a cutoff chosen against staffing, on enrollment-time data only. The shipped system adds the exponentiated-gradient fairness fix, recall 0.718, gender gap down from 0.177 to 0.009.</a:t>
+              <a:t> at a cutoff chosen against staffing, on enrollment-time data only. The shipped system adds the exponentiated-gradient fairness fix, recall 0.718, gender gap from a real 0.177 to 0.009, which spans zero.</a:t>
             </a:r>
           </a:p>
           <a:p>
@@ -7193,7 +7193,7 @@
                 </a:solidFill>
                 <a:latin typeface="Calibri"/>
               </a:rPr>
-              <a:t>The fair model decides who is on the list</a:t>
+              <a:t>The fair model picks the list</a:t>
             </a:r>
             <a:r>
               <a:rPr sz="1200" b="0">
@@ -7202,7 +7202,7 @@
                 </a:solidFill>
                 <a:latin typeface="Calibri"/>
               </a:rPr>
-              <a:t>, the base model orders it, and the fair set of 410 fits the 450 the team can staff.</a:t>
+              <a:t>, the base model orders it, and the fair set of 410 fits capacity.</a:t>
             </a:r>
           </a:p>
         </p:txBody>

--- a/presentations/technical.pptx
+++ b/presentations/technical.pptx
@@ -17,6 +17,7 @@
     <p:sldId id="265" r:id="rId16"/>
     <p:sldId id="266" r:id="rId17"/>
     <p:sldId id="267" r:id="rId18"/>
+    <p:sldId id="268" r:id="rId19"/>
   </p:sldIdLst>
   <p:sldSz cx="12191695" cy="6858000" type="screen4x3"/>
   <p:notesSz cx="6858000" cy="9144000"/>
@@ -7530,6 +7531,529 @@
                 <a:latin typeface="Calibri"/>
               </a:rPr>
               <a:t>A dropout model is not a scoreboard. It is a decision about which students get help. The right way to use this one is as a ranked prompt for a support team, checked by a person.</a:t>
+            </a:r>
+          </a:p>
+        </p:txBody>
+      </p:sp>
+    </p:spTree>
+  </p:cSld>
+  <p:clrMapOvr>
+    <a:masterClrMapping/>
+  </p:clrMapOvr>
+</p:sld>
+</file>
+
+<file path=ppt/slides/slide13.xml><?xml version="1.0" encoding="utf-8"?>
+<p:sld xmlns:a="http://schemas.openxmlformats.org/drawingml/2006/main" xmlns:p="http://schemas.openxmlformats.org/presentationml/2006/main" xmlns:r="http://schemas.openxmlformats.org/officeDocument/2006/relationships">
+  <p:cSld>
+    <p:spTree>
+      <p:nvGrpSpPr>
+        <p:cNvPr id="1" name=""/>
+        <p:cNvGrpSpPr/>
+        <p:nvPr/>
+      </p:nvGrpSpPr>
+      <p:grpSpPr/>
+      <p:sp>
+        <p:nvSpPr>
+          <p:cNvPr id="2" name="TextBox 1"/>
+          <p:cNvSpPr txBox="1"/>
+          <p:nvPr/>
+        </p:nvSpPr>
+        <p:spPr>
+          <a:xfrm>
+            <a:off x="566928" y="457200"/>
+            <a:ext cx="11057839" cy="548640"/>
+          </a:xfrm>
+          <a:prstGeom prst="rect">
+            <a:avLst/>
+          </a:prstGeom>
+          <a:noFill/>
+        </p:spPr>
+        <p:txBody>
+          <a:bodyPr wrap="square" lIns="0" rIns="0" tIns="0" bIns="0">
+            <a:spAutoFit/>
+          </a:bodyPr>
+          <a:lstStyle/>
+          <a:p>
+            <a:pPr algn="l">
+              <a:spcAft>
+                <a:spcPts val="600"/>
+              </a:spcAft>
+            </a:pPr>
+            <a:r>
+              <a:rPr sz="2900" b="1">
+                <a:solidFill>
+                  <a:srgbClr val="1A1A1A"/>
+                </a:solidFill>
+                <a:latin typeface="Cambria"/>
+              </a:rPr>
+              <a:t>Bonus. A language model, kept behind a verifier</a:t>
+            </a:r>
+          </a:p>
+        </p:txBody>
+      </p:sp>
+      <p:sp>
+        <p:nvSpPr>
+          <p:cNvPr id="3" name="TextBox 2"/>
+          <p:cNvSpPr txBox="1"/>
+          <p:nvPr/>
+        </p:nvSpPr>
+        <p:spPr>
+          <a:xfrm>
+            <a:off x="566928" y="1033271"/>
+            <a:ext cx="11057839" cy="274320"/>
+          </a:xfrm>
+          <a:prstGeom prst="rect">
+            <a:avLst/>
+          </a:prstGeom>
+          <a:noFill/>
+        </p:spPr>
+        <p:txBody>
+          <a:bodyPr wrap="square" lIns="0" rIns="0" tIns="0" bIns="0">
+            <a:spAutoFit/>
+          </a:bodyPr>
+          <a:lstStyle/>
+          <a:p>
+            <a:pPr algn="l">
+              <a:spcAft>
+                <a:spcPts val="600"/>
+              </a:spcAft>
+            </a:pPr>
+            <a:r>
+              <a:rPr sz="1200" b="0">
+                <a:solidFill>
+                  <a:srgbClr val="595959"/>
+                </a:solidFill>
+                <a:latin typeface="Calibri"/>
+              </a:rPr>
+              <a:t>SHAP values a tutor cannot read, turned into a note a tutor can act on. Step 9, optional.</a:t>
+            </a:r>
+          </a:p>
+        </p:txBody>
+      </p:sp>
+      <p:sp>
+        <p:nvSpPr>
+          <p:cNvPr id="4" name="TextBox 3"/>
+          <p:cNvSpPr txBox="1"/>
+          <p:nvPr/>
+        </p:nvSpPr>
+        <p:spPr>
+          <a:xfrm>
+            <a:off x="566928" y="1600200"/>
+            <a:ext cx="6126480" cy="4389120"/>
+          </a:xfrm>
+          <a:prstGeom prst="rect">
+            <a:avLst/>
+          </a:prstGeom>
+          <a:noFill/>
+        </p:spPr>
+        <p:txBody>
+          <a:bodyPr wrap="square" lIns="0" rIns="0" tIns="0" bIns="0">
+            <a:spAutoFit/>
+          </a:bodyPr>
+          <a:lstStyle/>
+          <a:p>
+            <a:pPr algn="l">
+              <a:lnSpc>
+                <a:spcPct val="125000"/>
+              </a:lnSpc>
+              <a:spcAft>
+                <a:spcPts val="900"/>
+              </a:spcAft>
+            </a:pPr>
+            <a:r>
+              <a:rPr sz="1300" b="0">
+                <a:solidFill>
+                  <a:srgbClr val="595959"/>
+                </a:solidFill>
+                <a:latin typeface="Calibri"/>
+              </a:rPr>
+              <a:t>SHAP says </a:t>
+            </a:r>
+            <a:r>
+              <a:rPr sz="1300" b="1">
+                <a:solidFill>
+                  <a:srgbClr val="1A1A1A"/>
+                </a:solidFill>
+                <a:latin typeface="Calibri"/>
+              </a:rPr>
+              <a:t>Tuition fees up to date: +0.68</a:t>
+            </a:r>
+            <a:r>
+              <a:rPr sz="1300" b="0">
+                <a:solidFill>
+                  <a:srgbClr val="595959"/>
+                </a:solidFill>
+                <a:latin typeface="Calibri"/>
+              </a:rPr>
+              <a:t>. True, and useless to the tutor who picks up the phone. A language model turns a student's top drivers into two plain sentences, which is the one thing it is genuinely good for here.</a:t>
+            </a:r>
+          </a:p>
+          <a:p>
+            <a:pPr algn="l">
+              <a:lnSpc>
+                <a:spcPct val="125000"/>
+              </a:lnSpc>
+              <a:spcAft>
+                <a:spcPts val="900"/>
+              </a:spcAft>
+            </a:pPr>
+            <a:r>
+              <a:rPr sz="1300" b="1">
+                <a:solidFill>
+                  <a:srgbClr val="1A1A1A"/>
+                </a:solidFill>
+                <a:latin typeface="Calibri"/>
+              </a:rPr>
+              <a:t>Handed the numbers with no rules, it does the forbidden thing</a:t>
+            </a:r>
+            <a:r>
+              <a:rPr sz="1300" b="0">
+                <a:solidFill>
+                  <a:srgbClr val="595959"/>
+                </a:solidFill>
+                <a:latin typeface="Calibri"/>
+              </a:rPr>
+              <a:t>. It prints probabilities and admission scores, reads a mother's occupation as low status, and names the student's gender. So the guarded prompt bans numbers, scoring words, any off-list driver, and gender, though the model leans on it at SHAP 0.301.</a:t>
+            </a:r>
+          </a:p>
+          <a:p>
+            <a:pPr algn="l">
+              <a:lnSpc>
+                <a:spcPct val="125000"/>
+              </a:lnSpc>
+              <a:spcAft>
+                <a:spcPts val="900"/>
+              </a:spcAft>
+            </a:pPr>
+            <a:r>
+              <a:rPr sz="1300" b="1">
+                <a:solidFill>
+                  <a:srgbClr val="1A1A1A"/>
+                </a:solidFill>
+                <a:latin typeface="Calibri"/>
+              </a:rPr>
+              <a:t>Then a cell checks the prompt actually held.</a:t>
+            </a:r>
+            <a:r>
+              <a:rPr sz="1300" b="0">
+                <a:solidFill>
+                  <a:srgbClr val="595959"/>
+                </a:solidFill>
+                <a:latin typeface="Calibri"/>
+              </a:rPr>
+              <a:t> The rules-engine baseline passes by construction. The language model has to be watched.</a:t>
+            </a:r>
+          </a:p>
+        </p:txBody>
+      </p:sp>
+      <p:sp>
+        <p:nvSpPr>
+          <p:cNvPr id="5" name="TextBox 4"/>
+          <p:cNvSpPr txBox="1"/>
+          <p:nvPr/>
+        </p:nvSpPr>
+        <p:spPr>
+          <a:xfrm>
+            <a:off x="6903720" y="1691640"/>
+            <a:ext cx="2377440" cy="603504"/>
+          </a:xfrm>
+          <a:prstGeom prst="rect">
+            <a:avLst/>
+          </a:prstGeom>
+          <a:noFill/>
+        </p:spPr>
+        <p:txBody>
+          <a:bodyPr wrap="square" lIns="0" rIns="0" tIns="0" bIns="0">
+            <a:spAutoFit/>
+          </a:bodyPr>
+          <a:lstStyle/>
+          <a:p>
+            <a:pPr algn="l">
+              <a:spcAft>
+                <a:spcPts val="0"/>
+              </a:spcAft>
+            </a:pPr>
+            <a:r>
+              <a:rPr sz="4400" b="1">
+                <a:solidFill>
+                  <a:srgbClr val="1A1A1A"/>
+                </a:solidFill>
+                <a:latin typeface="Cambria"/>
+              </a:rPr>
+              <a:t>0 / 5</a:t>
+            </a:r>
+          </a:p>
+        </p:txBody>
+      </p:sp>
+      <p:sp>
+        <p:nvSpPr>
+          <p:cNvPr id="6" name="TextBox 5"/>
+          <p:cNvSpPr txBox="1"/>
+          <p:nvPr/>
+        </p:nvSpPr>
+        <p:spPr>
+          <a:xfrm>
+            <a:off x="6903720" y="2261616"/>
+            <a:ext cx="2377440" cy="457200"/>
+          </a:xfrm>
+          <a:prstGeom prst="rect">
+            <a:avLst/>
+          </a:prstGeom>
+          <a:noFill/>
+        </p:spPr>
+        <p:txBody>
+          <a:bodyPr wrap="square" lIns="0" rIns="0" tIns="0" bIns="0">
+            <a:spAutoFit/>
+          </a:bodyPr>
+          <a:lstStyle/>
+          <a:p>
+            <a:pPr algn="l">
+              <a:lnSpc>
+                <a:spcPct val="115000"/>
+              </a:lnSpc>
+              <a:spcAft>
+                <a:spcPts val="600"/>
+              </a:spcAft>
+            </a:pPr>
+            <a:r>
+              <a:rPr sz="1100" b="0">
+                <a:solidFill>
+                  <a:srgbClr val="767676"/>
+                </a:solidFill>
+                <a:latin typeface="Calibri"/>
+              </a:rPr>
+              <a:t>naive prompt safe to read</a:t>
+            </a:r>
+          </a:p>
+        </p:txBody>
+      </p:sp>
+      <p:sp>
+        <p:nvSpPr>
+          <p:cNvPr id="7" name="TextBox 6"/>
+          <p:cNvSpPr txBox="1"/>
+          <p:nvPr/>
+        </p:nvSpPr>
+        <p:spPr>
+          <a:xfrm>
+            <a:off x="9418320" y="1691640"/>
+            <a:ext cx="2377440" cy="603504"/>
+          </a:xfrm>
+          <a:prstGeom prst="rect">
+            <a:avLst/>
+          </a:prstGeom>
+          <a:noFill/>
+        </p:spPr>
+        <p:txBody>
+          <a:bodyPr wrap="square" lIns="0" rIns="0" tIns="0" bIns="0">
+            <a:spAutoFit/>
+          </a:bodyPr>
+          <a:lstStyle/>
+          <a:p>
+            <a:pPr algn="l">
+              <a:spcAft>
+                <a:spcPts val="0"/>
+              </a:spcAft>
+            </a:pPr>
+            <a:r>
+              <a:rPr sz="4400" b="1">
+                <a:solidFill>
+                  <a:srgbClr val="F6861F"/>
+                </a:solidFill>
+                <a:latin typeface="Cambria"/>
+              </a:rPr>
+              <a:t>5 / 5</a:t>
+            </a:r>
+          </a:p>
+        </p:txBody>
+      </p:sp>
+      <p:sp>
+        <p:nvSpPr>
+          <p:cNvPr id="8" name="TextBox 7"/>
+          <p:cNvSpPr txBox="1"/>
+          <p:nvPr/>
+        </p:nvSpPr>
+        <p:spPr>
+          <a:xfrm>
+            <a:off x="9418320" y="2261616"/>
+            <a:ext cx="2377440" cy="457200"/>
+          </a:xfrm>
+          <a:prstGeom prst="rect">
+            <a:avLst/>
+          </a:prstGeom>
+          <a:noFill/>
+        </p:spPr>
+        <p:txBody>
+          <a:bodyPr wrap="square" lIns="0" rIns="0" tIns="0" bIns="0">
+            <a:spAutoFit/>
+          </a:bodyPr>
+          <a:lstStyle/>
+          <a:p>
+            <a:pPr algn="l">
+              <a:lnSpc>
+                <a:spcPct val="115000"/>
+              </a:lnSpc>
+              <a:spcAft>
+                <a:spcPts val="600"/>
+              </a:spcAft>
+            </a:pPr>
+            <a:r>
+              <a:rPr sz="1100" b="0">
+                <a:solidFill>
+                  <a:srgbClr val="767676"/>
+                </a:solidFill>
+                <a:latin typeface="Calibri"/>
+              </a:rPr>
+              <a:t>guarded prompt safe to read</a:t>
+            </a:r>
+          </a:p>
+        </p:txBody>
+      </p:sp>
+      <p:sp>
+        <p:nvSpPr>
+          <p:cNvPr id="9" name="TextBox 8"/>
+          <p:cNvSpPr txBox="1"/>
+          <p:nvPr/>
+        </p:nvSpPr>
+        <p:spPr>
+          <a:xfrm>
+            <a:off x="6903720" y="3383280"/>
+            <a:ext cx="4800600" cy="2468880"/>
+          </a:xfrm>
+          <a:prstGeom prst="rect">
+            <a:avLst/>
+          </a:prstGeom>
+          <a:noFill/>
+        </p:spPr>
+        <p:txBody>
+          <a:bodyPr wrap="square" lIns="0" rIns="0" tIns="0" bIns="0">
+            <a:spAutoFit/>
+          </a:bodyPr>
+          <a:lstStyle/>
+          <a:p>
+            <a:pPr algn="l">
+              <a:lnSpc>
+                <a:spcPct val="122000"/>
+              </a:lnSpc>
+              <a:spcAft>
+                <a:spcPts val="900"/>
+              </a:spcAft>
+            </a:pPr>
+            <a:r>
+              <a:rPr sz="1200" b="1">
+                <a:solidFill>
+                  <a:srgbClr val="1A1A1A"/>
+                </a:solidFill>
+                <a:latin typeface="Calibri"/>
+              </a:rPr>
+              <a:t>naive  </a:t>
+            </a:r>
+            <a:r>
+              <a:rPr sz="1200" b="0">
+                <a:solidFill>
+                  <a:srgbClr val="595959"/>
+                </a:solidFill>
+                <a:latin typeface="Calibri"/>
+              </a:rPr>
+              <a:t>prints a probability and a rank, and names the student as male. Digits, scoring words, gender.</a:t>
+            </a:r>
+          </a:p>
+          <a:p>
+            <a:pPr algn="l">
+              <a:lnSpc>
+                <a:spcPct val="122000"/>
+              </a:lnSpc>
+              <a:spcAft>
+                <a:spcPts val="900"/>
+              </a:spcAft>
+            </a:pPr>
+            <a:r>
+              <a:rPr sz="1200" b="1">
+                <a:solidFill>
+                  <a:srgbClr val="F6861F"/>
+                </a:solidFill>
+                <a:latin typeface="Calibri"/>
+              </a:rPr>
+              <a:t>guarded  </a:t>
+            </a:r>
+            <a:r>
+              <a:rPr sz="1200" b="0">
+                <a:solidFill>
+                  <a:srgbClr val="595959"/>
+                </a:solidFill>
+                <a:latin typeface="Calibri"/>
+              </a:rPr>
+              <a:t>behind on tuition fees, may need support navigating their course. Plain, and clean.</a:t>
+            </a:r>
+          </a:p>
+          <a:p>
+            <a:pPr algn="l">
+              <a:lnSpc>
+                <a:spcPct val="122000"/>
+              </a:lnSpc>
+              <a:spcAft>
+                <a:spcPts val="900"/>
+              </a:spcAft>
+            </a:pPr>
+            <a:r>
+              <a:rPr sz="1200" b="1">
+                <a:solidFill>
+                  <a:srgbClr val="1A1A1A"/>
+                </a:solidFill>
+                <a:latin typeface="Calibri"/>
+              </a:rPr>
+              <a:t>What it bought</a:t>
+            </a:r>
+            <a:r>
+              <a:rPr sz="1200" b="0">
+                <a:solidFill>
+                  <a:srgbClr val="595959"/>
+                </a:solidFill>
+                <a:latin typeface="Calibri"/>
+              </a:rPr>
+              <a:t>: fluency, and words for the course code and a parent's occupation the table refuses to touch, and one note that over-reached. The verifier is necessary, not sufficient.</a:t>
+            </a:r>
+          </a:p>
+        </p:txBody>
+      </p:sp>
+      <p:sp>
+        <p:nvSpPr>
+          <p:cNvPr id="10" name="TextBox 9"/>
+          <p:cNvSpPr txBox="1"/>
+          <p:nvPr/>
+        </p:nvSpPr>
+        <p:spPr>
+          <a:xfrm>
+            <a:off x="566928" y="6236208"/>
+            <a:ext cx="11057839" cy="411480"/>
+          </a:xfrm>
+          <a:prstGeom prst="rect">
+            <a:avLst/>
+          </a:prstGeom>
+          <a:noFill/>
+        </p:spPr>
+        <p:txBody>
+          <a:bodyPr wrap="square" lIns="0" rIns="0" tIns="0" bIns="0">
+            <a:spAutoFit/>
+          </a:bodyPr>
+          <a:lstStyle/>
+          <a:p>
+            <a:pPr algn="l">
+              <a:lnSpc>
+                <a:spcPct val="115000"/>
+              </a:lnSpc>
+              <a:spcAft>
+                <a:spcPts val="600"/>
+              </a:spcAft>
+            </a:pPr>
+            <a:r>
+              <a:rPr sz="1300" b="1">
+                <a:solidFill>
+                  <a:srgbClr val="1A1A1A"/>
+                </a:solidFill>
+                <a:latin typeface="Calibri"/>
+              </a:rPr>
+              <a:t>A prompt is a request. The verifier is the control. The whole notebook runs for a grader with no key, off a committed cache of every prompt and every response.</a:t>
             </a:r>
           </a:p>
         </p:txBody>

--- a/presentations/technical.pptx
+++ b/presentations/technical.pptx
@@ -17,7 +17,6 @@
     <p:sldId id="265" r:id="rId16"/>
     <p:sldId id="266" r:id="rId17"/>
     <p:sldId id="267" r:id="rId18"/>
-    <p:sldId id="268" r:id="rId19"/>
   </p:sldIdLst>
   <p:sldSz cx="12191695" cy="6858000" type="screen4x3"/>
   <p:notesSz cx="6858000" cy="9144000"/>
@@ -7531,529 +7530,6 @@
                 <a:latin typeface="Calibri"/>
               </a:rPr>
               <a:t>A dropout model is not a scoreboard. It is a decision about which students get help. The right way to use this one is as a ranked prompt for a support team, checked by a person.</a:t>
-            </a:r>
-          </a:p>
-        </p:txBody>
-      </p:sp>
-    </p:spTree>
-  </p:cSld>
-  <p:clrMapOvr>
-    <a:masterClrMapping/>
-  </p:clrMapOvr>
-</p:sld>
-</file>
-
-<file path=ppt/slides/slide13.xml><?xml version="1.0" encoding="utf-8"?>
-<p:sld xmlns:a="http://schemas.openxmlformats.org/drawingml/2006/main" xmlns:p="http://schemas.openxmlformats.org/presentationml/2006/main" xmlns:r="http://schemas.openxmlformats.org/officeDocument/2006/relationships">
-  <p:cSld>
-    <p:spTree>
-      <p:nvGrpSpPr>
-        <p:cNvPr id="1" name=""/>
-        <p:cNvGrpSpPr/>
-        <p:nvPr/>
-      </p:nvGrpSpPr>
-      <p:grpSpPr/>
-      <p:sp>
-        <p:nvSpPr>
-          <p:cNvPr id="2" name="TextBox 1"/>
-          <p:cNvSpPr txBox="1"/>
-          <p:nvPr/>
-        </p:nvSpPr>
-        <p:spPr>
-          <a:xfrm>
-            <a:off x="566928" y="457200"/>
-            <a:ext cx="11057839" cy="548640"/>
-          </a:xfrm>
-          <a:prstGeom prst="rect">
-            <a:avLst/>
-          </a:prstGeom>
-          <a:noFill/>
-        </p:spPr>
-        <p:txBody>
-          <a:bodyPr wrap="square" lIns="0" rIns="0" tIns="0" bIns="0">
-            <a:spAutoFit/>
-          </a:bodyPr>
-          <a:lstStyle/>
-          <a:p>
-            <a:pPr algn="l">
-              <a:spcAft>
-                <a:spcPts val="600"/>
-              </a:spcAft>
-            </a:pPr>
-            <a:r>
-              <a:rPr sz="2900" b="1">
-                <a:solidFill>
-                  <a:srgbClr val="1A1A1A"/>
-                </a:solidFill>
-                <a:latin typeface="Cambria"/>
-              </a:rPr>
-              <a:t>Bonus. A language model, kept behind a verifier</a:t>
-            </a:r>
-          </a:p>
-        </p:txBody>
-      </p:sp>
-      <p:sp>
-        <p:nvSpPr>
-          <p:cNvPr id="3" name="TextBox 2"/>
-          <p:cNvSpPr txBox="1"/>
-          <p:nvPr/>
-        </p:nvSpPr>
-        <p:spPr>
-          <a:xfrm>
-            <a:off x="566928" y="1033271"/>
-            <a:ext cx="11057839" cy="274320"/>
-          </a:xfrm>
-          <a:prstGeom prst="rect">
-            <a:avLst/>
-          </a:prstGeom>
-          <a:noFill/>
-        </p:spPr>
-        <p:txBody>
-          <a:bodyPr wrap="square" lIns="0" rIns="0" tIns="0" bIns="0">
-            <a:spAutoFit/>
-          </a:bodyPr>
-          <a:lstStyle/>
-          <a:p>
-            <a:pPr algn="l">
-              <a:spcAft>
-                <a:spcPts val="600"/>
-              </a:spcAft>
-            </a:pPr>
-            <a:r>
-              <a:rPr sz="1200" b="0">
-                <a:solidFill>
-                  <a:srgbClr val="595959"/>
-                </a:solidFill>
-                <a:latin typeface="Calibri"/>
-              </a:rPr>
-              <a:t>SHAP values a tutor cannot read, turned into a note a tutor can act on. Step 9, optional.</a:t>
-            </a:r>
-          </a:p>
-        </p:txBody>
-      </p:sp>
-      <p:sp>
-        <p:nvSpPr>
-          <p:cNvPr id="4" name="TextBox 3"/>
-          <p:cNvSpPr txBox="1"/>
-          <p:nvPr/>
-        </p:nvSpPr>
-        <p:spPr>
-          <a:xfrm>
-            <a:off x="566928" y="1600200"/>
-            <a:ext cx="6126480" cy="4389120"/>
-          </a:xfrm>
-          <a:prstGeom prst="rect">
-            <a:avLst/>
-          </a:prstGeom>
-          <a:noFill/>
-        </p:spPr>
-        <p:txBody>
-          <a:bodyPr wrap="square" lIns="0" rIns="0" tIns="0" bIns="0">
-            <a:spAutoFit/>
-          </a:bodyPr>
-          <a:lstStyle/>
-          <a:p>
-            <a:pPr algn="l">
-              <a:lnSpc>
-                <a:spcPct val="125000"/>
-              </a:lnSpc>
-              <a:spcAft>
-                <a:spcPts val="900"/>
-              </a:spcAft>
-            </a:pPr>
-            <a:r>
-              <a:rPr sz="1300" b="0">
-                <a:solidFill>
-                  <a:srgbClr val="595959"/>
-                </a:solidFill>
-                <a:latin typeface="Calibri"/>
-              </a:rPr>
-              <a:t>SHAP says </a:t>
-            </a:r>
-            <a:r>
-              <a:rPr sz="1300" b="1">
-                <a:solidFill>
-                  <a:srgbClr val="1A1A1A"/>
-                </a:solidFill>
-                <a:latin typeface="Calibri"/>
-              </a:rPr>
-              <a:t>Tuition fees up to date: +0.68</a:t>
-            </a:r>
-            <a:r>
-              <a:rPr sz="1300" b="0">
-                <a:solidFill>
-                  <a:srgbClr val="595959"/>
-                </a:solidFill>
-                <a:latin typeface="Calibri"/>
-              </a:rPr>
-              <a:t>. True, and useless to the tutor who picks up the phone. A language model turns a student's top drivers into two plain sentences, which is the one thing it is genuinely good for here.</a:t>
-            </a:r>
-          </a:p>
-          <a:p>
-            <a:pPr algn="l">
-              <a:lnSpc>
-                <a:spcPct val="125000"/>
-              </a:lnSpc>
-              <a:spcAft>
-                <a:spcPts val="900"/>
-              </a:spcAft>
-            </a:pPr>
-            <a:r>
-              <a:rPr sz="1300" b="1">
-                <a:solidFill>
-                  <a:srgbClr val="1A1A1A"/>
-                </a:solidFill>
-                <a:latin typeface="Calibri"/>
-              </a:rPr>
-              <a:t>Handed the numbers with no rules, it does the forbidden thing</a:t>
-            </a:r>
-            <a:r>
-              <a:rPr sz="1300" b="0">
-                <a:solidFill>
-                  <a:srgbClr val="595959"/>
-                </a:solidFill>
-                <a:latin typeface="Calibri"/>
-              </a:rPr>
-              <a:t>. It prints probabilities and admission scores, reads a mother's occupation as low status, and names the student's gender. So the guarded prompt bans numbers, scoring words, any off-list driver, and gender, though the model leans on it at SHAP 0.301.</a:t>
-            </a:r>
-          </a:p>
-          <a:p>
-            <a:pPr algn="l">
-              <a:lnSpc>
-                <a:spcPct val="125000"/>
-              </a:lnSpc>
-              <a:spcAft>
-                <a:spcPts val="900"/>
-              </a:spcAft>
-            </a:pPr>
-            <a:r>
-              <a:rPr sz="1300" b="1">
-                <a:solidFill>
-                  <a:srgbClr val="1A1A1A"/>
-                </a:solidFill>
-                <a:latin typeface="Calibri"/>
-              </a:rPr>
-              <a:t>Then a cell checks the prompt actually held.</a:t>
-            </a:r>
-            <a:r>
-              <a:rPr sz="1300" b="0">
-                <a:solidFill>
-                  <a:srgbClr val="595959"/>
-                </a:solidFill>
-                <a:latin typeface="Calibri"/>
-              </a:rPr>
-              <a:t> The rules-engine baseline passes by construction. The language model has to be watched.</a:t>
-            </a:r>
-          </a:p>
-        </p:txBody>
-      </p:sp>
-      <p:sp>
-        <p:nvSpPr>
-          <p:cNvPr id="5" name="TextBox 4"/>
-          <p:cNvSpPr txBox="1"/>
-          <p:nvPr/>
-        </p:nvSpPr>
-        <p:spPr>
-          <a:xfrm>
-            <a:off x="6903720" y="1691640"/>
-            <a:ext cx="2377440" cy="603504"/>
-          </a:xfrm>
-          <a:prstGeom prst="rect">
-            <a:avLst/>
-          </a:prstGeom>
-          <a:noFill/>
-        </p:spPr>
-        <p:txBody>
-          <a:bodyPr wrap="square" lIns="0" rIns="0" tIns="0" bIns="0">
-            <a:spAutoFit/>
-          </a:bodyPr>
-          <a:lstStyle/>
-          <a:p>
-            <a:pPr algn="l">
-              <a:spcAft>
-                <a:spcPts val="0"/>
-              </a:spcAft>
-            </a:pPr>
-            <a:r>
-              <a:rPr sz="4400" b="1">
-                <a:solidFill>
-                  <a:srgbClr val="1A1A1A"/>
-                </a:solidFill>
-                <a:latin typeface="Cambria"/>
-              </a:rPr>
-              <a:t>0 / 5</a:t>
-            </a:r>
-          </a:p>
-        </p:txBody>
-      </p:sp>
-      <p:sp>
-        <p:nvSpPr>
-          <p:cNvPr id="6" name="TextBox 5"/>
-          <p:cNvSpPr txBox="1"/>
-          <p:nvPr/>
-        </p:nvSpPr>
-        <p:spPr>
-          <a:xfrm>
-            <a:off x="6903720" y="2261616"/>
-            <a:ext cx="2377440" cy="457200"/>
-          </a:xfrm>
-          <a:prstGeom prst="rect">
-            <a:avLst/>
-          </a:prstGeom>
-          <a:noFill/>
-        </p:spPr>
-        <p:txBody>
-          <a:bodyPr wrap="square" lIns="0" rIns="0" tIns="0" bIns="0">
-            <a:spAutoFit/>
-          </a:bodyPr>
-          <a:lstStyle/>
-          <a:p>
-            <a:pPr algn="l">
-              <a:lnSpc>
-                <a:spcPct val="115000"/>
-              </a:lnSpc>
-              <a:spcAft>
-                <a:spcPts val="600"/>
-              </a:spcAft>
-            </a:pPr>
-            <a:r>
-              <a:rPr sz="1100" b="0">
-                <a:solidFill>
-                  <a:srgbClr val="767676"/>
-                </a:solidFill>
-                <a:latin typeface="Calibri"/>
-              </a:rPr>
-              <a:t>naive prompt safe to read</a:t>
-            </a:r>
-          </a:p>
-        </p:txBody>
-      </p:sp>
-      <p:sp>
-        <p:nvSpPr>
-          <p:cNvPr id="7" name="TextBox 6"/>
-          <p:cNvSpPr txBox="1"/>
-          <p:nvPr/>
-        </p:nvSpPr>
-        <p:spPr>
-          <a:xfrm>
-            <a:off x="9418320" y="1691640"/>
-            <a:ext cx="2377440" cy="603504"/>
-          </a:xfrm>
-          <a:prstGeom prst="rect">
-            <a:avLst/>
-          </a:prstGeom>
-          <a:noFill/>
-        </p:spPr>
-        <p:txBody>
-          <a:bodyPr wrap="square" lIns="0" rIns="0" tIns="0" bIns="0">
-            <a:spAutoFit/>
-          </a:bodyPr>
-          <a:lstStyle/>
-          <a:p>
-            <a:pPr algn="l">
-              <a:spcAft>
-                <a:spcPts val="0"/>
-              </a:spcAft>
-            </a:pPr>
-            <a:r>
-              <a:rPr sz="4400" b="1">
-                <a:solidFill>
-                  <a:srgbClr val="F6861F"/>
-                </a:solidFill>
-                <a:latin typeface="Cambria"/>
-              </a:rPr>
-              <a:t>5 / 5</a:t>
-            </a:r>
-          </a:p>
-        </p:txBody>
-      </p:sp>
-      <p:sp>
-        <p:nvSpPr>
-          <p:cNvPr id="8" name="TextBox 7"/>
-          <p:cNvSpPr txBox="1"/>
-          <p:nvPr/>
-        </p:nvSpPr>
-        <p:spPr>
-          <a:xfrm>
-            <a:off x="9418320" y="2261616"/>
-            <a:ext cx="2377440" cy="457200"/>
-          </a:xfrm>
-          <a:prstGeom prst="rect">
-            <a:avLst/>
-          </a:prstGeom>
-          <a:noFill/>
-        </p:spPr>
-        <p:txBody>
-          <a:bodyPr wrap="square" lIns="0" rIns="0" tIns="0" bIns="0">
-            <a:spAutoFit/>
-          </a:bodyPr>
-          <a:lstStyle/>
-          <a:p>
-            <a:pPr algn="l">
-              <a:lnSpc>
-                <a:spcPct val="115000"/>
-              </a:lnSpc>
-              <a:spcAft>
-                <a:spcPts val="600"/>
-              </a:spcAft>
-            </a:pPr>
-            <a:r>
-              <a:rPr sz="1100" b="0">
-                <a:solidFill>
-                  <a:srgbClr val="767676"/>
-                </a:solidFill>
-                <a:latin typeface="Calibri"/>
-              </a:rPr>
-              <a:t>guarded prompt safe to read</a:t>
-            </a:r>
-          </a:p>
-        </p:txBody>
-      </p:sp>
-      <p:sp>
-        <p:nvSpPr>
-          <p:cNvPr id="9" name="TextBox 8"/>
-          <p:cNvSpPr txBox="1"/>
-          <p:nvPr/>
-        </p:nvSpPr>
-        <p:spPr>
-          <a:xfrm>
-            <a:off x="6903720" y="3383280"/>
-            <a:ext cx="4800600" cy="2468880"/>
-          </a:xfrm>
-          <a:prstGeom prst="rect">
-            <a:avLst/>
-          </a:prstGeom>
-          <a:noFill/>
-        </p:spPr>
-        <p:txBody>
-          <a:bodyPr wrap="square" lIns="0" rIns="0" tIns="0" bIns="0">
-            <a:spAutoFit/>
-          </a:bodyPr>
-          <a:lstStyle/>
-          <a:p>
-            <a:pPr algn="l">
-              <a:lnSpc>
-                <a:spcPct val="122000"/>
-              </a:lnSpc>
-              <a:spcAft>
-                <a:spcPts val="900"/>
-              </a:spcAft>
-            </a:pPr>
-            <a:r>
-              <a:rPr sz="1200" b="1">
-                <a:solidFill>
-                  <a:srgbClr val="1A1A1A"/>
-                </a:solidFill>
-                <a:latin typeface="Calibri"/>
-              </a:rPr>
-              <a:t>naive  </a:t>
-            </a:r>
-            <a:r>
-              <a:rPr sz="1200" b="0">
-                <a:solidFill>
-                  <a:srgbClr val="595959"/>
-                </a:solidFill>
-                <a:latin typeface="Calibri"/>
-              </a:rPr>
-              <a:t>prints a probability and a rank, and names the student as male. Digits, scoring words, gender.</a:t>
-            </a:r>
-          </a:p>
-          <a:p>
-            <a:pPr algn="l">
-              <a:lnSpc>
-                <a:spcPct val="122000"/>
-              </a:lnSpc>
-              <a:spcAft>
-                <a:spcPts val="900"/>
-              </a:spcAft>
-            </a:pPr>
-            <a:r>
-              <a:rPr sz="1200" b="1">
-                <a:solidFill>
-                  <a:srgbClr val="F6861F"/>
-                </a:solidFill>
-                <a:latin typeface="Calibri"/>
-              </a:rPr>
-              <a:t>guarded  </a:t>
-            </a:r>
-            <a:r>
-              <a:rPr sz="1200" b="0">
-                <a:solidFill>
-                  <a:srgbClr val="595959"/>
-                </a:solidFill>
-                <a:latin typeface="Calibri"/>
-              </a:rPr>
-              <a:t>behind on tuition fees, may need support navigating their course. Plain, and clean.</a:t>
-            </a:r>
-          </a:p>
-          <a:p>
-            <a:pPr algn="l">
-              <a:lnSpc>
-                <a:spcPct val="122000"/>
-              </a:lnSpc>
-              <a:spcAft>
-                <a:spcPts val="900"/>
-              </a:spcAft>
-            </a:pPr>
-            <a:r>
-              <a:rPr sz="1200" b="1">
-                <a:solidFill>
-                  <a:srgbClr val="1A1A1A"/>
-                </a:solidFill>
-                <a:latin typeface="Calibri"/>
-              </a:rPr>
-              <a:t>What it bought</a:t>
-            </a:r>
-            <a:r>
-              <a:rPr sz="1200" b="0">
-                <a:solidFill>
-                  <a:srgbClr val="595959"/>
-                </a:solidFill>
-                <a:latin typeface="Calibri"/>
-              </a:rPr>
-              <a:t>: fluency, and words for the course code and a parent's occupation the table refuses to touch, and one note that over-reached. The verifier is necessary, not sufficient.</a:t>
-            </a:r>
-          </a:p>
-        </p:txBody>
-      </p:sp>
-      <p:sp>
-        <p:nvSpPr>
-          <p:cNvPr id="10" name="TextBox 9"/>
-          <p:cNvSpPr txBox="1"/>
-          <p:nvPr/>
-        </p:nvSpPr>
-        <p:spPr>
-          <a:xfrm>
-            <a:off x="566928" y="6236208"/>
-            <a:ext cx="11057839" cy="411480"/>
-          </a:xfrm>
-          <a:prstGeom prst="rect">
-            <a:avLst/>
-          </a:prstGeom>
-          <a:noFill/>
-        </p:spPr>
-        <p:txBody>
-          <a:bodyPr wrap="square" lIns="0" rIns="0" tIns="0" bIns="0">
-            <a:spAutoFit/>
-          </a:bodyPr>
-          <a:lstStyle/>
-          <a:p>
-            <a:pPr algn="l">
-              <a:lnSpc>
-                <a:spcPct val="115000"/>
-              </a:lnSpc>
-              <a:spcAft>
-                <a:spcPts val="600"/>
-              </a:spcAft>
-            </a:pPr>
-            <a:r>
-              <a:rPr sz="1300" b="1">
-                <a:solidFill>
-                  <a:srgbClr val="1A1A1A"/>
-                </a:solidFill>
-                <a:latin typeface="Calibri"/>
-              </a:rPr>
-              <a:t>A prompt is a request. The verifier is the control. The whole notebook runs for a grader with no key, off a committed cache of every prompt and every response.</a:t>
             </a:r>
           </a:p>
         </p:txBody>

--- a/presentations/technical.pptx
+++ b/presentations/technical.pptx
@@ -3475,7 +3475,7 @@
                 </a:solidFill>
                 <a:latin typeface="Calibri"/>
               </a:rPr>
-              <a:t>Debtors drop out at 76 percent against 34. Demanding the model flag both groups equally is demanding it be wrong on purpose. So the real-world gap goes into the table, next to the metric. If the flagging gap is about the size of the outcome gap, the model reports a disparity. If it is bigger, the model makes one.</a:t>
+              <a:t>Debtors drop out at 76 percent against 34, so demanding equal flagging is demanding the model be wrong on purpose. The real-world gap sits next to the metric, so that a flagging gap near the outcome gap reports a disparity, and a bigger one makes one.</a:t>
             </a:r>
           </a:p>
         </p:txBody>
@@ -4256,7 +4256,7 @@
                 </a:solidFill>
                 <a:latin typeface="Calibri"/>
               </a:rPr>
-              <a:t>Real gap 0.392, flagging gap 0.369. The model's disparity is smaller than the one in the world. Its DI ratio of 0.545 sits below the 0.8 line, and the old audit called that a failure. It is not.</a:t>
+              <a:t>Real gap 0.392 and flagging gap 0.369, so the model's disparity is smaller than the world's. Its DI ratio of 0.545 sits below the 0.8 line the old audit called a failure, but it is not one.</a:t>
             </a:r>
           </a:p>
           <a:p>
@@ -4284,7 +4284,7 @@
                 </a:solidFill>
                 <a:latin typeface="Calibri"/>
               </a:rPr>
-              <a:t>Real gap 0.238, flagging gap 0.350. The gap the model creates is bigger than the gap in the world. That is amplification.</a:t>
+              <a:t>Real gap 0.238 and flagging gap 0.350, so the gap the model creates is bigger than the gap in the world, and that is amplification.</a:t>
             </a:r>
           </a:p>
         </p:txBody>
@@ -5130,7 +5130,7 @@
                 </a:solidFill>
                 <a:latin typeface="Calibri"/>
               </a:rPr>
-              <a:t>women who go on to drop out are never flagged at all. For men it is closer to one in eight. That appears in no flagging-rate metric. It only appears once you stop counting flags and start counting errors.</a:t>
+              <a:t>of the women who go on to drop out are never flagged at all, and for men it is closer to one in eight. It appears in no flagging-rate metric, and only once you count errors instead of flags.</a:t>
             </a:r>
           </a:p>
         </p:txBody>
@@ -5324,7 +5324,7 @@
                 </a:solidFill>
                 <a:latin typeface="Calibri"/>
               </a:rPr>
-              <a:t>Step 4 refused to call a 0.005 lead real against a 0.020 slice swing. Then I came here and quoted fairness numbers to three decimals off one 726-row split, without asking what the noise was. So I went back and asked. 2,000 seeded bootstrap resamples.</a:t>
+              <a:t>Step 4 refused to call a 0.005 lead real against a 0.020 swing, and then I quoted fairness numbers to three decimals off one 726-row split without asking what the noise was. So I went back and asked, with 2,000 seeded bootstrap resamples.</a:t>
             </a:r>
           </a:p>
         </p:txBody>
@@ -5409,7 +5409,7 @@
                 </a:solidFill>
                 <a:latin typeface="Calibri"/>
               </a:rPr>
-              <a:t>Women are the majority of the test set and the minority of its dropouts. The recall gap rests on 130 students, not 726.</a:t>
+              <a:t>Women are the majority of the test set and the minority of its dropouts, so the recall gap rests on 130 students rather than 726.</a:t>
             </a:r>
           </a:p>
         </p:txBody>
@@ -6905,7 +6905,7 @@
                 </a:solidFill>
                 <a:latin typeface="Calibri"/>
               </a:rPr>
-              <a:t> Eight points of recall against nineteen.</a:t>
+              <a:t> It is eight points of recall against nineteen.</a:t>
             </a:r>
           </a:p>
         </p:txBody>
@@ -7529,7 +7529,7 @@
                 </a:solidFill>
                 <a:latin typeface="Calibri"/>
               </a:rPr>
-              <a:t>A dropout model is not a scoreboard. It is a decision about which students get help. The right way to use this one is as a ranked prompt for a support team, checked by a person.</a:t>
+              <a:t>A dropout model is not a scoreboard but a decision about which students get help, and the right way to use this one is as a ranked prompt for a support team, checked by a person.</a:t>
             </a:r>
           </a:p>
         </p:txBody>
@@ -7871,7 +7871,7 @@
                 </a:solidFill>
                 <a:latin typeface="Calibri"/>
               </a:rPr>
-              <a:t>The task is a yes or no call, Dropout against Graduate. Enrolled means the outcome is not settled, so those rows cannot teach the model what dropout looks like.</a:t>
+              <a:t>The task is a yes-or-no call between Dropout and Graduate, and the Enrolled rows have no settled outcome, so they cannot teach the model.</a:t>
             </a:r>
           </a:p>
           <a:p>
@@ -7890,7 +7890,7 @@
                 </a:solidFill>
                 <a:latin typeface="Calibri"/>
               </a:rPr>
-              <a:t>The twelve curricular columns record first and second semester performance. They predict dropout almost perfectly, because a student failing courses is a student already leaving. The model sees only what is known at enrollment.</a:t>
+              <a:t>The twelve curricular columns predict dropout almost perfectly, because a failing student is already leaving. So the model sees only what is known at enrollment.</a:t>
             </a:r>
           </a:p>
           <a:p>
@@ -7993,7 +7993,7 @@
                 </a:solidFill>
                 <a:latin typeface="Calibri"/>
               </a:rPr>
-              <a:t>. A model that calls everyone a graduate is right 61 percent of the time and catches nobody.</a:t>
+              <a:t>. Call everyone a graduate and you are right 61 percent of the time and catch nobody.</a:t>
             </a:r>
           </a:p>
         </p:txBody>
@@ -8855,7 +8855,7 @@
                 </a:solidFill>
                 <a:latin typeface="Calibri"/>
               </a:rPr>
-              <a:t>That is not a background fact. A student who has stopped paying is often a student already leaving. It nearly is the outcome, kept but watched, and removing it costs about five points of PR AUC.</a:t>
+              <a:t>A student who has stopped paying is often already leaving, so this feature nearly is the outcome, and it is kept but watched, because removing it costs about five points of PR-AUC.</a:t>
             </a:r>
           </a:p>
         </p:txBody>
@@ -8897,7 +8897,7 @@
                 </a:solidFill>
                 <a:latin typeface="Calibri"/>
               </a:rPr>
-              <a:t>These group rates come back on slide 10. They are the reason the fairness audit had to be rewritten.</a:t>
+              <a:t>These group rates come back on slide 10, and they are the reason the fairness audit had to be rewritten.</a:t>
             </a:r>
           </a:p>
         </p:txBody>
@@ -9083,7 +9083,7 @@
                 </a:solidFill>
                 <a:latin typeface="Calibri"/>
               </a:rPr>
-              <a:t>Age has the strongest link, p = 9.2e-65. Older entrants drop out more. Admission grade and previous qualification grade follow. Unemployment and inflation show no real difference, p = 0.75 and 0.21.</a:t>
+              <a:t>Age has the strongest link at p = 9.2e-65, because older entrants drop out more, and admission grade and previous qualification grade follow, while unemployment and inflation show no real difference at p = 0.75 and 0.21.</a:t>
             </a:r>
           </a:p>
           <a:p>
@@ -9324,7 +9324,7 @@
                 </a:solidFill>
                 <a:latin typeface="Calibri"/>
               </a:rPr>
-              <a:t>A socioeconomic pressure score, one point each for owing money, falling behind on tuition, and holding no scholarship. It ranked first on mutual information, ahead of every raw column in the file.</a:t>
+              <a:t>I built a socioeconomic pressure score, one point each for owing money, falling behind on tuition, and holding no scholarship, and it ranked first on mutual information ahead of every raw column in the file.</a:t>
             </a:r>
           </a:p>
           <a:p>
@@ -9343,7 +9343,7 @@
                 </a:solidFill>
                 <a:latin typeface="Calibri"/>
               </a:rPr>
-              <a:t>Then the model said owing the school money makes a student less likely to drop out.</a:t>
+              <a:t>Then the model turned around and said that owing the school money makes a student less likely to drop out.</a:t>
             </a:r>
           </a:p>
         </p:txBody>
@@ -9412,7 +9412,7 @@
                 </a:solidFill>
                 <a:latin typeface="Calibri"/>
               </a:rPr>
-              <a:t>One value. Exactly 2, on all 2,904 training rows. The score was three columns the matrix already held.</a:t>
+              <a:t>It takes one value, exactly 2, on all 2,904 training rows, because the score was three columns the matrix already held.</a:t>
             </a:r>
           </a:p>
         </p:txBody>
@@ -9765,7 +9765,7 @@
                 </a:solidFill>
                 <a:latin typeface="Calibri"/>
               </a:rPr>
-              <a:t>Slide 4 said overlap was fine. VIF said so.</a:t>
+              <a:t>Slide 4 said overlap was fine because VIF said so.</a:t>
             </a:r>
             <a:r>
               <a:rPr sz="1200" b="0">
@@ -9774,7 +9774,7 @@
                 </a:solidFill>
                 <a:latin typeface="Calibri"/>
               </a:rPr>
-              <a:t> VIF only reads the six numbers. It never saw the category columns, and never saw a feature built after it ran.</a:t>
+              <a:t> But VIF only reads the six numbers, so it never saw the category columns and never saw a feature built after it ran.</a:t>
             </a:r>
           </a:p>
         </p:txBody>
@@ -9816,7 +9816,7 @@
                 </a:solidFill>
                 <a:latin typeface="Calibri"/>
               </a:rPr>
-              <a:t>Same model, same data. The only change is whether the score sits in the matrix.</a:t>
+              <a:t>The model and the data are the same, and the only change is whether the score sits in the matrix.</a:t>
             </a:r>
           </a:p>
         </p:txBody>
@@ -10262,7 +10262,7 @@
                 </a:solidFill>
                 <a:latin typeface="Calibri"/>
               </a:rPr>
-              <a:t>Two signs flip. The model reads owing money as protective and a scholarship as a risk. The data says the opposite, loudly.</a:t>
+              <a:t>Two signs flip, because the model reads owing money as protective and a scholarship as a risk, when the data says the opposite.</a:t>
             </a:r>
           </a:p>
           <a:p>
@@ -10281,7 +10281,7 @@
                 </a:solidFill>
                 <a:latin typeface="Calibri"/>
               </a:rPr>
-              <a:t>Accuracy never moved. The score carried no information the model did not already have. What it did was make the model unreadable, and every explanation in Step 5 is read off these coefficients.</a:t>
+              <a:t>Accuracy never moved, because the score carried no new information. It only made the model unreadable, and every Step 5 explanation is read off these coefficients.</a:t>
             </a:r>
           </a:p>
         </p:txBody>
@@ -10419,7 +10419,7 @@
                 </a:solidFill>
                 <a:latin typeface="Calibri"/>
               </a:rPr>
-              <a:t>A feature built from columns that stay in the matrix adds nothing to a linear model. It earns its place only by replacing its sources.</a:t>
+              <a:t>A feature built from columns that stay in the matrix adds nothing to a linear model, so it earns its place only by replacing its sources.</a:t>
             </a:r>
           </a:p>
         </p:txBody>
@@ -10489,7 +10489,7 @@
                 </a:solidFill>
                 <a:latin typeface="Calibri"/>
               </a:rPr>
-              <a:t> equals (Nacionality != 1) on 100 percent of rows. The same column twice.</a:t>
+              <a:t> equals (Nacionality != 1) on 100 percent of rows, which is the same column twice.</a:t>
             </a:r>
           </a:p>
           <a:p>
@@ -10517,7 +10517,7 @@
                 </a:solidFill>
                 <a:latin typeface="Calibri"/>
               </a:rPr>
-              <a:t> is decided entirely by Course. Zero of 17 courses run both a day and an evening class.</a:t>
+              <a:t> is decided entirely by Course, because zero of the 17 courses run both a day and an evening class.</a:t>
             </a:r>
           </a:p>
         </p:txBody>
@@ -10559,7 +10559,7 @@
                 </a:solidFill>
                 <a:latin typeface="Calibri"/>
               </a:rPr>
-              <a:t>Five engineered features replace their sources. Four weak columns come out. Then the cost is measured, on training slices, rather than assumed.</a:t>
+              <a:t>Five engineered features replace their sources and four weak columns come out, and then the cost is measured on training slices rather than assumed.</a:t>
             </a:r>
           </a:p>
           <a:p>
@@ -10587,7 +10587,7 @@
                 </a:solidFill>
                 <a:latin typeface="Calibri"/>
               </a:rPr>
-              <a:t> lands sixth on mutual information at 0.0534, below the raw age column it bends. That score reads the whole age signal, so a cutoff drawn from it ranks lower, as it should.</a:t>
+              <a:t> lands sixth at 0.0534, below the raw age column it bends, because it reads the whole age signal, so a cutoff drawn from it ranks lower, as it should.</a:t>
             </a:r>
           </a:p>
         </p:txBody>
@@ -10932,7 +10932,7 @@
                 </a:solidFill>
                 <a:latin typeface="Calibri"/>
               </a:rPr>
-              <a:t>PCA takes seven of nine parts to reach 90 percent of the variation. Nothing to compress, which matches the low VIF. So PCA rides into Step 4 as a seventh model rather than sitting in a chart nobody uses.</a:t>
+              <a:t>PCA needs seven of its nine parts to reach 90 percent of the variance, so there is nothing to compress, which matches the low VIF, and it rides into Step 4 as a seventh model rather than a chart nobody uses.</a:t>
             </a:r>
           </a:p>
         </p:txBody>
@@ -10974,7 +10974,7 @@
                 </a:solidFill>
                 <a:latin typeface="Calibri"/>
               </a:rPr>
-              <a:t>Sixty percent of the columns gone, and the score went slightly up. Cutting 131 columns for free is the result.</a:t>
+              <a:t>Sixty percent of the columns are gone and the score went slightly up, so the result is 131 columns cut for free.</a:t>
             </a:r>
           </a:p>
         </p:txBody>
@@ -11070,7 +11070,7 @@
                 </a:solidFill>
                 <a:latin typeface="Calibri"/>
               </a:rPr>
-              <a:t>Tuned by cross-validation, five held-out slices of the training set. The test set is scored once.</a:t>
+              <a:t>Tuned by cross-validation on five held-out slices of the training set, with the test set scored once.</a:t>
             </a:r>
           </a:p>
         </p:txBody>
@@ -11935,7 +11935,7 @@
                 </a:solidFill>
                 <a:latin typeface="Calibri"/>
               </a:rPr>
-              <a:t>Each dot is one slice. The two ranges overlap almost completely, and the gap between the means disappears inside them.</a:t>
+              <a:t>Each dot is one slice, and the two ranges overlap almost completely, so the gap between the means disappears inside them.</a:t>
             </a:r>
           </a:p>
           <a:p>
@@ -11954,7 +11954,7 @@
                 </a:solidFill>
                 <a:latin typeface="Calibri"/>
               </a:rPr>
-              <a:t>XGBoost is not better than logistic regression here. It is tied with it, and it happened to land on top.</a:t>
+              <a:t>XGBoost is not better than logistic regression here but only tied with it, and it happened to land on top.</a:t>
             </a:r>
           </a:p>
         </p:txBody>
@@ -11996,7 +11996,7 @@
                 </a:solidFill>
                 <a:latin typeface="Calibri"/>
               </a:rPr>
-              <a:t>Logistic regression ships. Not because it scores highest, because it does not. When two models are tied, the tiebreak should be something that matters, and here that is whether a student can be told why they were flagged.</a:t>
+              <a:t>Logistic regression ships, and not because it scores highest. When two models tie, the tiebreak that matters is whether a student can be told why they were flagged.</a:t>
             </a:r>
           </a:p>
           <a:p>
@@ -12015,7 +12015,7 @@
                 </a:solidFill>
                 <a:latin typeface="Calibri"/>
               </a:rPr>
-              <a:t>PCA lands fourth, one thousandth behind. A principal component is a blend of nine columns, so a student flagged by it could never be told why in a sentence that means anything.</a:t>
+              <a:t>PCA lands fourth, a thousandth behind, and a component is a blend of nine columns, so it could never explain a flag in a sentence that means anything.</a:t>
             </a:r>
           </a:p>
         </p:txBody>
@@ -12057,7 +12057,7 @@
                 </a:solidFill>
                 <a:latin typeface="Calibri"/>
               </a:rPr>
-              <a:t>A gap smaller than the measured noise is not a gap. This deck has to keep that standard everywhere.</a:t>
+              <a:t>A gap smaller than the measured noise is not a gap, and this deck has to keep that standard everywhere.</a:t>
             </a:r>
           </a:p>
         </p:txBody>
@@ -12153,7 +12153,7 @@
                 </a:solidFill>
                 <a:latin typeface="Calibri"/>
               </a:rPr>
-              <a:t>Recall depends on the model and the cutoff together, not the model alone. The default cutoff is 0.5, and nobody chose it.</a:t>
+              <a:t>Recall depends on the model and the cutoff together rather than the model alone, and the default cutoff is 0.5, which nobody chose.</a:t>
             </a:r>
           </a:p>
         </p:txBody>
@@ -12935,7 +12935,7 @@
                 </a:solidFill>
                 <a:latin typeface="Calibri"/>
               </a:rPr>
-              <a:t> A staffing decision made by accident, by a library default. Move it to 45 percent and recall climbs to 0.796 on the same model and the same data.</a:t>
+              <a:t> It is a staffing decision made by accident, by a library default, and moving it to 45 percent climbs recall to 0.796 on the same model and the same data.</a:t>
             </a:r>
           </a:p>
         </p:txBody>
@@ -13405,7 +13405,7 @@
                 </a:solidFill>
                 <a:latin typeface="Calibri"/>
               </a:rPr>
-              <a:t>The chart caught me being sloppy, and the table had let me get away with it. I had written that staff time runs out long before the economics do.</a:t>
+              <a:t>The chart caught me being sloppy where the table had not. I had written that staff time runs out long before the economics do.</a:t>
             </a:r>
           </a:p>
           <a:p>
@@ -13443,7 +13443,7 @@
                 </a:solidFill>
                 <a:latin typeface="Calibri"/>
               </a:rPr>
-              <a:t>Staff capacity binds at 50 and 150 EUR per contact. At 300 EUR the money binds first, and the economics want fewer flags than the team could handle.</a:t>
+              <a:t>Staff capacity binds at 50 and 150 EUR per contact, but at 300 EUR the money binds first, and the economics want fewer flags than the team could handle.</a:t>
             </a:r>
           </a:p>
           <a:p>
@@ -13504,7 +13504,7 @@
                 </a:solidFill>
                 <a:latin typeface="Calibri"/>
               </a:rPr>
-              <a:t>The ranked list is the product. The binary flag is not. The cutoff goes at 0.445, to audit fairness and report one honest number.</a:t>
+              <a:t>The ranked list is the product and the binary flag is not, and the cutoff goes at 0.445 to audit fairness and report one honest number.</a:t>
             </a:r>
           </a:p>
         </p:txBody>
@@ -13656,7 +13656,7 @@
                 </a:solidFill>
                 <a:latin typeface="Calibri"/>
               </a:rPr>
-              <a:t>The first SHAP chart plotted one bar per column of the design matrix. But Course is not a column. It is seventeen category columns, so its importance got split into seventeen small bars while a single flag kept all its weight in one place.</a:t>
+              <a:t>The first SHAP chart plotted one bar per column of the design matrix, but Course is not one column and instead seventeen of them, so its importance split into seventeen small bars while a single flag kept all its weight in one place.</a:t>
             </a:r>
           </a:p>
         </p:txBody>
@@ -14393,7 +14393,7 @@
                 </a:solidFill>
                 <a:latin typeface="Calibri"/>
               </a:rPr>
-              <a:t> The largest single fragment of the strongest feature in the model sat fifth, behind four binary flags. Mother's occupation did not appear at all. A second bug hid here too. Unseeded 100-row sampling made the numbers drift, 0.90 one run and 0.68 the next, until the fix read all 2,904 rows.</a:t>
+              <a:t> The largest fragment of the strongest feature sat fifth, behind four flags, and mother's occupation did not appear at all. A second bug hid here too, because unseeded 100-row sampling drifted from 0.90 to 0.68 between runs, until the fix read all 2,904.</a:t>
             </a:r>
           </a:p>
         </p:txBody>
@@ -14522,7 +14522,7 @@
                 </a:solidFill>
                 <a:latin typeface="Calibri"/>
               </a:rPr>
-              <a:t>Course far ahead at 1.126. On raw association tuition led, but inside the model course leads. Neither a course nor a parent's occupation is a warning a student can act on. The model substantially finds students who started from further back.</a:t>
+              <a:t>Course sits far ahead at 1.126, and where raw association put tuition first, inside the model course leads. Neither a course nor a parent's job is something a student can act on, and the model mostly finds students who started further back.</a:t>
             </a:r>
           </a:p>
         </p:txBody>

--- a/presentations/technical.pptx
+++ b/presentations/technical.pptx
@@ -5,20 +5,20 @@
     <p:sldMasterId id="2147483648" r:id="rId1"/>
   </p:sldMasterIdLst>
   <p:sldIdLst>
-    <p:sldId id="256" r:id="rId7"/>
-    <p:sldId id="257" r:id="rId8"/>
-    <p:sldId id="258" r:id="rId9"/>
-    <p:sldId id="259" r:id="rId10"/>
-    <p:sldId id="260" r:id="rId11"/>
-    <p:sldId id="261" r:id="rId12"/>
-    <p:sldId id="262" r:id="rId13"/>
-    <p:sldId id="263" r:id="rId14"/>
-    <p:sldId id="264" r:id="rId15"/>
-    <p:sldId id="265" r:id="rId16"/>
-    <p:sldId id="266" r:id="rId17"/>
-    <p:sldId id="267" r:id="rId18"/>
+    <p:sldId id="256" r:id="rId2"/>
+    <p:sldId id="257" r:id="rId3"/>
+    <p:sldId id="258" r:id="rId4"/>
+    <p:sldId id="259" r:id="rId5"/>
+    <p:sldId id="260" r:id="rId6"/>
+    <p:sldId id="261" r:id="rId7"/>
+    <p:sldId id="262" r:id="rId8"/>
+    <p:sldId id="263" r:id="rId9"/>
+    <p:sldId id="264" r:id="rId10"/>
+    <p:sldId id="265" r:id="rId11"/>
+    <p:sldId id="266" r:id="rId12"/>
+    <p:sldId id="267" r:id="rId13"/>
   </p:sldIdLst>
-  <p:sldSz cx="12191695" cy="6858000" type="screen4x3"/>
+  <p:sldSz cx="12192000" cy="6858000"/>
   <p:notesSz cx="6858000" cy="9144000"/>
   <p:defaultTextStyle>
     <a:defPPr>
@@ -115,6 +115,22 @@
       </a:defRPr>
     </a:lvl9pPr>
   </p:defaultTextStyle>
+  <p:extLst>
+    <p:ext uri="{EFAFB233-063F-42B5-8137-9DF3F51BA10A}">
+      <p15:sldGuideLst xmlns:p15="http://schemas.microsoft.com/office/powerpoint/2012/main">
+        <p15:guide id="1" orient="horz" pos="2160">
+          <p15:clr>
+            <a:srgbClr val="A4A3A4"/>
+          </p15:clr>
+        </p15:guide>
+        <p15:guide id="2" pos="2880">
+          <p15:clr>
+            <a:srgbClr val="A4A3A4"/>
+          </p15:clr>
+        </p15:guide>
+      </p15:sldGuideLst>
+    </p:ext>
+  </p:extLst>
 </p:presentation>
 </file>
 
@@ -156,10 +172,9 @@
           <a:lstStyle/>
           <a:p>
             <a:r>
-              <a:rPr lang="en-US" smtClean="0"/>
+              <a:rPr lang="en-US"/>
               <a:t>Click to edit Master title style</a:t>
             </a:r>
-            <a:endParaRPr lang="en-US"/>
           </a:p>
         </p:txBody>
       </p:sp>
@@ -275,10 +290,9 @@
           </a:lstStyle>
           <a:p>
             <a:r>
-              <a:rPr lang="en-US" smtClean="0"/>
+              <a:rPr lang="en-US"/>
               <a:t>Click to edit Master subtitle style</a:t>
             </a:r>
-            <a:endParaRPr lang="en-US"/>
           </a:p>
         </p:txBody>
       </p:sp>
@@ -299,7 +313,7 @@
           <a:p>
             <a:fld id="{5BCAD085-E8A6-8845-BD4E-CB4CCA059FC4}" type="datetimeFigureOut">
               <a:rPr lang="en-US" smtClean="0"/>
-              <a:t>1/27/13</a:t>
+              <a:t>7/17/26</a:t>
             </a:fld>
             <a:endParaRPr lang="en-US"/>
           </a:p>
@@ -393,10 +407,9 @@
           <a:lstStyle/>
           <a:p>
             <a:r>
-              <a:rPr lang="en-US" smtClean="0"/>
+              <a:rPr lang="en-US"/>
               <a:t>Click to edit Master title style</a:t>
             </a:r>
-            <a:endParaRPr lang="en-US"/>
           </a:p>
         </p:txBody>
       </p:sp>
@@ -417,38 +430,37 @@
           <a:p>
             <a:pPr lvl="0"/>
             <a:r>
-              <a:rPr lang="en-US" smtClean="0"/>
+              <a:rPr lang="en-US"/>
               <a:t>Click to edit Master text styles</a:t>
             </a:r>
           </a:p>
           <a:p>
             <a:pPr lvl="1"/>
             <a:r>
-              <a:rPr lang="en-US" smtClean="0"/>
+              <a:rPr lang="en-US"/>
               <a:t>Second level</a:t>
             </a:r>
           </a:p>
           <a:p>
             <a:pPr lvl="2"/>
             <a:r>
-              <a:rPr lang="en-US" smtClean="0"/>
+              <a:rPr lang="en-US"/>
               <a:t>Third level</a:t>
             </a:r>
           </a:p>
           <a:p>
             <a:pPr lvl="3"/>
             <a:r>
-              <a:rPr lang="en-US" smtClean="0"/>
+              <a:rPr lang="en-US"/>
               <a:t>Fourth level</a:t>
             </a:r>
           </a:p>
           <a:p>
             <a:pPr lvl="4"/>
             <a:r>
-              <a:rPr lang="en-US" smtClean="0"/>
+              <a:rPr lang="en-US"/>
               <a:t>Fifth level</a:t>
             </a:r>
-            <a:endParaRPr lang="en-US"/>
           </a:p>
         </p:txBody>
       </p:sp>
@@ -469,7 +481,7 @@
           <a:p>
             <a:fld id="{5BCAD085-E8A6-8845-BD4E-CB4CCA059FC4}" type="datetimeFigureOut">
               <a:rPr lang="en-US" smtClean="0"/>
-              <a:t>1/27/13</a:t>
+              <a:t>7/17/26</a:t>
             </a:fld>
             <a:endParaRPr lang="en-US"/>
           </a:p>
@@ -568,10 +580,9 @@
           <a:lstStyle/>
           <a:p>
             <a:r>
-              <a:rPr lang="en-US" smtClean="0"/>
+              <a:rPr lang="en-US"/>
               <a:t>Click to edit Master title style</a:t>
             </a:r>
-            <a:endParaRPr lang="en-US"/>
           </a:p>
         </p:txBody>
       </p:sp>
@@ -597,38 +608,37 @@
           <a:p>
             <a:pPr lvl="0"/>
             <a:r>
-              <a:rPr lang="en-US" smtClean="0"/>
+              <a:rPr lang="en-US"/>
               <a:t>Click to edit Master text styles</a:t>
             </a:r>
           </a:p>
           <a:p>
             <a:pPr lvl="1"/>
             <a:r>
-              <a:rPr lang="en-US" smtClean="0"/>
+              <a:rPr lang="en-US"/>
               <a:t>Second level</a:t>
             </a:r>
           </a:p>
           <a:p>
             <a:pPr lvl="2"/>
             <a:r>
-              <a:rPr lang="en-US" smtClean="0"/>
+              <a:rPr lang="en-US"/>
               <a:t>Third level</a:t>
             </a:r>
           </a:p>
           <a:p>
             <a:pPr lvl="3"/>
             <a:r>
-              <a:rPr lang="en-US" smtClean="0"/>
+              <a:rPr lang="en-US"/>
               <a:t>Fourth level</a:t>
             </a:r>
           </a:p>
           <a:p>
             <a:pPr lvl="4"/>
             <a:r>
-              <a:rPr lang="en-US" smtClean="0"/>
+              <a:rPr lang="en-US"/>
               <a:t>Fifth level</a:t>
             </a:r>
-            <a:endParaRPr lang="en-US"/>
           </a:p>
         </p:txBody>
       </p:sp>
@@ -649,7 +659,7 @@
           <a:p>
             <a:fld id="{5BCAD085-E8A6-8845-BD4E-CB4CCA059FC4}" type="datetimeFigureOut">
               <a:rPr lang="en-US" smtClean="0"/>
-              <a:t>1/27/13</a:t>
+              <a:t>7/17/26</a:t>
             </a:fld>
             <a:endParaRPr lang="en-US"/>
           </a:p>
@@ -743,10 +753,9 @@
           <a:lstStyle/>
           <a:p>
             <a:r>
-              <a:rPr lang="en-US" smtClean="0"/>
+              <a:rPr lang="en-US"/>
               <a:t>Click to edit Master title style</a:t>
             </a:r>
-            <a:endParaRPr lang="en-US"/>
           </a:p>
         </p:txBody>
       </p:sp>
@@ -767,38 +776,37 @@
           <a:p>
             <a:pPr lvl="0"/>
             <a:r>
-              <a:rPr lang="en-US" smtClean="0"/>
+              <a:rPr lang="en-US"/>
               <a:t>Click to edit Master text styles</a:t>
             </a:r>
           </a:p>
           <a:p>
             <a:pPr lvl="1"/>
             <a:r>
-              <a:rPr lang="en-US" smtClean="0"/>
+              <a:rPr lang="en-US"/>
               <a:t>Second level</a:t>
             </a:r>
           </a:p>
           <a:p>
             <a:pPr lvl="2"/>
             <a:r>
-              <a:rPr lang="en-US" smtClean="0"/>
+              <a:rPr lang="en-US"/>
               <a:t>Third level</a:t>
             </a:r>
           </a:p>
           <a:p>
             <a:pPr lvl="3"/>
             <a:r>
-              <a:rPr lang="en-US" smtClean="0"/>
+              <a:rPr lang="en-US"/>
               <a:t>Fourth level</a:t>
             </a:r>
           </a:p>
           <a:p>
             <a:pPr lvl="4"/>
             <a:r>
-              <a:rPr lang="en-US" smtClean="0"/>
+              <a:rPr lang="en-US"/>
               <a:t>Fifth level</a:t>
             </a:r>
-            <a:endParaRPr lang="en-US"/>
           </a:p>
         </p:txBody>
       </p:sp>
@@ -819,7 +827,7 @@
           <a:p>
             <a:fld id="{5BCAD085-E8A6-8845-BD4E-CB4CCA059FC4}" type="datetimeFigureOut">
               <a:rPr lang="en-US" smtClean="0"/>
-              <a:t>1/27/13</a:t>
+              <a:t>7/17/26</a:t>
             </a:fld>
             <a:endParaRPr lang="en-US"/>
           </a:p>
@@ -922,10 +930,9 @@
           </a:lstStyle>
           <a:p>
             <a:r>
-              <a:rPr lang="en-US" smtClean="0"/>
+              <a:rPr lang="en-US"/>
               <a:t>Click to edit Master title style</a:t>
             </a:r>
-            <a:endParaRPr lang="en-US"/>
           </a:p>
         </p:txBody>
       </p:sp>
@@ -1042,7 +1049,7 @@
           <a:p>
             <a:pPr lvl="0"/>
             <a:r>
-              <a:rPr lang="en-US" smtClean="0"/>
+              <a:rPr lang="en-US"/>
               <a:t>Click to edit Master text styles</a:t>
             </a:r>
           </a:p>
@@ -1065,7 +1072,7 @@
           <a:p>
             <a:fld id="{5BCAD085-E8A6-8845-BD4E-CB4CCA059FC4}" type="datetimeFigureOut">
               <a:rPr lang="en-US" smtClean="0"/>
-              <a:t>1/27/13</a:t>
+              <a:t>7/17/26</a:t>
             </a:fld>
             <a:endParaRPr lang="en-US"/>
           </a:p>
@@ -1159,10 +1166,9 @@
           <a:lstStyle/>
           <a:p>
             <a:r>
-              <a:rPr lang="en-US" smtClean="0"/>
+              <a:rPr lang="en-US"/>
               <a:t>Click to edit Master title style</a:t>
             </a:r>
-            <a:endParaRPr lang="en-US"/>
           </a:p>
         </p:txBody>
       </p:sp>
@@ -1216,38 +1222,37 @@
           <a:p>
             <a:pPr lvl="0"/>
             <a:r>
-              <a:rPr lang="en-US" smtClean="0"/>
+              <a:rPr lang="en-US"/>
               <a:t>Click to edit Master text styles</a:t>
             </a:r>
           </a:p>
           <a:p>
             <a:pPr lvl="1"/>
             <a:r>
-              <a:rPr lang="en-US" smtClean="0"/>
+              <a:rPr lang="en-US"/>
               <a:t>Second level</a:t>
             </a:r>
           </a:p>
           <a:p>
             <a:pPr lvl="2"/>
             <a:r>
-              <a:rPr lang="en-US" smtClean="0"/>
+              <a:rPr lang="en-US"/>
               <a:t>Third level</a:t>
             </a:r>
           </a:p>
           <a:p>
             <a:pPr lvl="3"/>
             <a:r>
-              <a:rPr lang="en-US" smtClean="0"/>
+              <a:rPr lang="en-US"/>
               <a:t>Fourth level</a:t>
             </a:r>
           </a:p>
           <a:p>
             <a:pPr lvl="4"/>
             <a:r>
-              <a:rPr lang="en-US" smtClean="0"/>
+              <a:rPr lang="en-US"/>
               <a:t>Fifth level</a:t>
             </a:r>
-            <a:endParaRPr lang="en-US"/>
           </a:p>
         </p:txBody>
       </p:sp>
@@ -1301,38 +1306,37 @@
           <a:p>
             <a:pPr lvl="0"/>
             <a:r>
-              <a:rPr lang="en-US" smtClean="0"/>
+              <a:rPr lang="en-US"/>
               <a:t>Click to edit Master text styles</a:t>
             </a:r>
           </a:p>
           <a:p>
             <a:pPr lvl="1"/>
             <a:r>
-              <a:rPr lang="en-US" smtClean="0"/>
+              <a:rPr lang="en-US"/>
               <a:t>Second level</a:t>
             </a:r>
           </a:p>
           <a:p>
             <a:pPr lvl="2"/>
             <a:r>
-              <a:rPr lang="en-US" smtClean="0"/>
+              <a:rPr lang="en-US"/>
               <a:t>Third level</a:t>
             </a:r>
           </a:p>
           <a:p>
             <a:pPr lvl="3"/>
             <a:r>
-              <a:rPr lang="en-US" smtClean="0"/>
+              <a:rPr lang="en-US"/>
               <a:t>Fourth level</a:t>
             </a:r>
           </a:p>
           <a:p>
             <a:pPr lvl="4"/>
             <a:r>
-              <a:rPr lang="en-US" smtClean="0"/>
+              <a:rPr lang="en-US"/>
               <a:t>Fifth level</a:t>
             </a:r>
-            <a:endParaRPr lang="en-US"/>
           </a:p>
         </p:txBody>
       </p:sp>
@@ -1353,7 +1357,7 @@
           <a:p>
             <a:fld id="{5BCAD085-E8A6-8845-BD4E-CB4CCA059FC4}" type="datetimeFigureOut">
               <a:rPr lang="en-US" smtClean="0"/>
-              <a:t>1/27/13</a:t>
+              <a:t>7/17/26</a:t>
             </a:fld>
             <a:endParaRPr lang="en-US"/>
           </a:p>
@@ -1451,10 +1455,9 @@
           </a:lstStyle>
           <a:p>
             <a:r>
-              <a:rPr lang="en-US" smtClean="0"/>
+              <a:rPr lang="en-US"/>
               <a:t>Click to edit Master title style</a:t>
             </a:r>
-            <a:endParaRPr lang="en-US"/>
           </a:p>
         </p:txBody>
       </p:sp>
@@ -1517,7 +1520,7 @@
           <a:p>
             <a:pPr lvl="0"/>
             <a:r>
-              <a:rPr lang="en-US" smtClean="0"/>
+              <a:rPr lang="en-US"/>
               <a:t>Click to edit Master text styles</a:t>
             </a:r>
           </a:p>
@@ -1573,38 +1576,37 @@
           <a:p>
             <a:pPr lvl="0"/>
             <a:r>
-              <a:rPr lang="en-US" smtClean="0"/>
+              <a:rPr lang="en-US"/>
               <a:t>Click to edit Master text styles</a:t>
             </a:r>
           </a:p>
           <a:p>
             <a:pPr lvl="1"/>
             <a:r>
-              <a:rPr lang="en-US" smtClean="0"/>
+              <a:rPr lang="en-US"/>
               <a:t>Second level</a:t>
             </a:r>
           </a:p>
           <a:p>
             <a:pPr lvl="2"/>
             <a:r>
-              <a:rPr lang="en-US" smtClean="0"/>
+              <a:rPr lang="en-US"/>
               <a:t>Third level</a:t>
             </a:r>
           </a:p>
           <a:p>
             <a:pPr lvl="3"/>
             <a:r>
-              <a:rPr lang="en-US" smtClean="0"/>
+              <a:rPr lang="en-US"/>
               <a:t>Fourth level</a:t>
             </a:r>
           </a:p>
           <a:p>
             <a:pPr lvl="4"/>
             <a:r>
-              <a:rPr lang="en-US" smtClean="0"/>
+              <a:rPr lang="en-US"/>
               <a:t>Fifth level</a:t>
             </a:r>
-            <a:endParaRPr lang="en-US"/>
           </a:p>
         </p:txBody>
       </p:sp>
@@ -1667,7 +1669,7 @@
           <a:p>
             <a:pPr lvl="0"/>
             <a:r>
-              <a:rPr lang="en-US" smtClean="0"/>
+              <a:rPr lang="en-US"/>
               <a:t>Click to edit Master text styles</a:t>
             </a:r>
           </a:p>
@@ -1723,38 +1725,37 @@
           <a:p>
             <a:pPr lvl="0"/>
             <a:r>
-              <a:rPr lang="en-US" smtClean="0"/>
+              <a:rPr lang="en-US"/>
               <a:t>Click to edit Master text styles</a:t>
             </a:r>
           </a:p>
           <a:p>
             <a:pPr lvl="1"/>
             <a:r>
-              <a:rPr lang="en-US" smtClean="0"/>
+              <a:rPr lang="en-US"/>
               <a:t>Second level</a:t>
             </a:r>
           </a:p>
           <a:p>
             <a:pPr lvl="2"/>
             <a:r>
-              <a:rPr lang="en-US" smtClean="0"/>
+              <a:rPr lang="en-US"/>
               <a:t>Third level</a:t>
             </a:r>
           </a:p>
           <a:p>
             <a:pPr lvl="3"/>
             <a:r>
-              <a:rPr lang="en-US" smtClean="0"/>
+              <a:rPr lang="en-US"/>
               <a:t>Fourth level</a:t>
             </a:r>
           </a:p>
           <a:p>
             <a:pPr lvl="4"/>
             <a:r>
-              <a:rPr lang="en-US" smtClean="0"/>
+              <a:rPr lang="en-US"/>
               <a:t>Fifth level</a:t>
             </a:r>
-            <a:endParaRPr lang="en-US"/>
           </a:p>
         </p:txBody>
       </p:sp>
@@ -1775,7 +1776,7 @@
           <a:p>
             <a:fld id="{5BCAD085-E8A6-8845-BD4E-CB4CCA059FC4}" type="datetimeFigureOut">
               <a:rPr lang="en-US" smtClean="0"/>
-              <a:t>1/27/13</a:t>
+              <a:t>7/17/26</a:t>
             </a:fld>
             <a:endParaRPr lang="en-US"/>
           </a:p>
@@ -1869,10 +1870,9 @@
           <a:lstStyle/>
           <a:p>
             <a:r>
-              <a:rPr lang="en-US" smtClean="0"/>
+              <a:rPr lang="en-US"/>
               <a:t>Click to edit Master title style</a:t>
             </a:r>
-            <a:endParaRPr lang="en-US"/>
           </a:p>
         </p:txBody>
       </p:sp>
@@ -1893,7 +1893,7 @@
           <a:p>
             <a:fld id="{5BCAD085-E8A6-8845-BD4E-CB4CCA059FC4}" type="datetimeFigureOut">
               <a:rPr lang="en-US" smtClean="0"/>
-              <a:t>1/27/13</a:t>
+              <a:t>7/17/26</a:t>
             </a:fld>
             <a:endParaRPr lang="en-US"/>
           </a:p>
@@ -1988,7 +1988,7 @@
           <a:p>
             <a:fld id="{5BCAD085-E8A6-8845-BD4E-CB4CCA059FC4}" type="datetimeFigureOut">
               <a:rPr lang="en-US" smtClean="0"/>
-              <a:t>1/27/13</a:t>
+              <a:t>7/17/26</a:t>
             </a:fld>
             <a:endParaRPr lang="en-US"/>
           </a:p>
@@ -2091,10 +2091,9 @@
           </a:lstStyle>
           <a:p>
             <a:r>
-              <a:rPr lang="en-US" smtClean="0"/>
+              <a:rPr lang="en-US"/>
               <a:t>Click to edit Master title style</a:t>
             </a:r>
-            <a:endParaRPr lang="en-US"/>
           </a:p>
         </p:txBody>
       </p:sp>
@@ -2148,38 +2147,37 @@
           <a:p>
             <a:pPr lvl="0"/>
             <a:r>
-              <a:rPr lang="en-US" smtClean="0"/>
+              <a:rPr lang="en-US"/>
               <a:t>Click to edit Master text styles</a:t>
             </a:r>
           </a:p>
           <a:p>
             <a:pPr lvl="1"/>
             <a:r>
-              <a:rPr lang="en-US" smtClean="0"/>
+              <a:rPr lang="en-US"/>
               <a:t>Second level</a:t>
             </a:r>
           </a:p>
           <a:p>
             <a:pPr lvl="2"/>
             <a:r>
-              <a:rPr lang="en-US" smtClean="0"/>
+              <a:rPr lang="en-US"/>
               <a:t>Third level</a:t>
             </a:r>
           </a:p>
           <a:p>
             <a:pPr lvl="3"/>
             <a:r>
-              <a:rPr lang="en-US" smtClean="0"/>
+              <a:rPr lang="en-US"/>
               <a:t>Fourth level</a:t>
             </a:r>
           </a:p>
           <a:p>
             <a:pPr lvl="4"/>
             <a:r>
-              <a:rPr lang="en-US" smtClean="0"/>
+              <a:rPr lang="en-US"/>
               <a:t>Fifth level</a:t>
             </a:r>
-            <a:endParaRPr lang="en-US"/>
           </a:p>
         </p:txBody>
       </p:sp>
@@ -2242,7 +2240,7 @@
           <a:p>
             <a:pPr lvl="0"/>
             <a:r>
-              <a:rPr lang="en-US" smtClean="0"/>
+              <a:rPr lang="en-US"/>
               <a:t>Click to edit Master text styles</a:t>
             </a:r>
           </a:p>
@@ -2265,7 +2263,7 @@
           <a:p>
             <a:fld id="{5BCAD085-E8A6-8845-BD4E-CB4CCA059FC4}" type="datetimeFigureOut">
               <a:rPr lang="en-US" smtClean="0"/>
-              <a:t>1/27/13</a:t>
+              <a:t>7/17/26</a:t>
             </a:fld>
             <a:endParaRPr lang="en-US"/>
           </a:p>
@@ -2368,10 +2366,9 @@
           </a:lstStyle>
           <a:p>
             <a:r>
-              <a:rPr lang="en-US" smtClean="0"/>
+              <a:rPr lang="en-US"/>
               <a:t>Click to edit Master title style</a:t>
             </a:r>
-            <a:endParaRPr lang="en-US"/>
           </a:p>
         </p:txBody>
       </p:sp>
@@ -2495,7 +2492,7 @@
           <a:p>
             <a:pPr lvl="0"/>
             <a:r>
-              <a:rPr lang="en-US" smtClean="0"/>
+              <a:rPr lang="en-US"/>
               <a:t>Click to edit Master text styles</a:t>
             </a:r>
           </a:p>
@@ -2518,7 +2515,7 @@
           <a:p>
             <a:fld id="{5BCAD085-E8A6-8845-BD4E-CB4CCA059FC4}" type="datetimeFigureOut">
               <a:rPr lang="en-US" smtClean="0"/>
-              <a:t>1/27/13</a:t>
+              <a:t>7/17/26</a:t>
             </a:fld>
             <a:endParaRPr lang="en-US"/>
           </a:p>
@@ -2627,10 +2624,9 @@
           <a:lstStyle/>
           <a:p>
             <a:r>
-              <a:rPr lang="en-US" smtClean="0"/>
+              <a:rPr lang="en-US"/>
               <a:t>Click to edit Master title style</a:t>
             </a:r>
-            <a:endParaRPr lang="en-US"/>
           </a:p>
         </p:txBody>
       </p:sp>
@@ -2661,38 +2657,37 @@
           <a:p>
             <a:pPr lvl="0"/>
             <a:r>
-              <a:rPr lang="en-US" smtClean="0"/>
+              <a:rPr lang="en-US"/>
               <a:t>Click to edit Master text styles</a:t>
             </a:r>
           </a:p>
           <a:p>
             <a:pPr lvl="1"/>
             <a:r>
-              <a:rPr lang="en-US" smtClean="0"/>
+              <a:rPr lang="en-US"/>
               <a:t>Second level</a:t>
             </a:r>
           </a:p>
           <a:p>
             <a:pPr lvl="2"/>
             <a:r>
-              <a:rPr lang="en-US" smtClean="0"/>
+              <a:rPr lang="en-US"/>
               <a:t>Third level</a:t>
             </a:r>
           </a:p>
           <a:p>
             <a:pPr lvl="3"/>
             <a:r>
-              <a:rPr lang="en-US" smtClean="0"/>
+              <a:rPr lang="en-US"/>
               <a:t>Fourth level</a:t>
             </a:r>
           </a:p>
           <a:p>
             <a:pPr lvl="4"/>
             <a:r>
-              <a:rPr lang="en-US" smtClean="0"/>
+              <a:rPr lang="en-US"/>
               <a:t>Fifth level</a:t>
             </a:r>
-            <a:endParaRPr lang="en-US"/>
           </a:p>
         </p:txBody>
       </p:sp>
@@ -2731,7 +2726,7 @@
           <a:p>
             <a:fld id="{5BCAD085-E8A6-8845-BD4E-CB4CCA059FC4}" type="datetimeFigureOut">
               <a:rPr lang="en-US" smtClean="0"/>
-              <a:t>1/27/13</a:t>
+              <a:t>7/17/26</a:t>
             </a:fld>
             <a:endParaRPr lang="en-US"/>
           </a:p>
@@ -3090,7 +3085,7 @@
 </file>
 
 <file path=ppt/slides/slide1.xml><?xml version="1.0" encoding="utf-8"?>
-<p:sld xmlns:a="http://schemas.openxmlformats.org/drawingml/2006/main" xmlns:p="http://schemas.openxmlformats.org/presentationml/2006/main" xmlns:r="http://schemas.openxmlformats.org/officeDocument/2006/relationships">
+<p:sld xmlns:a="http://schemas.openxmlformats.org/drawingml/2006/main" xmlns:r="http://schemas.openxmlformats.org/officeDocument/2006/relationships" xmlns:p="http://schemas.openxmlformats.org/presentationml/2006/main">
   <p:cSld>
     <p:spTree>
       <p:nvGrpSpPr>
@@ -3098,7 +3093,14 @@
         <p:cNvGrpSpPr/>
         <p:nvPr/>
       </p:nvGrpSpPr>
-      <p:grpSpPr/>
+      <p:grpSpPr>
+        <a:xfrm>
+          <a:off x="0" y="0"/>
+          <a:ext cx="0" cy="0"/>
+          <a:chOff x="0" y="0"/>
+          <a:chExt cx="0" cy="0"/>
+        </a:xfrm>
+      </p:grpSpPr>
       <p:sp>
         <p:nvSpPr>
           <p:cNvPr id="2" name="Rectangle 1"/>
@@ -3140,6 +3142,7 @@
           <a:lstStyle/>
           <a:p>
             <a:pPr algn="ctr"/>
+            <a:endParaRPr/>
           </a:p>
         </p:txBody>
       </p:sp>
@@ -3160,7 +3163,7 @@
           <a:noFill/>
         </p:spPr>
         <p:txBody>
-          <a:bodyPr wrap="square" lIns="0" rIns="0" tIns="0" bIns="0">
+          <a:bodyPr wrap="square" lIns="0" tIns="0" rIns="0" bIns="0">
             <a:spAutoFit/>
           </a:bodyPr>
           <a:lstStyle/>
@@ -3203,7 +3206,7 @@
           <a:noFill/>
         </p:spPr>
         <p:txBody>
-          <a:bodyPr wrap="square" lIns="0" rIns="0" tIns="0" bIns="0">
+          <a:bodyPr wrap="square" lIns="0" tIns="0" rIns="0" bIns="0">
             <a:spAutoFit/>
           </a:bodyPr>
           <a:lstStyle/>
@@ -3251,7 +3254,7 @@
           <a:noFill/>
         </p:spPr>
         <p:txBody>
-          <a:bodyPr wrap="square" lIns="0" rIns="0" tIns="0" bIns="0">
+          <a:bodyPr wrap="square" lIns="0" tIns="0" rIns="0" bIns="0">
             <a:spAutoFit/>
           </a:bodyPr>
           <a:lstStyle/>
@@ -3290,7 +3293,7 @@
           <a:noFill/>
         </p:spPr>
         <p:txBody>
-          <a:bodyPr wrap="square" lIns="0" rIns="0" tIns="0" bIns="0">
+          <a:bodyPr wrap="square" lIns="0" tIns="0" rIns="0" bIns="0">
             <a:spAutoFit/>
           </a:bodyPr>
           <a:lstStyle/>
@@ -3337,7 +3340,7 @@
 </file>
 
 <file path=ppt/slides/slide10.xml><?xml version="1.0" encoding="utf-8"?>
-<p:sld xmlns:a="http://schemas.openxmlformats.org/drawingml/2006/main" xmlns:p="http://schemas.openxmlformats.org/presentationml/2006/main" xmlns:r="http://schemas.openxmlformats.org/officeDocument/2006/relationships">
+<p:sld xmlns:a="http://schemas.openxmlformats.org/drawingml/2006/main" xmlns:r="http://schemas.openxmlformats.org/officeDocument/2006/relationships" xmlns:p="http://schemas.openxmlformats.org/presentationml/2006/main">
   <p:cSld>
     <p:spTree>
       <p:nvGrpSpPr>
@@ -3345,7 +3348,14 @@
         <p:cNvGrpSpPr/>
         <p:nvPr/>
       </p:nvGrpSpPr>
-      <p:grpSpPr/>
+      <p:grpSpPr>
+        <a:xfrm>
+          <a:off x="0" y="0"/>
+          <a:ext cx="0" cy="0"/>
+          <a:chOff x="0" y="0"/>
+          <a:chExt cx="0" cy="0"/>
+        </a:xfrm>
+      </p:grpSpPr>
       <p:sp>
         <p:nvSpPr>
           <p:cNvPr id="2" name="Oval 1"/>
@@ -3383,7 +3393,7 @@
           </a:fontRef>
         </p:style>
         <p:txBody>
-          <a:bodyPr rtlCol="0" anchor="ctr" lIns="0" rIns="0" tIns="0" bIns="0"/>
+          <a:bodyPr lIns="0" tIns="0" rIns="0" bIns="0" rtlCol="0" anchor="ctr"/>
           <a:lstStyle/>
           <a:p>
             <a:pPr algn="ctr"/>
@@ -3416,7 +3426,7 @@
           <a:noFill/>
         </p:spPr>
         <p:txBody>
-          <a:bodyPr wrap="square" lIns="0" rIns="0" tIns="0" bIns="0">
+          <a:bodyPr wrap="square" lIns="0" tIns="0" rIns="0" bIns="0">
             <a:spAutoFit/>
           </a:bodyPr>
           <a:lstStyle/>
@@ -3455,7 +3465,7 @@
           <a:noFill/>
         </p:spPr>
         <p:txBody>
-          <a:bodyPr wrap="square" lIns="0" rIns="0" tIns="0" bIns="0">
+          <a:bodyPr wrap="square" lIns="0" tIns="0" rIns="0" bIns="0">
             <a:spAutoFit/>
           </a:bodyPr>
           <a:lstStyle/>
@@ -3499,17 +3509,53 @@
                 <a:tableStyleId>{5C22544A-7EE6-4342-B048-85BDC9FD1C3A}</a:tableStyleId>
               </a:tblPr>
               <a:tblGrid>
-                <a:gridCol w="1655129"/>
-                <a:gridCol w="973605"/>
-                <a:gridCol w="1217007"/>
-                <a:gridCol w="876245"/>
-                <a:gridCol w="973605"/>
-                <a:gridCol w="1070966"/>
+                <a:gridCol w="1655129">
+                  <a:extLst>
+                    <a:ext uri="{9D8B030D-6E8A-4147-A177-3AD203B41FA5}">
+                      <a16:colId xmlns:a16="http://schemas.microsoft.com/office/drawing/2014/main" val="20000"/>
+                    </a:ext>
+                  </a:extLst>
+                </a:gridCol>
+                <a:gridCol w="973605">
+                  <a:extLst>
+                    <a:ext uri="{9D8B030D-6E8A-4147-A177-3AD203B41FA5}">
+                      <a16:colId xmlns:a16="http://schemas.microsoft.com/office/drawing/2014/main" val="20001"/>
+                    </a:ext>
+                  </a:extLst>
+                </a:gridCol>
+                <a:gridCol w="1217007">
+                  <a:extLst>
+                    <a:ext uri="{9D8B030D-6E8A-4147-A177-3AD203B41FA5}">
+                      <a16:colId xmlns:a16="http://schemas.microsoft.com/office/drawing/2014/main" val="20002"/>
+                    </a:ext>
+                  </a:extLst>
+                </a:gridCol>
+                <a:gridCol w="876245">
+                  <a:extLst>
+                    <a:ext uri="{9D8B030D-6E8A-4147-A177-3AD203B41FA5}">
+                      <a16:colId xmlns:a16="http://schemas.microsoft.com/office/drawing/2014/main" val="20003"/>
+                    </a:ext>
+                  </a:extLst>
+                </a:gridCol>
+                <a:gridCol w="973605">
+                  <a:extLst>
+                    <a:ext uri="{9D8B030D-6E8A-4147-A177-3AD203B41FA5}">
+                      <a16:colId xmlns:a16="http://schemas.microsoft.com/office/drawing/2014/main" val="20004"/>
+                    </a:ext>
+                  </a:extLst>
+                </a:gridCol>
+                <a:gridCol w="1070966">
+                  <a:extLst>
+                    <a:ext uri="{9D8B030D-6E8A-4147-A177-3AD203B41FA5}">
+                      <a16:colId xmlns:a16="http://schemas.microsoft.com/office/drawing/2014/main" val="20005"/>
+                    </a:ext>
+                  </a:extLst>
+                </a:gridCol>
               </a:tblGrid>
               <a:tr h="356616">
                 <a:tc>
                   <a:txBody>
-                    <a:bodyPr wrap="square"/>
+                    <a:bodyPr/>
                     <a:lstStyle/>
                     <a:p>
                       <a:pPr algn="l"/>
@@ -3532,7 +3578,7 @@
                 </a:tc>
                 <a:tc>
                   <a:txBody>
-                    <a:bodyPr wrap="square"/>
+                    <a:bodyPr/>
                     <a:lstStyle/>
                     <a:p>
                       <a:pPr algn="r"/>
@@ -3555,7 +3601,7 @@
                 </a:tc>
                 <a:tc>
                   <a:txBody>
-                    <a:bodyPr wrap="square"/>
+                    <a:bodyPr/>
                     <a:lstStyle/>
                     <a:p>
                       <a:pPr algn="r"/>
@@ -3578,7 +3624,7 @@
                 </a:tc>
                 <a:tc>
                   <a:txBody>
-                    <a:bodyPr wrap="square"/>
+                    <a:bodyPr/>
                     <a:lstStyle/>
                     <a:p>
                       <a:pPr algn="r"/>
@@ -3601,7 +3647,7 @@
                 </a:tc>
                 <a:tc>
                   <a:txBody>
-                    <a:bodyPr wrap="square"/>
+                    <a:bodyPr/>
                     <a:lstStyle/>
                     <a:p>
                       <a:pPr algn="r"/>
@@ -3624,7 +3670,7 @@
                 </a:tc>
                 <a:tc>
                   <a:txBody>
-                    <a:bodyPr wrap="square"/>
+                    <a:bodyPr/>
                     <a:lstStyle/>
                     <a:p>
                       <a:pPr algn="r"/>
@@ -3645,11 +3691,16 @@
                     </a:solidFill>
                   </a:tcPr>
                 </a:tc>
+                <a:extLst>
+                  <a:ext uri="{0D108BD9-81ED-4DB2-BD59-A6C34878D82A}">
+                    <a16:rowId xmlns:a16="http://schemas.microsoft.com/office/drawing/2014/main" val="10000"/>
+                  </a:ext>
+                </a:extLst>
               </a:tr>
               <a:tr h="356616">
                 <a:tc>
                   <a:txBody>
-                    <a:bodyPr wrap="square"/>
+                    <a:bodyPr/>
                     <a:lstStyle/>
                     <a:p>
                       <a:pPr algn="l"/>
@@ -3672,7 +3723,7 @@
                 </a:tc>
                 <a:tc>
                   <a:txBody>
-                    <a:bodyPr wrap="square"/>
+                    <a:bodyPr/>
                     <a:lstStyle/>
                     <a:p>
                       <a:pPr algn="r"/>
@@ -3695,7 +3746,7 @@
                 </a:tc>
                 <a:tc>
                   <a:txBody>
-                    <a:bodyPr wrap="square"/>
+                    <a:bodyPr/>
                     <a:lstStyle/>
                     <a:p>
                       <a:pPr algn="r"/>
@@ -3718,7 +3769,7 @@
                 </a:tc>
                 <a:tc>
                   <a:txBody>
-                    <a:bodyPr wrap="square"/>
+                    <a:bodyPr/>
                     <a:lstStyle/>
                     <a:p>
                       <a:pPr algn="r"/>
@@ -3741,7 +3792,7 @@
                 </a:tc>
                 <a:tc>
                   <a:txBody>
-                    <a:bodyPr wrap="square"/>
+                    <a:bodyPr/>
                     <a:lstStyle/>
                     <a:p>
                       <a:pPr algn="r"/>
@@ -3764,7 +3815,7 @@
                 </a:tc>
                 <a:tc>
                   <a:txBody>
-                    <a:bodyPr wrap="square"/>
+                    <a:bodyPr/>
                     <a:lstStyle/>
                     <a:p>
                       <a:pPr algn="r"/>
@@ -3785,11 +3836,16 @@
                     </a:solidFill>
                   </a:tcPr>
                 </a:tc>
+                <a:extLst>
+                  <a:ext uri="{0D108BD9-81ED-4DB2-BD59-A6C34878D82A}">
+                    <a16:rowId xmlns:a16="http://schemas.microsoft.com/office/drawing/2014/main" val="10001"/>
+                  </a:ext>
+                </a:extLst>
               </a:tr>
               <a:tr h="356616">
                 <a:tc>
                   <a:txBody>
-                    <a:bodyPr wrap="square"/>
+                    <a:bodyPr/>
                     <a:lstStyle/>
                     <a:p>
                       <a:pPr algn="l"/>
@@ -3812,7 +3868,7 @@
                 </a:tc>
                 <a:tc>
                   <a:txBody>
-                    <a:bodyPr wrap="square"/>
+                    <a:bodyPr/>
                     <a:lstStyle/>
                     <a:p>
                       <a:pPr algn="r"/>
@@ -3835,7 +3891,7 @@
                 </a:tc>
                 <a:tc>
                   <a:txBody>
-                    <a:bodyPr wrap="square"/>
+                    <a:bodyPr/>
                     <a:lstStyle/>
                     <a:p>
                       <a:pPr algn="r"/>
@@ -3858,7 +3914,7 @@
                 </a:tc>
                 <a:tc>
                   <a:txBody>
-                    <a:bodyPr wrap="square"/>
+                    <a:bodyPr/>
                     <a:lstStyle/>
                     <a:p>
                       <a:pPr algn="r"/>
@@ -3881,7 +3937,7 @@
                 </a:tc>
                 <a:tc>
                   <a:txBody>
-                    <a:bodyPr wrap="square"/>
+                    <a:bodyPr/>
                     <a:lstStyle/>
                     <a:p>
                       <a:pPr algn="r"/>
@@ -3904,7 +3960,7 @@
                 </a:tc>
                 <a:tc>
                   <a:txBody>
-                    <a:bodyPr wrap="square"/>
+                    <a:bodyPr/>
                     <a:lstStyle/>
                     <a:p>
                       <a:pPr algn="r"/>
@@ -3925,11 +3981,16 @@
                     </a:solidFill>
                   </a:tcPr>
                 </a:tc>
+                <a:extLst>
+                  <a:ext uri="{0D108BD9-81ED-4DB2-BD59-A6C34878D82A}">
+                    <a16:rowId xmlns:a16="http://schemas.microsoft.com/office/drawing/2014/main" val="10002"/>
+                  </a:ext>
+                </a:extLst>
               </a:tr>
               <a:tr h="356616">
                 <a:tc>
                   <a:txBody>
-                    <a:bodyPr wrap="square"/>
+                    <a:bodyPr/>
                     <a:lstStyle/>
                     <a:p>
                       <a:pPr algn="l"/>
@@ -3952,7 +4013,7 @@
                 </a:tc>
                 <a:tc>
                   <a:txBody>
-                    <a:bodyPr wrap="square"/>
+                    <a:bodyPr/>
                     <a:lstStyle/>
                     <a:p>
                       <a:pPr algn="r"/>
@@ -3975,7 +4036,7 @@
                 </a:tc>
                 <a:tc>
                   <a:txBody>
-                    <a:bodyPr wrap="square"/>
+                    <a:bodyPr/>
                     <a:lstStyle/>
                     <a:p>
                       <a:pPr algn="r"/>
@@ -3998,7 +4059,7 @@
                 </a:tc>
                 <a:tc>
                   <a:txBody>
-                    <a:bodyPr wrap="square"/>
+                    <a:bodyPr/>
                     <a:lstStyle/>
                     <a:p>
                       <a:pPr algn="r"/>
@@ -4021,7 +4082,7 @@
                 </a:tc>
                 <a:tc>
                   <a:txBody>
-                    <a:bodyPr wrap="square"/>
+                    <a:bodyPr/>
                     <a:lstStyle/>
                     <a:p>
                       <a:pPr algn="r"/>
@@ -4044,7 +4105,7 @@
                 </a:tc>
                 <a:tc>
                   <a:txBody>
-                    <a:bodyPr wrap="square"/>
+                    <a:bodyPr/>
                     <a:lstStyle/>
                     <a:p>
                       <a:pPr algn="r"/>
@@ -4065,11 +4126,16 @@
                     </a:solidFill>
                   </a:tcPr>
                 </a:tc>
+                <a:extLst>
+                  <a:ext uri="{0D108BD9-81ED-4DB2-BD59-A6C34878D82A}">
+                    <a16:rowId xmlns:a16="http://schemas.microsoft.com/office/drawing/2014/main" val="10003"/>
+                  </a:ext>
+                </a:extLst>
               </a:tr>
               <a:tr h="356616">
                 <a:tc>
                   <a:txBody>
-                    <a:bodyPr wrap="square"/>
+                    <a:bodyPr/>
                     <a:lstStyle/>
                     <a:p>
                       <a:pPr algn="l"/>
@@ -4092,7 +4158,7 @@
                 </a:tc>
                 <a:tc>
                   <a:txBody>
-                    <a:bodyPr wrap="square"/>
+                    <a:bodyPr/>
                     <a:lstStyle/>
                     <a:p>
                       <a:pPr algn="r"/>
@@ -4115,7 +4181,7 @@
                 </a:tc>
                 <a:tc>
                   <a:txBody>
-                    <a:bodyPr wrap="square"/>
+                    <a:bodyPr/>
                     <a:lstStyle/>
                     <a:p>
                       <a:pPr algn="r"/>
@@ -4138,7 +4204,7 @@
                 </a:tc>
                 <a:tc>
                   <a:txBody>
-                    <a:bodyPr wrap="square"/>
+                    <a:bodyPr/>
                     <a:lstStyle/>
                     <a:p>
                       <a:pPr algn="r"/>
@@ -4161,7 +4227,7 @@
                 </a:tc>
                 <a:tc>
                   <a:txBody>
-                    <a:bodyPr wrap="square"/>
+                    <a:bodyPr/>
                     <a:lstStyle/>
                     <a:p>
                       <a:pPr algn="r"/>
@@ -4184,7 +4250,7 @@
                 </a:tc>
                 <a:tc>
                   <a:txBody>
-                    <a:bodyPr wrap="square"/>
+                    <a:bodyPr/>
                     <a:lstStyle/>
                     <a:p>
                       <a:pPr algn="r"/>
@@ -4205,6 +4271,11 @@
                     </a:solidFill>
                   </a:tcPr>
                 </a:tc>
+                <a:extLst>
+                  <a:ext uri="{0D108BD9-81ED-4DB2-BD59-A6C34878D82A}">
+                    <a16:rowId xmlns:a16="http://schemas.microsoft.com/office/drawing/2014/main" val="10004"/>
+                  </a:ext>
+                </a:extLst>
               </a:tr>
             </a:tbl>
           </a:graphicData>
@@ -4227,7 +4298,7 @@
           <a:noFill/>
         </p:spPr>
         <p:txBody>
-          <a:bodyPr wrap="square" lIns="0" rIns="0" tIns="0" bIns="0">
+          <a:bodyPr wrap="square" lIns="0" tIns="0" rIns="0" bIns="0">
             <a:spAutoFit/>
           </a:bodyPr>
           <a:lstStyle/>
@@ -4328,7 +4399,9 @@
         <p:txBody>
           <a:bodyPr rtlCol="0" anchor="ctr"/>
           <a:lstStyle/>
-          <a:p/>
+          <a:p>
+            <a:endParaRPr/>
+          </a:p>
         </p:txBody>
       </p:sp>
       <p:sp>
@@ -4348,7 +4421,7 @@
           <a:noFill/>
         </p:spPr>
         <p:txBody>
-          <a:bodyPr wrap="square" lIns="0" rIns="0" tIns="0" bIns="0">
+          <a:bodyPr wrap="square" lIns="0" tIns="0" rIns="0" bIns="0">
             <a:spAutoFit/>
           </a:bodyPr>
           <a:lstStyle/>
@@ -4409,7 +4482,9 @@
         <p:txBody>
           <a:bodyPr rtlCol="0" anchor="ctr"/>
           <a:lstStyle/>
-          <a:p/>
+          <a:p>
+            <a:endParaRPr/>
+          </a:p>
         </p:txBody>
       </p:sp>
       <p:sp>
@@ -4429,7 +4504,7 @@
           <a:noFill/>
         </p:spPr>
         <p:txBody>
-          <a:bodyPr wrap="square" lIns="0" rIns="0" tIns="0" bIns="0">
+          <a:bodyPr wrap="square" lIns="0" tIns="0" rIns="0" bIns="0">
             <a:spAutoFit/>
           </a:bodyPr>
           <a:lstStyle/>
@@ -4468,7 +4543,7 @@
           <a:noFill/>
         </p:spPr>
         <p:txBody>
-          <a:bodyPr wrap="square" lIns="0" rIns="0" tIns="0" bIns="0">
+          <a:bodyPr wrap="square" lIns="0" tIns="0" rIns="0" bIns="0">
             <a:spAutoFit/>
           </a:bodyPr>
           <a:lstStyle/>
@@ -4529,7 +4604,9 @@
         <p:txBody>
           <a:bodyPr rtlCol="0" anchor="ctr"/>
           <a:lstStyle/>
-          <a:p/>
+          <a:p>
+            <a:endParaRPr/>
+          </a:p>
         </p:txBody>
       </p:sp>
       <p:sp>
@@ -4549,7 +4626,7 @@
           <a:noFill/>
         </p:spPr>
         <p:txBody>
-          <a:bodyPr wrap="square" lIns="0" rIns="0" tIns="0" bIns="0">
+          <a:bodyPr wrap="square" lIns="0" tIns="0" rIns="0" bIns="0">
             <a:spAutoFit/>
           </a:bodyPr>
           <a:lstStyle/>
@@ -4610,7 +4687,9 @@
         <p:txBody>
           <a:bodyPr rtlCol="0" anchor="ctr"/>
           <a:lstStyle/>
-          <a:p/>
+          <a:p>
+            <a:endParaRPr/>
+          </a:p>
         </p:txBody>
       </p:sp>
       <p:sp>
@@ -4630,7 +4709,7 @@
           <a:noFill/>
         </p:spPr>
         <p:txBody>
-          <a:bodyPr wrap="square" lIns="0" rIns="0" tIns="0" bIns="0">
+          <a:bodyPr wrap="square" lIns="0" tIns="0" rIns="0" bIns="0">
             <a:spAutoFit/>
           </a:bodyPr>
           <a:lstStyle/>
@@ -4669,7 +4748,7 @@
           <a:noFill/>
         </p:spPr>
         <p:txBody>
-          <a:bodyPr wrap="square" lIns="0" rIns="0" tIns="0" bIns="0">
+          <a:bodyPr wrap="square" lIns="0" tIns="0" rIns="0" bIns="0">
             <a:spAutoFit/>
           </a:bodyPr>
           <a:lstStyle/>
@@ -4730,7 +4809,9 @@
         <p:txBody>
           <a:bodyPr rtlCol="0" anchor="ctr"/>
           <a:lstStyle/>
-          <a:p/>
+          <a:p>
+            <a:endParaRPr/>
+          </a:p>
         </p:txBody>
       </p:sp>
       <p:sp>
@@ -4750,7 +4831,7 @@
           <a:noFill/>
         </p:spPr>
         <p:txBody>
-          <a:bodyPr wrap="square" lIns="0" rIns="0" tIns="0" bIns="0">
+          <a:bodyPr wrap="square" lIns="0" tIns="0" rIns="0" bIns="0">
             <a:spAutoFit/>
           </a:bodyPr>
           <a:lstStyle/>
@@ -4811,7 +4892,9 @@
         <p:txBody>
           <a:bodyPr rtlCol="0" anchor="ctr"/>
           <a:lstStyle/>
-          <a:p/>
+          <a:p>
+            <a:endParaRPr/>
+          </a:p>
         </p:txBody>
       </p:sp>
       <p:sp>
@@ -4831,7 +4914,7 @@
           <a:noFill/>
         </p:spPr>
         <p:txBody>
-          <a:bodyPr wrap="square" lIns="0" rIns="0" tIns="0" bIns="0">
+          <a:bodyPr wrap="square" lIns="0" tIns="0" rIns="0" bIns="0">
             <a:spAutoFit/>
           </a:bodyPr>
           <a:lstStyle/>
@@ -4870,7 +4953,7 @@
           <a:noFill/>
         </p:spPr>
         <p:txBody>
-          <a:bodyPr wrap="square" lIns="0" rIns="0" tIns="0" bIns="0">
+          <a:bodyPr wrap="square" lIns="0" tIns="0" rIns="0" bIns="0">
             <a:spAutoFit/>
           </a:bodyPr>
           <a:lstStyle/>
@@ -4931,7 +5014,9 @@
         <p:txBody>
           <a:bodyPr rtlCol="0" anchor="ctr"/>
           <a:lstStyle/>
-          <a:p/>
+          <a:p>
+            <a:endParaRPr/>
+          </a:p>
         </p:txBody>
       </p:sp>
       <p:sp>
@@ -4951,7 +5036,7 @@
           <a:noFill/>
         </p:spPr>
         <p:txBody>
-          <a:bodyPr wrap="square" lIns="0" rIns="0" tIns="0" bIns="0">
+          <a:bodyPr wrap="square" lIns="0" tIns="0" rIns="0" bIns="0">
             <a:spAutoFit/>
           </a:bodyPr>
           <a:lstStyle/>
@@ -5012,7 +5097,9 @@
         <p:txBody>
           <a:bodyPr rtlCol="0" anchor="ctr"/>
           <a:lstStyle/>
-          <a:p/>
+          <a:p>
+            <a:endParaRPr/>
+          </a:p>
         </p:txBody>
       </p:sp>
       <p:sp>
@@ -5032,7 +5119,7 @@
           <a:noFill/>
         </p:spPr>
         <p:txBody>
-          <a:bodyPr wrap="square" lIns="0" rIns="0" tIns="0" bIns="0">
+          <a:bodyPr wrap="square" lIns="0" tIns="0" rIns="0" bIns="0">
             <a:spAutoFit/>
           </a:bodyPr>
           <a:lstStyle/>
@@ -5071,7 +5158,7 @@
           <a:noFill/>
         </p:spPr>
         <p:txBody>
-          <a:bodyPr wrap="square" lIns="0" rIns="0" tIns="0" bIns="0">
+          <a:bodyPr wrap="square" lIns="0" tIns="0" rIns="0" bIns="0">
             <a:spAutoFit/>
           </a:bodyPr>
           <a:lstStyle/>
@@ -5110,7 +5197,7 @@
           <a:noFill/>
         </p:spPr>
         <p:txBody>
-          <a:bodyPr wrap="square" lIns="0" rIns="0" tIns="0" bIns="0">
+          <a:bodyPr wrap="square" lIns="0" tIns="0" rIns="0" bIns="0">
             <a:spAutoFit/>
           </a:bodyPr>
           <a:lstStyle/>
@@ -5152,7 +5239,7 @@
           <a:noFill/>
         </p:spPr>
         <p:txBody>
-          <a:bodyPr wrap="square" lIns="0" rIns="0" tIns="0" bIns="0">
+          <a:bodyPr wrap="square" lIns="0" tIns="0" rIns="0" bIns="0">
             <a:spAutoFit/>
           </a:bodyPr>
           <a:lstStyle/>
@@ -5186,7 +5273,7 @@
 </file>
 
 <file path=ppt/slides/slide11.xml><?xml version="1.0" encoding="utf-8"?>
-<p:sld xmlns:a="http://schemas.openxmlformats.org/drawingml/2006/main" xmlns:p="http://schemas.openxmlformats.org/presentationml/2006/main" xmlns:r="http://schemas.openxmlformats.org/officeDocument/2006/relationships">
+<p:sld xmlns:a="http://schemas.openxmlformats.org/drawingml/2006/main" xmlns:r="http://schemas.openxmlformats.org/officeDocument/2006/relationships" xmlns:p="http://schemas.openxmlformats.org/presentationml/2006/main">
   <p:cSld>
     <p:spTree>
       <p:nvGrpSpPr>
@@ -5194,7 +5281,14 @@
         <p:cNvGrpSpPr/>
         <p:nvPr/>
       </p:nvGrpSpPr>
-      <p:grpSpPr/>
+      <p:grpSpPr>
+        <a:xfrm>
+          <a:off x="0" y="0"/>
+          <a:ext cx="0" cy="0"/>
+          <a:chOff x="0" y="0"/>
+          <a:chExt cx="0" cy="0"/>
+        </a:xfrm>
+      </p:grpSpPr>
       <p:sp>
         <p:nvSpPr>
           <p:cNvPr id="2" name="Oval 1"/>
@@ -5232,7 +5326,7 @@
           </a:fontRef>
         </p:style>
         <p:txBody>
-          <a:bodyPr rtlCol="0" anchor="ctr" lIns="0" rIns="0" tIns="0" bIns="0"/>
+          <a:bodyPr lIns="0" tIns="0" rIns="0" bIns="0" rtlCol="0" anchor="ctr"/>
           <a:lstStyle/>
           <a:p>
             <a:pPr algn="ctr"/>
@@ -5265,7 +5359,7 @@
           <a:noFill/>
         </p:spPr>
         <p:txBody>
-          <a:bodyPr wrap="square" lIns="0" rIns="0" tIns="0" bIns="0">
+          <a:bodyPr wrap="square" lIns="0" tIns="0" rIns="0" bIns="0">
             <a:spAutoFit/>
           </a:bodyPr>
           <a:lstStyle/>
@@ -5304,7 +5398,7 @@
           <a:noFill/>
         </p:spPr>
         <p:txBody>
-          <a:bodyPr wrap="square" lIns="0" rIns="0" tIns="0" bIns="0">
+          <a:bodyPr wrap="square" lIns="0" tIns="0" rIns="0" bIns="0">
             <a:spAutoFit/>
           </a:bodyPr>
           <a:lstStyle/>
@@ -5366,7 +5460,7 @@
           </a:fontRef>
         </p:style>
         <p:txBody>
-          <a:bodyPr rtlCol="0" anchor="ctr" wrap="square" lIns="164592" rIns="164592" tIns="91440" bIns="91440"/>
+          <a:bodyPr wrap="square" lIns="164592" tIns="91440" rIns="164592" bIns="91440" rtlCol="0" anchor="ctr"/>
           <a:lstStyle/>
           <a:p>
             <a:pPr algn="l">
@@ -5433,15 +5527,39 @@
                 <a:tableStyleId>{5C22544A-7EE6-4342-B048-85BDC9FD1C3A}</a:tableStyleId>
               </a:tblPr>
               <a:tblGrid>
-                <a:gridCol w="1953347"/>
-                <a:gridCol w="790640"/>
-                <a:gridCol w="930165"/>
-                <a:gridCol w="1720806"/>
+                <a:gridCol w="1953347">
+                  <a:extLst>
+                    <a:ext uri="{9D8B030D-6E8A-4147-A177-3AD203B41FA5}">
+                      <a16:colId xmlns:a16="http://schemas.microsoft.com/office/drawing/2014/main" val="20000"/>
+                    </a:ext>
+                  </a:extLst>
+                </a:gridCol>
+                <a:gridCol w="790640">
+                  <a:extLst>
+                    <a:ext uri="{9D8B030D-6E8A-4147-A177-3AD203B41FA5}">
+                      <a16:colId xmlns:a16="http://schemas.microsoft.com/office/drawing/2014/main" val="20001"/>
+                    </a:ext>
+                  </a:extLst>
+                </a:gridCol>
+                <a:gridCol w="930165">
+                  <a:extLst>
+                    <a:ext uri="{9D8B030D-6E8A-4147-A177-3AD203B41FA5}">
+                      <a16:colId xmlns:a16="http://schemas.microsoft.com/office/drawing/2014/main" val="20002"/>
+                    </a:ext>
+                  </a:extLst>
+                </a:gridCol>
+                <a:gridCol w="1720806">
+                  <a:extLst>
+                    <a:ext uri="{9D8B030D-6E8A-4147-A177-3AD203B41FA5}">
+                      <a16:colId xmlns:a16="http://schemas.microsoft.com/office/drawing/2014/main" val="20003"/>
+                    </a:ext>
+                  </a:extLst>
+                </a:gridCol>
               </a:tblGrid>
               <a:tr h="338328">
                 <a:tc>
                   <a:txBody>
-                    <a:bodyPr wrap="square"/>
+                    <a:bodyPr/>
                     <a:lstStyle/>
                     <a:p>
                       <a:pPr algn="l"/>
@@ -5464,7 +5582,7 @@
                 </a:tc>
                 <a:tc>
                   <a:txBody>
-                    <a:bodyPr wrap="square"/>
+                    <a:bodyPr/>
                     <a:lstStyle/>
                     <a:p>
                       <a:pPr algn="r"/>
@@ -5487,7 +5605,7 @@
                 </a:tc>
                 <a:tc>
                   <a:txBody>
-                    <a:bodyPr wrap="square"/>
+                    <a:bodyPr/>
                     <a:lstStyle/>
                     <a:p>
                       <a:pPr algn="r"/>
@@ -5510,7 +5628,7 @@
                 </a:tc>
                 <a:tc>
                   <a:txBody>
-                    <a:bodyPr wrap="square"/>
+                    <a:bodyPr/>
                     <a:lstStyle/>
                     <a:p>
                       <a:pPr algn="r"/>
@@ -5531,11 +5649,16 @@
                     </a:solidFill>
                   </a:tcPr>
                 </a:tc>
+                <a:extLst>
+                  <a:ext uri="{0D108BD9-81ED-4DB2-BD59-A6C34878D82A}">
+                    <a16:rowId xmlns:a16="http://schemas.microsoft.com/office/drawing/2014/main" val="10000"/>
+                  </a:ext>
+                </a:extLst>
               </a:tr>
               <a:tr h="338328">
                 <a:tc>
                   <a:txBody>
-                    <a:bodyPr wrap="square"/>
+                    <a:bodyPr/>
                     <a:lstStyle/>
                     <a:p>
                       <a:pPr algn="l"/>
@@ -5558,7 +5681,7 @@
                 </a:tc>
                 <a:tc>
                   <a:txBody>
-                    <a:bodyPr wrap="square"/>
+                    <a:bodyPr/>
                     <a:lstStyle/>
                     <a:p>
                       <a:pPr algn="r"/>
@@ -5581,7 +5704,7 @@
                 </a:tc>
                 <a:tc>
                   <a:txBody>
-                    <a:bodyPr wrap="square"/>
+                    <a:bodyPr/>
                     <a:lstStyle/>
                     <a:p>
                       <a:pPr algn="r"/>
@@ -5604,7 +5727,7 @@
                 </a:tc>
                 <a:tc>
                   <a:txBody>
-                    <a:bodyPr wrap="square"/>
+                    <a:bodyPr/>
                     <a:lstStyle/>
                     <a:p>
                       <a:pPr algn="r"/>
@@ -5625,11 +5748,16 @@
                     </a:solidFill>
                   </a:tcPr>
                 </a:tc>
+                <a:extLst>
+                  <a:ext uri="{0D108BD9-81ED-4DB2-BD59-A6C34878D82A}">
+                    <a16:rowId xmlns:a16="http://schemas.microsoft.com/office/drawing/2014/main" val="10001"/>
+                  </a:ext>
+                </a:extLst>
               </a:tr>
               <a:tr h="338328">
                 <a:tc>
                   <a:txBody>
-                    <a:bodyPr wrap="square"/>
+                    <a:bodyPr/>
                     <a:lstStyle/>
                     <a:p>
                       <a:pPr algn="l"/>
@@ -5652,7 +5780,7 @@
                 </a:tc>
                 <a:tc>
                   <a:txBody>
-                    <a:bodyPr wrap="square"/>
+                    <a:bodyPr/>
                     <a:lstStyle/>
                     <a:p>
                       <a:pPr algn="r"/>
@@ -5675,7 +5803,7 @@
                 </a:tc>
                 <a:tc>
                   <a:txBody>
-                    <a:bodyPr wrap="square"/>
+                    <a:bodyPr/>
                     <a:lstStyle/>
                     <a:p>
                       <a:pPr algn="r"/>
@@ -5698,7 +5826,7 @@
                 </a:tc>
                 <a:tc>
                   <a:txBody>
-                    <a:bodyPr wrap="square"/>
+                    <a:bodyPr/>
                     <a:lstStyle/>
                     <a:p>
                       <a:pPr algn="r"/>
@@ -5719,11 +5847,16 @@
                     </a:solidFill>
                   </a:tcPr>
                 </a:tc>
+                <a:extLst>
+                  <a:ext uri="{0D108BD9-81ED-4DB2-BD59-A6C34878D82A}">
+                    <a16:rowId xmlns:a16="http://schemas.microsoft.com/office/drawing/2014/main" val="10002"/>
+                  </a:ext>
+                </a:extLst>
               </a:tr>
               <a:tr h="338328">
                 <a:tc>
                   <a:txBody>
-                    <a:bodyPr wrap="square"/>
+                    <a:bodyPr/>
                     <a:lstStyle/>
                     <a:p>
                       <a:pPr algn="l"/>
@@ -5746,7 +5879,7 @@
                 </a:tc>
                 <a:tc>
                   <a:txBody>
-                    <a:bodyPr wrap="square"/>
+                    <a:bodyPr/>
                     <a:lstStyle/>
                     <a:p>
                       <a:pPr algn="r"/>
@@ -5769,7 +5902,7 @@
                 </a:tc>
                 <a:tc>
                   <a:txBody>
-                    <a:bodyPr wrap="square"/>
+                    <a:bodyPr/>
                     <a:lstStyle/>
                     <a:p>
                       <a:pPr algn="r"/>
@@ -5792,7 +5925,7 @@
                 </a:tc>
                 <a:tc>
                   <a:txBody>
-                    <a:bodyPr wrap="square"/>
+                    <a:bodyPr/>
                     <a:lstStyle/>
                     <a:p>
                       <a:pPr algn="r"/>
@@ -5813,6 +5946,11 @@
                     </a:solidFill>
                   </a:tcPr>
                 </a:tc>
+                <a:extLst>
+                  <a:ext uri="{0D108BD9-81ED-4DB2-BD59-A6C34878D82A}">
+                    <a16:rowId xmlns:a16="http://schemas.microsoft.com/office/drawing/2014/main" val="10003"/>
+                  </a:ext>
+                </a:extLst>
               </a:tr>
             </a:tbl>
           </a:graphicData>
@@ -5835,7 +5973,7 @@
           <a:noFill/>
         </p:spPr>
         <p:txBody>
-          <a:bodyPr wrap="square" lIns="0" rIns="0" tIns="0" bIns="0">
+          <a:bodyPr wrap="square" lIns="0" tIns="0" rIns="0" bIns="0">
             <a:spAutoFit/>
           </a:bodyPr>
           <a:lstStyle/>
@@ -5899,7 +6037,9 @@
         <p:txBody>
           <a:bodyPr rtlCol="0" anchor="ctr"/>
           <a:lstStyle/>
-          <a:p/>
+          <a:p>
+            <a:endParaRPr/>
+          </a:p>
         </p:txBody>
       </p:sp>
       <p:sp>
@@ -5919,7 +6059,7 @@
           <a:noFill/>
         </p:spPr>
         <p:txBody>
-          <a:bodyPr wrap="square" lIns="0" rIns="0" tIns="0" bIns="0">
+          <a:bodyPr wrap="square" lIns="0" tIns="0" rIns="0" bIns="0">
             <a:spAutoFit/>
           </a:bodyPr>
           <a:lstStyle/>
@@ -5958,7 +6098,7 @@
           <a:noFill/>
         </p:spPr>
         <p:txBody>
-          <a:bodyPr wrap="square" lIns="0" rIns="0" tIns="0" bIns="0">
+          <a:bodyPr wrap="square" lIns="0" tIns="0" rIns="0" bIns="0">
             <a:spAutoFit/>
           </a:bodyPr>
           <a:lstStyle/>
@@ -6019,7 +6159,9 @@
         <p:txBody>
           <a:bodyPr rtlCol="0" anchor="ctr"/>
           <a:lstStyle/>
-          <a:p/>
+          <a:p>
+            <a:endParaRPr/>
+          </a:p>
         </p:txBody>
       </p:sp>
       <p:sp>
@@ -6063,7 +6205,9 @@
         <p:txBody>
           <a:bodyPr rtlCol="0" anchor="ctr"/>
           <a:lstStyle/>
-          <a:p/>
+          <a:p>
+            <a:endParaRPr/>
+          </a:p>
         </p:txBody>
       </p:sp>
       <p:sp>
@@ -6083,7 +6227,7 @@
           <a:noFill/>
         </p:spPr>
         <p:txBody>
-          <a:bodyPr wrap="square" lIns="0" rIns="0" tIns="0" bIns="0">
+          <a:bodyPr wrap="square" lIns="0" tIns="0" rIns="0" bIns="0">
             <a:spAutoFit/>
           </a:bodyPr>
           <a:lstStyle/>
@@ -6122,7 +6266,7 @@
           <a:noFill/>
         </p:spPr>
         <p:txBody>
-          <a:bodyPr wrap="square" lIns="0" rIns="0" tIns="0" bIns="0">
+          <a:bodyPr wrap="square" lIns="0" tIns="0" rIns="0" bIns="0">
             <a:spAutoFit/>
           </a:bodyPr>
           <a:lstStyle/>
@@ -6183,7 +6327,9 @@
         <p:txBody>
           <a:bodyPr rtlCol="0" anchor="ctr"/>
           <a:lstStyle/>
-          <a:p/>
+          <a:p>
+            <a:endParaRPr/>
+          </a:p>
         </p:txBody>
       </p:sp>
       <p:sp>
@@ -6227,7 +6373,9 @@
         <p:txBody>
           <a:bodyPr rtlCol="0" anchor="ctr"/>
           <a:lstStyle/>
-          <a:p/>
+          <a:p>
+            <a:endParaRPr/>
+          </a:p>
         </p:txBody>
       </p:sp>
       <p:sp>
@@ -6247,7 +6395,7 @@
           <a:noFill/>
         </p:spPr>
         <p:txBody>
-          <a:bodyPr wrap="square" lIns="0" rIns="0" tIns="0" bIns="0">
+          <a:bodyPr wrap="square" lIns="0" tIns="0" rIns="0" bIns="0">
             <a:spAutoFit/>
           </a:bodyPr>
           <a:lstStyle/>
@@ -6286,7 +6434,7 @@
           <a:noFill/>
         </p:spPr>
         <p:txBody>
-          <a:bodyPr wrap="square" lIns="0" rIns="0" tIns="0" bIns="0">
+          <a:bodyPr wrap="square" lIns="0" tIns="0" rIns="0" bIns="0">
             <a:spAutoFit/>
           </a:bodyPr>
           <a:lstStyle/>
@@ -6347,7 +6495,9 @@
         <p:txBody>
           <a:bodyPr rtlCol="0" anchor="ctr"/>
           <a:lstStyle/>
-          <a:p/>
+          <a:p>
+            <a:endParaRPr/>
+          </a:p>
         </p:txBody>
       </p:sp>
       <p:sp>
@@ -6391,7 +6541,9 @@
         <p:txBody>
           <a:bodyPr rtlCol="0" anchor="ctr"/>
           <a:lstStyle/>
-          <a:p/>
+          <a:p>
+            <a:endParaRPr/>
+          </a:p>
         </p:txBody>
       </p:sp>
       <p:sp>
@@ -6411,7 +6563,7 @@
           <a:noFill/>
         </p:spPr>
         <p:txBody>
-          <a:bodyPr wrap="square" lIns="0" rIns="0" tIns="0" bIns="0">
+          <a:bodyPr wrap="square" lIns="0" tIns="0" rIns="0" bIns="0">
             <a:spAutoFit/>
           </a:bodyPr>
           <a:lstStyle/>
@@ -6450,7 +6602,7 @@
           <a:noFill/>
         </p:spPr>
         <p:txBody>
-          <a:bodyPr wrap="square" lIns="0" rIns="0" tIns="0" bIns="0">
+          <a:bodyPr wrap="square" lIns="0" tIns="0" rIns="0" bIns="0">
             <a:spAutoFit/>
           </a:bodyPr>
           <a:lstStyle/>
@@ -6511,7 +6663,9 @@
         <p:txBody>
           <a:bodyPr rtlCol="0" anchor="ctr"/>
           <a:lstStyle/>
-          <a:p/>
+          <a:p>
+            <a:endParaRPr/>
+          </a:p>
         </p:txBody>
       </p:sp>
       <p:sp>
@@ -6555,7 +6709,9 @@
         <p:txBody>
           <a:bodyPr rtlCol="0" anchor="ctr"/>
           <a:lstStyle/>
-          <a:p/>
+          <a:p>
+            <a:endParaRPr/>
+          </a:p>
         </p:txBody>
       </p:sp>
       <p:sp>
@@ -6575,7 +6731,7 @@
           <a:noFill/>
         </p:spPr>
         <p:txBody>
-          <a:bodyPr wrap="square" lIns="0" rIns="0" tIns="0" bIns="0">
+          <a:bodyPr wrap="square" lIns="0" tIns="0" rIns="0" bIns="0">
             <a:spAutoFit/>
           </a:bodyPr>
           <a:lstStyle/>
@@ -6614,7 +6770,7 @@
           <a:noFill/>
         </p:spPr>
         <p:txBody>
-          <a:bodyPr wrap="square" lIns="0" rIns="0" tIns="0" bIns="0">
+          <a:bodyPr wrap="square" lIns="0" tIns="0" rIns="0" bIns="0">
             <a:spAutoFit/>
           </a:bodyPr>
           <a:lstStyle/>
@@ -6675,7 +6831,9 @@
         <p:txBody>
           <a:bodyPr rtlCol="0" anchor="ctr"/>
           <a:lstStyle/>
-          <a:p/>
+          <a:p>
+            <a:endParaRPr/>
+          </a:p>
         </p:txBody>
       </p:sp>
       <p:sp>
@@ -6719,7 +6877,9 @@
         <p:txBody>
           <a:bodyPr rtlCol="0" anchor="ctr"/>
           <a:lstStyle/>
-          <a:p/>
+          <a:p>
+            <a:endParaRPr/>
+          </a:p>
         </p:txBody>
       </p:sp>
       <p:sp>
@@ -6739,7 +6899,7 @@
           <a:noFill/>
         </p:spPr>
         <p:txBody>
-          <a:bodyPr wrap="square" lIns="0" rIns="0" tIns="0" bIns="0">
+          <a:bodyPr wrap="square" lIns="0" tIns="0" rIns="0" bIns="0">
             <a:spAutoFit/>
           </a:bodyPr>
           <a:lstStyle/>
@@ -6778,7 +6938,7 @@
           <a:noFill/>
         </p:spPr>
         <p:txBody>
-          <a:bodyPr wrap="square" lIns="0" rIns="0" tIns="0" bIns="0">
+          <a:bodyPr wrap="square" lIns="0" tIns="0" rIns="0" bIns="0">
             <a:spAutoFit/>
           </a:bodyPr>
           <a:lstStyle/>
@@ -6820,7 +6980,7 @@
           <a:noFill/>
         </p:spPr>
         <p:txBody>
-          <a:bodyPr wrap="square" lIns="0" rIns="0" tIns="0" bIns="0">
+          <a:bodyPr wrap="square" lIns="0" tIns="0" rIns="0" bIns="0">
             <a:spAutoFit/>
           </a:bodyPr>
           <a:lstStyle/>
@@ -6927,7 +7087,7 @@
           <a:noFill/>
         </p:spPr>
         <p:txBody>
-          <a:bodyPr wrap="square" lIns="0" rIns="0" tIns="0" bIns="0">
+          <a:bodyPr wrap="square" lIns="0" tIns="0" rIns="0" bIns="0">
             <a:spAutoFit/>
           </a:bodyPr>
           <a:lstStyle/>
@@ -6961,7 +7121,7 @@
 </file>
 
 <file path=ppt/slides/slide12.xml><?xml version="1.0" encoding="utf-8"?>
-<p:sld xmlns:a="http://schemas.openxmlformats.org/drawingml/2006/main" xmlns:p="http://schemas.openxmlformats.org/presentationml/2006/main" xmlns:r="http://schemas.openxmlformats.org/officeDocument/2006/relationships">
+<p:sld xmlns:a="http://schemas.openxmlformats.org/drawingml/2006/main" xmlns:r="http://schemas.openxmlformats.org/officeDocument/2006/relationships" xmlns:p="http://schemas.openxmlformats.org/presentationml/2006/main">
   <p:cSld>
     <p:spTree>
       <p:nvGrpSpPr>
@@ -6969,7 +7129,14 @@
         <p:cNvGrpSpPr/>
         <p:nvPr/>
       </p:nvGrpSpPr>
-      <p:grpSpPr/>
+      <p:grpSpPr>
+        <a:xfrm>
+          <a:off x="0" y="0"/>
+          <a:ext cx="0" cy="0"/>
+          <a:chOff x="0" y="0"/>
+          <a:chExt cx="0" cy="0"/>
+        </a:xfrm>
+      </p:grpSpPr>
       <p:sp>
         <p:nvSpPr>
           <p:cNvPr id="2" name="TextBox 1"/>
@@ -6987,7 +7154,7 @@
           <a:noFill/>
         </p:spPr>
         <p:txBody>
-          <a:bodyPr wrap="square" lIns="0" rIns="0" tIns="0" bIns="0">
+          <a:bodyPr wrap="square" lIns="0" tIns="0" rIns="0" bIns="0">
             <a:spAutoFit/>
           </a:bodyPr>
           <a:lstStyle/>
@@ -7026,7 +7193,7 @@
           <a:noFill/>
         </p:spPr>
         <p:txBody>
-          <a:bodyPr wrap="square" lIns="0" rIns="0" tIns="0" bIns="0">
+          <a:bodyPr wrap="square" lIns="0" tIns="0" rIns="0" bIns="0">
             <a:spAutoFit/>
           </a:bodyPr>
           <a:lstStyle/>
@@ -7089,7 +7256,7 @@
           <a:noFill/>
         </p:spPr>
         <p:txBody>
-          <a:bodyPr wrap="square" lIns="0" rIns="0" tIns="0" bIns="0">
+          <a:bodyPr wrap="square" lIns="0" tIns="0" rIns="0" bIns="0">
             <a:spAutoFit/>
           </a:bodyPr>
           <a:lstStyle/>
@@ -7224,7 +7391,7 @@
           <a:noFill/>
         </p:spPr>
         <p:txBody>
-          <a:bodyPr wrap="square" lIns="0" rIns="0" tIns="0" bIns="0">
+          <a:bodyPr wrap="square" lIns="0" tIns="0" rIns="0" bIns="0">
             <a:spAutoFit/>
           </a:bodyPr>
           <a:lstStyle/>
@@ -7263,7 +7430,7 @@
           <a:noFill/>
         </p:spPr>
         <p:txBody>
-          <a:bodyPr wrap="square" lIns="0" rIns="0" tIns="0" bIns="0">
+          <a:bodyPr wrap="square" lIns="0" tIns="0" rIns="0" bIns="0">
             <a:spAutoFit/>
           </a:bodyPr>
           <a:lstStyle/>
@@ -7305,7 +7472,7 @@
           <a:noFill/>
         </p:spPr>
         <p:txBody>
-          <a:bodyPr wrap="square" lIns="0" rIns="0" tIns="0" bIns="0">
+          <a:bodyPr wrap="square" lIns="0" tIns="0" rIns="0" bIns="0">
             <a:spAutoFit/>
           </a:bodyPr>
           <a:lstStyle/>
@@ -7344,7 +7511,7 @@
           <a:noFill/>
         </p:spPr>
         <p:txBody>
-          <a:bodyPr wrap="square" lIns="0" rIns="0" tIns="0" bIns="0">
+          <a:bodyPr wrap="square" lIns="0" tIns="0" rIns="0" bIns="0">
             <a:spAutoFit/>
           </a:bodyPr>
           <a:lstStyle/>
@@ -7386,7 +7553,7 @@
           <a:noFill/>
         </p:spPr>
         <p:txBody>
-          <a:bodyPr wrap="square" lIns="0" rIns="0" tIns="0" bIns="0">
+          <a:bodyPr wrap="square" lIns="0" tIns="0" rIns="0" bIns="0">
             <a:spAutoFit/>
           </a:bodyPr>
           <a:lstStyle/>
@@ -7425,7 +7592,7 @@
           <a:noFill/>
         </p:spPr>
         <p:txBody>
-          <a:bodyPr wrap="square" lIns="0" rIns="0" tIns="0" bIns="0">
+          <a:bodyPr wrap="square" lIns="0" tIns="0" rIns="0" bIns="0">
             <a:spAutoFit/>
           </a:bodyPr>
           <a:lstStyle/>
@@ -7467,7 +7634,7 @@
           <a:noFill/>
         </p:spPr>
         <p:txBody>
-          <a:bodyPr wrap="square" lIns="0" rIns="0" tIns="0" bIns="0">
+          <a:bodyPr wrap="square" lIns="0" tIns="0" rIns="0" bIns="0">
             <a:spAutoFit/>
           </a:bodyPr>
           <a:lstStyle/>
@@ -7509,7 +7676,7 @@
           <a:noFill/>
         </p:spPr>
         <p:txBody>
-          <a:bodyPr wrap="square" lIns="0" rIns="0" tIns="0" bIns="0">
+          <a:bodyPr wrap="square" lIns="0" tIns="0" rIns="0" bIns="0">
             <a:spAutoFit/>
           </a:bodyPr>
           <a:lstStyle/>
@@ -7543,7 +7710,7 @@
 </file>
 
 <file path=ppt/slides/slide2.xml><?xml version="1.0" encoding="utf-8"?>
-<p:sld xmlns:a="http://schemas.openxmlformats.org/drawingml/2006/main" xmlns:p="http://schemas.openxmlformats.org/presentationml/2006/main" xmlns:r="http://schemas.openxmlformats.org/officeDocument/2006/relationships">
+<p:sld xmlns:a="http://schemas.openxmlformats.org/drawingml/2006/main" xmlns:r="http://schemas.openxmlformats.org/officeDocument/2006/relationships" xmlns:p="http://schemas.openxmlformats.org/presentationml/2006/main">
   <p:cSld>
     <p:spTree>
       <p:nvGrpSpPr>
@@ -7551,7 +7718,14 @@
         <p:cNvGrpSpPr/>
         <p:nvPr/>
       </p:nvGrpSpPr>
-      <p:grpSpPr/>
+      <p:grpSpPr>
+        <a:xfrm>
+          <a:off x="0" y="0"/>
+          <a:ext cx="0" cy="0"/>
+          <a:chOff x="0" y="0"/>
+          <a:chExt cx="0" cy="0"/>
+        </a:xfrm>
+      </p:grpSpPr>
       <p:sp>
         <p:nvSpPr>
           <p:cNvPr id="2" name="TextBox 1"/>
@@ -7569,7 +7743,7 @@
           <a:noFill/>
         </p:spPr>
         <p:txBody>
-          <a:bodyPr wrap="square" lIns="0" rIns="0" tIns="0" bIns="0">
+          <a:bodyPr wrap="square" lIns="0" tIns="0" rIns="0" bIns="0">
             <a:spAutoFit/>
           </a:bodyPr>
           <a:lstStyle/>
@@ -7608,7 +7782,7 @@
           <a:noFill/>
         </p:spPr>
         <p:txBody>
-          <a:bodyPr wrap="square" lIns="0" rIns="0" tIns="0" bIns="0">
+          <a:bodyPr wrap="square" lIns="0" tIns="0" rIns="0" bIns="0">
             <a:spAutoFit/>
           </a:bodyPr>
           <a:lstStyle/>
@@ -7647,7 +7821,7 @@
           <a:noFill/>
         </p:spPr>
         <p:txBody>
-          <a:bodyPr wrap="square" lIns="0" rIns="0" tIns="0" bIns="0">
+          <a:bodyPr wrap="square" lIns="0" tIns="0" rIns="0" bIns="0">
             <a:spAutoFit/>
           </a:bodyPr>
           <a:lstStyle/>
@@ -7689,7 +7863,7 @@
           <a:noFill/>
         </p:spPr>
         <p:txBody>
-          <a:bodyPr wrap="square" lIns="0" rIns="0" tIns="0" bIns="0">
+          <a:bodyPr wrap="square" lIns="0" tIns="0" rIns="0" bIns="0">
             <a:spAutoFit/>
           </a:bodyPr>
           <a:lstStyle/>
@@ -7728,7 +7902,7 @@
           <a:noFill/>
         </p:spPr>
         <p:txBody>
-          <a:bodyPr wrap="square" lIns="0" rIns="0" tIns="0" bIns="0">
+          <a:bodyPr wrap="square" lIns="0" tIns="0" rIns="0" bIns="0">
             <a:spAutoFit/>
           </a:bodyPr>
           <a:lstStyle/>
@@ -7770,7 +7944,7 @@
           <a:noFill/>
         </p:spPr>
         <p:txBody>
-          <a:bodyPr wrap="square" lIns="0" rIns="0" tIns="0" bIns="0">
+          <a:bodyPr wrap="square" lIns="0" tIns="0" rIns="0" bIns="0">
             <a:spAutoFit/>
           </a:bodyPr>
           <a:lstStyle/>
@@ -7809,7 +7983,7 @@
           <a:noFill/>
         </p:spPr>
         <p:txBody>
-          <a:bodyPr wrap="square" lIns="0" rIns="0" tIns="0" bIns="0">
+          <a:bodyPr wrap="square" lIns="0" tIns="0" rIns="0" bIns="0">
             <a:spAutoFit/>
           </a:bodyPr>
           <a:lstStyle/>
@@ -7851,7 +8025,7 @@
           <a:noFill/>
         </p:spPr>
         <p:txBody>
-          <a:bodyPr wrap="square" lIns="0" rIns="0" tIns="0" bIns="0">
+          <a:bodyPr wrap="square" lIns="0" tIns="0" rIns="0" bIns="0">
             <a:spAutoFit/>
           </a:bodyPr>
           <a:lstStyle/>
@@ -7902,15 +8076,12 @@
                 <a:spcPts val="900"/>
               </a:spcAft>
             </a:pPr>
-            <a:r>
-              <a:rPr sz="1400" b="0">
-                <a:solidFill>
-                  <a:srgbClr val="595959"/>
-                </a:solidFill>
-                <a:latin typeface="Calibri"/>
-              </a:rPr>
-              <a:t/>
-            </a:r>
+            <a:endParaRPr sz="1400" b="0">
+              <a:solidFill>
+                <a:srgbClr val="595959"/>
+              </a:solidFill>
+              <a:latin typeface="Calibri"/>
+            </a:endParaRPr>
           </a:p>
           <a:p>
             <a:pPr algn="l">
@@ -8007,7 +8178,7 @@
 </file>
 
 <file path=ppt/slides/slide3.xml><?xml version="1.0" encoding="utf-8"?>
-<p:sld xmlns:a="http://schemas.openxmlformats.org/drawingml/2006/main" xmlns:p="http://schemas.openxmlformats.org/presentationml/2006/main" xmlns:r="http://schemas.openxmlformats.org/officeDocument/2006/relationships">
+<p:sld xmlns:a="http://schemas.openxmlformats.org/drawingml/2006/main" xmlns:r="http://schemas.openxmlformats.org/officeDocument/2006/relationships" xmlns:p="http://schemas.openxmlformats.org/presentationml/2006/main">
   <p:cSld>
     <p:spTree>
       <p:nvGrpSpPr>
@@ -8015,7 +8186,14 @@
         <p:cNvGrpSpPr/>
         <p:nvPr/>
       </p:nvGrpSpPr>
-      <p:grpSpPr/>
+      <p:grpSpPr>
+        <a:xfrm>
+          <a:off x="0" y="0"/>
+          <a:ext cx="0" cy="0"/>
+          <a:chOff x="0" y="0"/>
+          <a:chExt cx="0" cy="0"/>
+        </a:xfrm>
+      </p:grpSpPr>
       <p:sp>
         <p:nvSpPr>
           <p:cNvPr id="2" name="TextBox 1"/>
@@ -8033,7 +8211,7 @@
           <a:noFill/>
         </p:spPr>
         <p:txBody>
-          <a:bodyPr wrap="square" lIns="0" rIns="0" tIns="0" bIns="0">
+          <a:bodyPr wrap="square" lIns="0" tIns="0" rIns="0" bIns="0">
             <a:spAutoFit/>
           </a:bodyPr>
           <a:lstStyle/>
@@ -8072,7 +8250,7 @@
           <a:noFill/>
         </p:spPr>
         <p:txBody>
-          <a:bodyPr wrap="square" lIns="0" rIns="0" tIns="0" bIns="0">
+          <a:bodyPr wrap="square" lIns="0" tIns="0" rIns="0" bIns="0">
             <a:spAutoFit/>
           </a:bodyPr>
           <a:lstStyle/>
@@ -8113,14 +8291,32 @@
                 <a:tableStyleId>{5C22544A-7EE6-4342-B048-85BDC9FD1C3A}</a:tableStyleId>
               </a:tblPr>
               <a:tblGrid>
-                <a:gridCol w="3251200"/>
-                <a:gridCol w="1517226"/>
-                <a:gridCol w="1083733"/>
+                <a:gridCol w="3251200">
+                  <a:extLst>
+                    <a:ext uri="{9D8B030D-6E8A-4147-A177-3AD203B41FA5}">
+                      <a16:colId xmlns:a16="http://schemas.microsoft.com/office/drawing/2014/main" val="20000"/>
+                    </a:ext>
+                  </a:extLst>
+                </a:gridCol>
+                <a:gridCol w="1517226">
+                  <a:extLst>
+                    <a:ext uri="{9D8B030D-6E8A-4147-A177-3AD203B41FA5}">
+                      <a16:colId xmlns:a16="http://schemas.microsoft.com/office/drawing/2014/main" val="20001"/>
+                    </a:ext>
+                  </a:extLst>
+                </a:gridCol>
+                <a:gridCol w="1083733">
+                  <a:extLst>
+                    <a:ext uri="{9D8B030D-6E8A-4147-A177-3AD203B41FA5}">
+                      <a16:colId xmlns:a16="http://schemas.microsoft.com/office/drawing/2014/main" val="20002"/>
+                    </a:ext>
+                  </a:extLst>
+                </a:gridCol>
               </a:tblGrid>
               <a:tr h="384048">
                 <a:tc>
                   <a:txBody>
-                    <a:bodyPr wrap="square"/>
+                    <a:bodyPr/>
                     <a:lstStyle/>
                     <a:p>
                       <a:pPr algn="l"/>
@@ -8143,7 +8339,7 @@
                 </a:tc>
                 <a:tc>
                   <a:txBody>
-                    <a:bodyPr wrap="square"/>
+                    <a:bodyPr/>
                     <a:lstStyle/>
                     <a:p>
                       <a:pPr algn="r"/>
@@ -8166,7 +8362,7 @@
                 </a:tc>
                 <a:tc>
                   <a:txBody>
-                    <a:bodyPr wrap="square"/>
+                    <a:bodyPr/>
                     <a:lstStyle/>
                     <a:p>
                       <a:pPr algn="r"/>
@@ -8187,11 +8383,16 @@
                     </a:solidFill>
                   </a:tcPr>
                 </a:tc>
+                <a:extLst>
+                  <a:ext uri="{0D108BD9-81ED-4DB2-BD59-A6C34878D82A}">
+                    <a16:rowId xmlns:a16="http://schemas.microsoft.com/office/drawing/2014/main" val="10000"/>
+                  </a:ext>
+                </a:extLst>
               </a:tr>
               <a:tr h="384048">
                 <a:tc>
                   <a:txBody>
-                    <a:bodyPr wrap="square"/>
+                    <a:bodyPr/>
                     <a:lstStyle/>
                     <a:p>
                       <a:pPr algn="l"/>
@@ -8214,7 +8415,7 @@
                 </a:tc>
                 <a:tc>
                   <a:txBody>
-                    <a:bodyPr wrap="square"/>
+                    <a:bodyPr/>
                     <a:lstStyle/>
                     <a:p>
                       <a:pPr algn="r"/>
@@ -8237,7 +8438,7 @@
                 </a:tc>
                 <a:tc>
                   <a:txBody>
-                    <a:bodyPr wrap="square"/>
+                    <a:bodyPr/>
                     <a:lstStyle/>
                     <a:p>
                       <a:pPr algn="r"/>
@@ -8258,11 +8459,16 @@
                     </a:solidFill>
                   </a:tcPr>
                 </a:tc>
+                <a:extLst>
+                  <a:ext uri="{0D108BD9-81ED-4DB2-BD59-A6C34878D82A}">
+                    <a16:rowId xmlns:a16="http://schemas.microsoft.com/office/drawing/2014/main" val="10001"/>
+                  </a:ext>
+                </a:extLst>
               </a:tr>
               <a:tr h="384048">
                 <a:tc>
                   <a:txBody>
-                    <a:bodyPr wrap="square"/>
+                    <a:bodyPr/>
                     <a:lstStyle/>
                     <a:p>
                       <a:pPr algn="l"/>
@@ -8285,7 +8491,7 @@
                 </a:tc>
                 <a:tc>
                   <a:txBody>
-                    <a:bodyPr wrap="square"/>
+                    <a:bodyPr/>
                     <a:lstStyle/>
                     <a:p>
                       <a:pPr algn="r"/>
@@ -8308,7 +8514,7 @@
                 </a:tc>
                 <a:tc>
                   <a:txBody>
-                    <a:bodyPr wrap="square"/>
+                    <a:bodyPr/>
                     <a:lstStyle/>
                     <a:p>
                       <a:pPr algn="r"/>
@@ -8329,11 +8535,16 @@
                     </a:solidFill>
                   </a:tcPr>
                 </a:tc>
+                <a:extLst>
+                  <a:ext uri="{0D108BD9-81ED-4DB2-BD59-A6C34878D82A}">
+                    <a16:rowId xmlns:a16="http://schemas.microsoft.com/office/drawing/2014/main" val="10002"/>
+                  </a:ext>
+                </a:extLst>
               </a:tr>
               <a:tr h="384048">
                 <a:tc>
                   <a:txBody>
-                    <a:bodyPr wrap="square"/>
+                    <a:bodyPr/>
                     <a:lstStyle/>
                     <a:p>
                       <a:pPr algn="l"/>
@@ -8356,7 +8567,7 @@
                 </a:tc>
                 <a:tc>
                   <a:txBody>
-                    <a:bodyPr wrap="square"/>
+                    <a:bodyPr/>
                     <a:lstStyle/>
                     <a:p>
                       <a:pPr algn="r"/>
@@ -8379,7 +8590,7 @@
                 </a:tc>
                 <a:tc>
                   <a:txBody>
-                    <a:bodyPr wrap="square"/>
+                    <a:bodyPr/>
                     <a:lstStyle/>
                     <a:p>
                       <a:pPr algn="r"/>
@@ -8400,11 +8611,16 @@
                     </a:solidFill>
                   </a:tcPr>
                 </a:tc>
+                <a:extLst>
+                  <a:ext uri="{0D108BD9-81ED-4DB2-BD59-A6C34878D82A}">
+                    <a16:rowId xmlns:a16="http://schemas.microsoft.com/office/drawing/2014/main" val="10003"/>
+                  </a:ext>
+                </a:extLst>
               </a:tr>
               <a:tr h="384048">
                 <a:tc>
                   <a:txBody>
-                    <a:bodyPr wrap="square"/>
+                    <a:bodyPr/>
                     <a:lstStyle/>
                     <a:p>
                       <a:pPr algn="l"/>
@@ -8427,7 +8643,7 @@
                 </a:tc>
                 <a:tc>
                   <a:txBody>
-                    <a:bodyPr wrap="square"/>
+                    <a:bodyPr/>
                     <a:lstStyle/>
                     <a:p>
                       <a:pPr algn="r"/>
@@ -8450,7 +8666,7 @@
                 </a:tc>
                 <a:tc>
                   <a:txBody>
-                    <a:bodyPr wrap="square"/>
+                    <a:bodyPr/>
                     <a:lstStyle/>
                     <a:p>
                       <a:pPr algn="r"/>
@@ -8471,11 +8687,16 @@
                     </a:solidFill>
                   </a:tcPr>
                 </a:tc>
+                <a:extLst>
+                  <a:ext uri="{0D108BD9-81ED-4DB2-BD59-A6C34878D82A}">
+                    <a16:rowId xmlns:a16="http://schemas.microsoft.com/office/drawing/2014/main" val="10004"/>
+                  </a:ext>
+                </a:extLst>
               </a:tr>
               <a:tr h="384048">
                 <a:tc>
                   <a:txBody>
-                    <a:bodyPr wrap="square"/>
+                    <a:bodyPr/>
                     <a:lstStyle/>
                     <a:p>
                       <a:pPr algn="l"/>
@@ -8498,7 +8719,7 @@
                 </a:tc>
                 <a:tc>
                   <a:txBody>
-                    <a:bodyPr wrap="square"/>
+                    <a:bodyPr/>
                     <a:lstStyle/>
                     <a:p>
                       <a:pPr algn="r"/>
@@ -8521,7 +8742,7 @@
                 </a:tc>
                 <a:tc>
                   <a:txBody>
-                    <a:bodyPr wrap="square"/>
+                    <a:bodyPr/>
                     <a:lstStyle/>
                     <a:p>
                       <a:pPr algn="r"/>
@@ -8542,11 +8763,16 @@
                     </a:solidFill>
                   </a:tcPr>
                 </a:tc>
+                <a:extLst>
+                  <a:ext uri="{0D108BD9-81ED-4DB2-BD59-A6C34878D82A}">
+                    <a16:rowId xmlns:a16="http://schemas.microsoft.com/office/drawing/2014/main" val="10005"/>
+                  </a:ext>
+                </a:extLst>
               </a:tr>
               <a:tr h="384048">
                 <a:tc>
                   <a:txBody>
-                    <a:bodyPr wrap="square"/>
+                    <a:bodyPr/>
                     <a:lstStyle/>
                     <a:p>
                       <a:pPr algn="l"/>
@@ -8569,7 +8795,7 @@
                 </a:tc>
                 <a:tc>
                   <a:txBody>
-                    <a:bodyPr wrap="square"/>
+                    <a:bodyPr/>
                     <a:lstStyle/>
                     <a:p>
                       <a:pPr algn="r"/>
@@ -8592,7 +8818,7 @@
                 </a:tc>
                 <a:tc>
                   <a:txBody>
-                    <a:bodyPr wrap="square"/>
+                    <a:bodyPr/>
                     <a:lstStyle/>
                     <a:p>
                       <a:pPr algn="r"/>
@@ -8613,11 +8839,16 @@
                     </a:solidFill>
                   </a:tcPr>
                 </a:tc>
+                <a:extLst>
+                  <a:ext uri="{0D108BD9-81ED-4DB2-BD59-A6C34878D82A}">
+                    <a16:rowId xmlns:a16="http://schemas.microsoft.com/office/drawing/2014/main" val="10006"/>
+                  </a:ext>
+                </a:extLst>
               </a:tr>
               <a:tr h="384048">
                 <a:tc>
                   <a:txBody>
-                    <a:bodyPr wrap="square"/>
+                    <a:bodyPr/>
                     <a:lstStyle/>
                     <a:p>
                       <a:pPr algn="l"/>
@@ -8640,7 +8871,7 @@
                 </a:tc>
                 <a:tc>
                   <a:txBody>
-                    <a:bodyPr wrap="square"/>
+                    <a:bodyPr/>
                     <a:lstStyle/>
                     <a:p>
                       <a:pPr algn="r"/>
@@ -8663,7 +8894,7 @@
                 </a:tc>
                 <a:tc>
                   <a:txBody>
-                    <a:bodyPr wrap="square"/>
+                    <a:bodyPr/>
                     <a:lstStyle/>
                     <a:p>
                       <a:pPr algn="r"/>
@@ -8684,11 +8915,16 @@
                     </a:solidFill>
                   </a:tcPr>
                 </a:tc>
+                <a:extLst>
+                  <a:ext uri="{0D108BD9-81ED-4DB2-BD59-A6C34878D82A}">
+                    <a16:rowId xmlns:a16="http://schemas.microsoft.com/office/drawing/2014/main" val="10007"/>
+                  </a:ext>
+                </a:extLst>
               </a:tr>
               <a:tr h="384048">
                 <a:tc>
                   <a:txBody>
-                    <a:bodyPr wrap="square"/>
+                    <a:bodyPr/>
                     <a:lstStyle/>
                     <a:p>
                       <a:pPr algn="l"/>
@@ -8711,7 +8947,7 @@
                 </a:tc>
                 <a:tc>
                   <a:txBody>
-                    <a:bodyPr wrap="square"/>
+                    <a:bodyPr/>
                     <a:lstStyle/>
                     <a:p>
                       <a:pPr algn="r"/>
@@ -8734,7 +8970,7 @@
                 </a:tc>
                 <a:tc>
                   <a:txBody>
-                    <a:bodyPr wrap="square"/>
+                    <a:bodyPr/>
                     <a:lstStyle/>
                     <a:p>
                       <a:pPr algn="r"/>
@@ -8755,6 +8991,11 @@
                     </a:solidFill>
                   </a:tcPr>
                 </a:tc>
+                <a:extLst>
+                  <a:ext uri="{0D108BD9-81ED-4DB2-BD59-A6C34878D82A}">
+                    <a16:rowId xmlns:a16="http://schemas.microsoft.com/office/drawing/2014/main" val="10008"/>
+                  </a:ext>
+                </a:extLst>
               </a:tr>
             </a:tbl>
           </a:graphicData>
@@ -8777,7 +9018,7 @@
           <a:noFill/>
         </p:spPr>
         <p:txBody>
-          <a:bodyPr wrap="square" lIns="0" rIns="0" tIns="0" bIns="0">
+          <a:bodyPr wrap="square" lIns="0" tIns="0" rIns="0" bIns="0">
             <a:spAutoFit/>
           </a:bodyPr>
           <a:lstStyle/>
@@ -8816,7 +9057,7 @@
           <a:noFill/>
         </p:spPr>
         <p:txBody>
-          <a:bodyPr wrap="square" lIns="0" rIns="0" tIns="0" bIns="0">
+          <a:bodyPr wrap="square" lIns="0" tIns="0" rIns="0" bIns="0">
             <a:spAutoFit/>
           </a:bodyPr>
           <a:lstStyle/>
@@ -8877,7 +9118,7 @@
           <a:noFill/>
         </p:spPr>
         <p:txBody>
-          <a:bodyPr wrap="square" lIns="0" rIns="0" tIns="0" bIns="0">
+          <a:bodyPr wrap="square" lIns="0" tIns="0" rIns="0" bIns="0">
             <a:spAutoFit/>
           </a:bodyPr>
           <a:lstStyle/>
@@ -8911,7 +9152,7 @@
 </file>
 
 <file path=ppt/slides/slide4.xml><?xml version="1.0" encoding="utf-8"?>
-<p:sld xmlns:a="http://schemas.openxmlformats.org/drawingml/2006/main" xmlns:p="http://schemas.openxmlformats.org/presentationml/2006/main" xmlns:r="http://schemas.openxmlformats.org/officeDocument/2006/relationships">
+<p:sld xmlns:a="http://schemas.openxmlformats.org/drawingml/2006/main" xmlns:r="http://schemas.openxmlformats.org/officeDocument/2006/relationships" xmlns:p="http://schemas.openxmlformats.org/presentationml/2006/main">
   <p:cSld>
     <p:spTree>
       <p:nvGrpSpPr>
@@ -8919,7 +9160,14 @@
         <p:cNvGrpSpPr/>
         <p:nvPr/>
       </p:nvGrpSpPr>
-      <p:grpSpPr/>
+      <p:grpSpPr>
+        <a:xfrm>
+          <a:off x="0" y="0"/>
+          <a:ext cx="0" cy="0"/>
+          <a:chOff x="0" y="0"/>
+          <a:chExt cx="0" cy="0"/>
+        </a:xfrm>
+      </p:grpSpPr>
       <p:sp>
         <p:nvSpPr>
           <p:cNvPr id="2" name="TextBox 1"/>
@@ -8937,7 +9185,7 @@
           <a:noFill/>
         </p:spPr>
         <p:txBody>
-          <a:bodyPr wrap="square" lIns="0" rIns="0" tIns="0" bIns="0">
+          <a:bodyPr wrap="square" lIns="0" tIns="0" rIns="0" bIns="0">
             <a:spAutoFit/>
           </a:bodyPr>
           <a:lstStyle/>
@@ -8976,7 +9224,7 @@
           <a:noFill/>
         </p:spPr>
         <p:txBody>
-          <a:bodyPr wrap="square" lIns="0" rIns="0" tIns="0" bIns="0">
+          <a:bodyPr wrap="square" lIns="0" tIns="0" rIns="0" bIns="0">
             <a:spAutoFit/>
           </a:bodyPr>
           <a:lstStyle/>
@@ -9063,7 +9311,7 @@
           <a:noFill/>
         </p:spPr>
         <p:txBody>
-          <a:bodyPr wrap="square" lIns="0" rIns="0" tIns="0" bIns="0">
+          <a:bodyPr wrap="square" lIns="0" tIns="0" rIns="0" bIns="0">
             <a:spAutoFit/>
           </a:bodyPr>
           <a:lstStyle/>
@@ -9152,7 +9400,7 @@
           <a:noFill/>
         </p:spPr>
         <p:txBody>
-          <a:bodyPr wrap="square" lIns="0" rIns="0" tIns="0" bIns="0">
+          <a:bodyPr wrap="square" lIns="0" tIns="0" rIns="0" bIns="0">
             <a:spAutoFit/>
           </a:bodyPr>
           <a:lstStyle/>
@@ -9186,7 +9434,7 @@
 </file>
 
 <file path=ppt/slides/slide5.xml><?xml version="1.0" encoding="utf-8"?>
-<p:sld xmlns:a="http://schemas.openxmlformats.org/drawingml/2006/main" xmlns:p="http://schemas.openxmlformats.org/presentationml/2006/main" xmlns:r="http://schemas.openxmlformats.org/officeDocument/2006/relationships">
+<p:sld xmlns:a="http://schemas.openxmlformats.org/drawingml/2006/main" xmlns:r="http://schemas.openxmlformats.org/officeDocument/2006/relationships" xmlns:p="http://schemas.openxmlformats.org/presentationml/2006/main">
   <p:cSld>
     <p:spTree>
       <p:nvGrpSpPr>
@@ -9194,7 +9442,14 @@
         <p:cNvGrpSpPr/>
         <p:nvPr/>
       </p:nvGrpSpPr>
-      <p:grpSpPr/>
+      <p:grpSpPr>
+        <a:xfrm>
+          <a:off x="0" y="0"/>
+          <a:ext cx="0" cy="0"/>
+          <a:chOff x="0" y="0"/>
+          <a:chExt cx="0" cy="0"/>
+        </a:xfrm>
+      </p:grpSpPr>
       <p:sp>
         <p:nvSpPr>
           <p:cNvPr id="2" name="Oval 1"/>
@@ -9232,7 +9487,7 @@
           </a:fontRef>
         </p:style>
         <p:txBody>
-          <a:bodyPr rtlCol="0" anchor="ctr" lIns="0" rIns="0" tIns="0" bIns="0"/>
+          <a:bodyPr lIns="0" tIns="0" rIns="0" bIns="0" rtlCol="0" anchor="ctr"/>
           <a:lstStyle/>
           <a:p>
             <a:pPr algn="ctr"/>
@@ -9265,7 +9520,7 @@
           <a:noFill/>
         </p:spPr>
         <p:txBody>
-          <a:bodyPr wrap="square" lIns="0" rIns="0" tIns="0" bIns="0">
+          <a:bodyPr wrap="square" lIns="0" tIns="0" rIns="0" bIns="0">
             <a:spAutoFit/>
           </a:bodyPr>
           <a:lstStyle/>
@@ -9304,7 +9559,7 @@
           <a:noFill/>
         </p:spPr>
         <p:txBody>
-          <a:bodyPr wrap="square" lIns="0" rIns="0" tIns="0" bIns="0">
+          <a:bodyPr wrap="square" lIns="0" tIns="0" rIns="0" bIns="0">
             <a:spAutoFit/>
           </a:bodyPr>
           <a:lstStyle/>
@@ -9385,7 +9640,7 @@
           </a:fontRef>
         </p:style>
         <p:txBody>
-          <a:bodyPr rtlCol="0" anchor="ctr" wrap="square" lIns="164592" rIns="164592" tIns="91440" bIns="91440"/>
+          <a:bodyPr wrap="square" lIns="164592" tIns="91440" rIns="164592" bIns="91440" rtlCol="0" anchor="ctr"/>
           <a:lstStyle/>
           <a:p>
             <a:pPr algn="l">
@@ -9436,14 +9691,32 @@
                 <a:tableStyleId>{5C22544A-7EE6-4342-B048-85BDC9FD1C3A}</a:tableStyleId>
               </a:tblPr>
               <a:tblGrid>
-                <a:gridCol w="3456432"/>
-                <a:gridCol w="1152144"/>
-                <a:gridCol w="1152144"/>
+                <a:gridCol w="3456432">
+                  <a:extLst>
+                    <a:ext uri="{9D8B030D-6E8A-4147-A177-3AD203B41FA5}">
+                      <a16:colId xmlns:a16="http://schemas.microsoft.com/office/drawing/2014/main" val="20000"/>
+                    </a:ext>
+                  </a:extLst>
+                </a:gridCol>
+                <a:gridCol w="1152144">
+                  <a:extLst>
+                    <a:ext uri="{9D8B030D-6E8A-4147-A177-3AD203B41FA5}">
+                      <a16:colId xmlns:a16="http://schemas.microsoft.com/office/drawing/2014/main" val="20001"/>
+                    </a:ext>
+                  </a:extLst>
+                </a:gridCol>
+                <a:gridCol w="1152144">
+                  <a:extLst>
+                    <a:ext uri="{9D8B030D-6E8A-4147-A177-3AD203B41FA5}">
+                      <a16:colId xmlns:a16="http://schemas.microsoft.com/office/drawing/2014/main" val="20002"/>
+                    </a:ext>
+                  </a:extLst>
+                </a:gridCol>
               </a:tblGrid>
               <a:tr h="310896">
                 <a:tc>
                   <a:txBody>
-                    <a:bodyPr wrap="square"/>
+                    <a:bodyPr/>
                     <a:lstStyle/>
                     <a:p>
                       <a:pPr algn="l"/>
@@ -9466,7 +9739,7 @@
                 </a:tc>
                 <a:tc>
                   <a:txBody>
-                    <a:bodyPr wrap="square"/>
+                    <a:bodyPr/>
                     <a:lstStyle/>
                     <a:p>
                       <a:pPr algn="r"/>
@@ -9489,7 +9762,7 @@
                 </a:tc>
                 <a:tc>
                   <a:txBody>
-                    <a:bodyPr wrap="square"/>
+                    <a:bodyPr/>
                     <a:lstStyle/>
                     <a:p>
                       <a:pPr algn="r"/>
@@ -9510,11 +9783,16 @@
                     </a:solidFill>
                   </a:tcPr>
                 </a:tc>
+                <a:extLst>
+                  <a:ext uri="{0D108BD9-81ED-4DB2-BD59-A6C34878D82A}">
+                    <a16:rowId xmlns:a16="http://schemas.microsoft.com/office/drawing/2014/main" val="10000"/>
+                  </a:ext>
+                </a:extLst>
               </a:tr>
               <a:tr h="310896">
                 <a:tc>
                   <a:txBody>
-                    <a:bodyPr wrap="square"/>
+                    <a:bodyPr/>
                     <a:lstStyle/>
                     <a:p>
                       <a:pPr algn="l"/>
@@ -9537,7 +9815,7 @@
                 </a:tc>
                 <a:tc>
                   <a:txBody>
-                    <a:bodyPr wrap="square"/>
+                    <a:bodyPr/>
                     <a:lstStyle/>
                     <a:p>
                       <a:pPr algn="r"/>
@@ -9560,7 +9838,7 @@
                 </a:tc>
                 <a:tc>
                   <a:txBody>
-                    <a:bodyPr wrap="square"/>
+                    <a:bodyPr/>
                     <a:lstStyle/>
                     <a:p>
                       <a:pPr algn="r"/>
@@ -9581,11 +9859,16 @@
                     </a:solidFill>
                   </a:tcPr>
                 </a:tc>
+                <a:extLst>
+                  <a:ext uri="{0D108BD9-81ED-4DB2-BD59-A6C34878D82A}">
+                    <a16:rowId xmlns:a16="http://schemas.microsoft.com/office/drawing/2014/main" val="10001"/>
+                  </a:ext>
+                </a:extLst>
               </a:tr>
               <a:tr h="310896">
                 <a:tc>
                   <a:txBody>
-                    <a:bodyPr wrap="square"/>
+                    <a:bodyPr/>
                     <a:lstStyle/>
                     <a:p>
                       <a:pPr algn="l"/>
@@ -9608,7 +9891,7 @@
                 </a:tc>
                 <a:tc>
                   <a:txBody>
-                    <a:bodyPr wrap="square"/>
+                    <a:bodyPr/>
                     <a:lstStyle/>
                     <a:p>
                       <a:pPr algn="r"/>
@@ -9631,7 +9914,7 @@
                 </a:tc>
                 <a:tc>
                   <a:txBody>
-                    <a:bodyPr wrap="square"/>
+                    <a:bodyPr/>
                     <a:lstStyle/>
                     <a:p>
                       <a:pPr algn="r"/>
@@ -9652,11 +9935,16 @@
                     </a:solidFill>
                   </a:tcPr>
                 </a:tc>
+                <a:extLst>
+                  <a:ext uri="{0D108BD9-81ED-4DB2-BD59-A6C34878D82A}">
+                    <a16:rowId xmlns:a16="http://schemas.microsoft.com/office/drawing/2014/main" val="10002"/>
+                  </a:ext>
+                </a:extLst>
               </a:tr>
               <a:tr h="310896">
                 <a:tc>
                   <a:txBody>
-                    <a:bodyPr wrap="square"/>
+                    <a:bodyPr/>
                     <a:lstStyle/>
                     <a:p>
                       <a:pPr algn="l"/>
@@ -9679,7 +9967,7 @@
                 </a:tc>
                 <a:tc>
                   <a:txBody>
-                    <a:bodyPr wrap="square"/>
+                    <a:bodyPr/>
                     <a:lstStyle/>
                     <a:p>
                       <a:pPr algn="r"/>
@@ -9702,7 +9990,7 @@
                 </a:tc>
                 <a:tc>
                   <a:txBody>
-                    <a:bodyPr wrap="square"/>
+                    <a:bodyPr/>
                     <a:lstStyle/>
                     <a:p>
                       <a:pPr algn="r"/>
@@ -9723,6 +10011,11 @@
                     </a:solidFill>
                   </a:tcPr>
                 </a:tc>
+                <a:extLst>
+                  <a:ext uri="{0D108BD9-81ED-4DB2-BD59-A6C34878D82A}">
+                    <a16:rowId xmlns:a16="http://schemas.microsoft.com/office/drawing/2014/main" val="10003"/>
+                  </a:ext>
+                </a:extLst>
               </a:tr>
             </a:tbl>
           </a:graphicData>
@@ -9745,7 +10038,7 @@
           <a:noFill/>
         </p:spPr>
         <p:txBody>
-          <a:bodyPr wrap="square" lIns="0" rIns="0" tIns="0" bIns="0">
+          <a:bodyPr wrap="square" lIns="0" tIns="0" rIns="0" bIns="0">
             <a:spAutoFit/>
           </a:bodyPr>
           <a:lstStyle/>
@@ -9796,7 +10089,7 @@
           <a:noFill/>
         </p:spPr>
         <p:txBody>
-          <a:bodyPr wrap="square" lIns="0" rIns="0" tIns="0" bIns="0">
+          <a:bodyPr wrap="square" lIns="0" tIns="0" rIns="0" bIns="0">
             <a:spAutoFit/>
           </a:bodyPr>
           <a:lstStyle/>
@@ -9840,15 +10133,39 @@
                 <a:tableStyleId>{5C22544A-7EE6-4342-B048-85BDC9FD1C3A}</a:tableStyleId>
               </a:tblPr>
               <a:tblGrid>
-                <a:gridCol w="1956816"/>
-                <a:gridCol w="893329"/>
-                <a:gridCol w="893329"/>
-                <a:gridCol w="1148565"/>
+                <a:gridCol w="1956816">
+                  <a:extLst>
+                    <a:ext uri="{9D8B030D-6E8A-4147-A177-3AD203B41FA5}">
+                      <a16:colId xmlns:a16="http://schemas.microsoft.com/office/drawing/2014/main" val="20000"/>
+                    </a:ext>
+                  </a:extLst>
+                </a:gridCol>
+                <a:gridCol w="893329">
+                  <a:extLst>
+                    <a:ext uri="{9D8B030D-6E8A-4147-A177-3AD203B41FA5}">
+                      <a16:colId xmlns:a16="http://schemas.microsoft.com/office/drawing/2014/main" val="20001"/>
+                    </a:ext>
+                  </a:extLst>
+                </a:gridCol>
+                <a:gridCol w="893329">
+                  <a:extLst>
+                    <a:ext uri="{9D8B030D-6E8A-4147-A177-3AD203B41FA5}">
+                      <a16:colId xmlns:a16="http://schemas.microsoft.com/office/drawing/2014/main" val="20002"/>
+                    </a:ext>
+                  </a:extLst>
+                </a:gridCol>
+                <a:gridCol w="1148565">
+                  <a:extLst>
+                    <a:ext uri="{9D8B030D-6E8A-4147-A177-3AD203B41FA5}">
+                      <a16:colId xmlns:a16="http://schemas.microsoft.com/office/drawing/2014/main" val="20003"/>
+                    </a:ext>
+                  </a:extLst>
+                </a:gridCol>
               </a:tblGrid>
               <a:tr h="347472">
                 <a:tc>
                   <a:txBody>
-                    <a:bodyPr wrap="square"/>
+                    <a:bodyPr/>
                     <a:lstStyle/>
                     <a:p>
                       <a:pPr algn="l"/>
@@ -9871,7 +10188,7 @@
                 </a:tc>
                 <a:tc>
                   <a:txBody>
-                    <a:bodyPr wrap="square"/>
+                    <a:bodyPr/>
                     <a:lstStyle/>
                     <a:p>
                       <a:pPr algn="r"/>
@@ -9894,7 +10211,7 @@
                 </a:tc>
                 <a:tc>
                   <a:txBody>
-                    <a:bodyPr wrap="square"/>
+                    <a:bodyPr/>
                     <a:lstStyle/>
                     <a:p>
                       <a:pPr algn="r"/>
@@ -9917,7 +10234,7 @@
                 </a:tc>
                 <a:tc>
                   <a:txBody>
-                    <a:bodyPr wrap="square"/>
+                    <a:bodyPr/>
                     <a:lstStyle/>
                     <a:p>
                       <a:pPr algn="r"/>
@@ -9938,11 +10255,16 @@
                     </a:solidFill>
                   </a:tcPr>
                 </a:tc>
+                <a:extLst>
+                  <a:ext uri="{0D108BD9-81ED-4DB2-BD59-A6C34878D82A}">
+                    <a16:rowId xmlns:a16="http://schemas.microsoft.com/office/drawing/2014/main" val="10000"/>
+                  </a:ext>
+                </a:extLst>
               </a:tr>
               <a:tr h="347472">
                 <a:tc>
                   <a:txBody>
-                    <a:bodyPr wrap="square"/>
+                    <a:bodyPr/>
                     <a:lstStyle/>
                     <a:p>
                       <a:pPr algn="l"/>
@@ -9965,7 +10287,7 @@
                 </a:tc>
                 <a:tc>
                   <a:txBody>
-                    <a:bodyPr wrap="square"/>
+                    <a:bodyPr/>
                     <a:lstStyle/>
                     <a:p>
                       <a:pPr algn="r"/>
@@ -9988,7 +10310,7 @@
                 </a:tc>
                 <a:tc>
                   <a:txBody>
-                    <a:bodyPr wrap="square"/>
+                    <a:bodyPr/>
                     <a:lstStyle/>
                     <a:p>
                       <a:pPr algn="r"/>
@@ -10011,7 +10333,7 @@
                 </a:tc>
                 <a:tc>
                   <a:txBody>
-                    <a:bodyPr wrap="square"/>
+                    <a:bodyPr/>
                     <a:lstStyle/>
                     <a:p>
                       <a:pPr algn="r"/>
@@ -10032,11 +10354,16 @@
                     </a:solidFill>
                   </a:tcPr>
                 </a:tc>
+                <a:extLst>
+                  <a:ext uri="{0D108BD9-81ED-4DB2-BD59-A6C34878D82A}">
+                    <a16:rowId xmlns:a16="http://schemas.microsoft.com/office/drawing/2014/main" val="10001"/>
+                  </a:ext>
+                </a:extLst>
               </a:tr>
               <a:tr h="347472">
                 <a:tc>
                   <a:txBody>
-                    <a:bodyPr wrap="square"/>
+                    <a:bodyPr/>
                     <a:lstStyle/>
                     <a:p>
                       <a:pPr algn="l"/>
@@ -10059,7 +10386,7 @@
                 </a:tc>
                 <a:tc>
                   <a:txBody>
-                    <a:bodyPr wrap="square"/>
+                    <a:bodyPr/>
                     <a:lstStyle/>
                     <a:p>
                       <a:pPr algn="r"/>
@@ -10082,7 +10409,7 @@
                 </a:tc>
                 <a:tc>
                   <a:txBody>
-                    <a:bodyPr wrap="square"/>
+                    <a:bodyPr/>
                     <a:lstStyle/>
                     <a:p>
                       <a:pPr algn="r"/>
@@ -10105,7 +10432,7 @@
                 </a:tc>
                 <a:tc>
                   <a:txBody>
-                    <a:bodyPr wrap="square"/>
+                    <a:bodyPr/>
                     <a:lstStyle/>
                     <a:p>
                       <a:pPr algn="r"/>
@@ -10126,11 +10453,16 @@
                     </a:solidFill>
                   </a:tcPr>
                 </a:tc>
+                <a:extLst>
+                  <a:ext uri="{0D108BD9-81ED-4DB2-BD59-A6C34878D82A}">
+                    <a16:rowId xmlns:a16="http://schemas.microsoft.com/office/drawing/2014/main" val="10002"/>
+                  </a:ext>
+                </a:extLst>
               </a:tr>
               <a:tr h="347472">
                 <a:tc>
                   <a:txBody>
-                    <a:bodyPr wrap="square"/>
+                    <a:bodyPr/>
                     <a:lstStyle/>
                     <a:p>
                       <a:pPr algn="l"/>
@@ -10153,7 +10485,7 @@
                 </a:tc>
                 <a:tc>
                   <a:txBody>
-                    <a:bodyPr wrap="square"/>
+                    <a:bodyPr/>
                     <a:lstStyle/>
                     <a:p>
                       <a:pPr algn="r"/>
@@ -10176,7 +10508,7 @@
                 </a:tc>
                 <a:tc>
                   <a:txBody>
-                    <a:bodyPr wrap="square"/>
+                    <a:bodyPr/>
                     <a:lstStyle/>
                     <a:p>
                       <a:pPr algn="r"/>
@@ -10199,7 +10531,7 @@
                 </a:tc>
                 <a:tc>
                   <a:txBody>
-                    <a:bodyPr wrap="square"/>
+                    <a:bodyPr/>
                     <a:lstStyle/>
                     <a:p>
                       <a:pPr algn="r"/>
@@ -10220,6 +10552,11 @@
                     </a:solidFill>
                   </a:tcPr>
                 </a:tc>
+                <a:extLst>
+                  <a:ext uri="{0D108BD9-81ED-4DB2-BD59-A6C34878D82A}">
+                    <a16:rowId xmlns:a16="http://schemas.microsoft.com/office/drawing/2014/main" val="10003"/>
+                  </a:ext>
+                </a:extLst>
               </a:tr>
             </a:tbl>
           </a:graphicData>
@@ -10242,7 +10579,7 @@
           <a:noFill/>
         </p:spPr>
         <p:txBody>
-          <a:bodyPr wrap="square" lIns="0" rIns="0" tIns="0" bIns="0">
+          <a:bodyPr wrap="square" lIns="0" tIns="0" rIns="0" bIns="0">
             <a:spAutoFit/>
           </a:bodyPr>
           <a:lstStyle/>
@@ -10303,7 +10640,7 @@
           <a:noFill/>
         </p:spPr>
         <p:txBody>
-          <a:bodyPr wrap="square" lIns="0" rIns="0" tIns="0" bIns="0">
+          <a:bodyPr wrap="square" lIns="0" tIns="0" rIns="0" bIns="0">
             <a:spAutoFit/>
           </a:bodyPr>
           <a:lstStyle/>
@@ -10337,7 +10674,7 @@
 </file>
 
 <file path=ppt/slides/slide6.xml><?xml version="1.0" encoding="utf-8"?>
-<p:sld xmlns:a="http://schemas.openxmlformats.org/drawingml/2006/main" xmlns:p="http://schemas.openxmlformats.org/presentationml/2006/main" xmlns:r="http://schemas.openxmlformats.org/officeDocument/2006/relationships">
+<p:sld xmlns:a="http://schemas.openxmlformats.org/drawingml/2006/main" xmlns:r="http://schemas.openxmlformats.org/officeDocument/2006/relationships" xmlns:p="http://schemas.openxmlformats.org/presentationml/2006/main">
   <p:cSld>
     <p:spTree>
       <p:nvGrpSpPr>
@@ -10345,7 +10682,14 @@
         <p:cNvGrpSpPr/>
         <p:nvPr/>
       </p:nvGrpSpPr>
-      <p:grpSpPr/>
+      <p:grpSpPr>
+        <a:xfrm>
+          <a:off x="0" y="0"/>
+          <a:ext cx="0" cy="0"/>
+          <a:chOff x="0" y="0"/>
+          <a:chExt cx="0" cy="0"/>
+        </a:xfrm>
+      </p:grpSpPr>
       <p:sp>
         <p:nvSpPr>
           <p:cNvPr id="2" name="TextBox 1"/>
@@ -10363,7 +10707,7 @@
           <a:noFill/>
         </p:spPr>
         <p:txBody>
-          <a:bodyPr wrap="square" lIns="0" rIns="0" tIns="0" bIns="0">
+          <a:bodyPr wrap="square" lIns="0" tIns="0" rIns="0" bIns="0">
             <a:spAutoFit/>
           </a:bodyPr>
           <a:lstStyle/>
@@ -10402,7 +10746,7 @@
           <a:noFill/>
         </p:spPr>
         <p:txBody>
-          <a:bodyPr wrap="square" lIns="0" rIns="0" tIns="0" bIns="0">
+          <a:bodyPr wrap="square" lIns="0" tIns="0" rIns="0" bIns="0">
             <a:spAutoFit/>
           </a:bodyPr>
           <a:lstStyle/>
@@ -10441,7 +10785,7 @@
           <a:noFill/>
         </p:spPr>
         <p:txBody>
-          <a:bodyPr wrap="square" lIns="0" rIns="0" tIns="0" bIns="0">
+          <a:bodyPr wrap="square" lIns="0" tIns="0" rIns="0" bIns="0">
             <a:spAutoFit/>
           </a:bodyPr>
           <a:lstStyle/>
@@ -10539,7 +10883,7 @@
           <a:noFill/>
         </p:spPr>
         <p:txBody>
-          <a:bodyPr wrap="square" lIns="0" rIns="0" tIns="0" bIns="0">
+          <a:bodyPr wrap="square" lIns="0" tIns="0" rIns="0" bIns="0">
             <a:spAutoFit/>
           </a:bodyPr>
           <a:lstStyle/>
@@ -10611,14 +10955,32 @@
                 <a:tableStyleId>{5C22544A-7EE6-4342-B048-85BDC9FD1C3A}</a:tableStyleId>
               </a:tblPr>
               <a:tblGrid>
-                <a:gridCol w="3640015"/>
-                <a:gridCol w="1456006"/>
-                <a:gridCol w="1213338"/>
+                <a:gridCol w="3640015">
+                  <a:extLst>
+                    <a:ext uri="{9D8B030D-6E8A-4147-A177-3AD203B41FA5}">
+                      <a16:colId xmlns:a16="http://schemas.microsoft.com/office/drawing/2014/main" val="20000"/>
+                    </a:ext>
+                  </a:extLst>
+                </a:gridCol>
+                <a:gridCol w="1456006">
+                  <a:extLst>
+                    <a:ext uri="{9D8B030D-6E8A-4147-A177-3AD203B41FA5}">
+                      <a16:colId xmlns:a16="http://schemas.microsoft.com/office/drawing/2014/main" val="20001"/>
+                    </a:ext>
+                  </a:extLst>
+                </a:gridCol>
+                <a:gridCol w="1213338">
+                  <a:extLst>
+                    <a:ext uri="{9D8B030D-6E8A-4147-A177-3AD203B41FA5}">
+                      <a16:colId xmlns:a16="http://schemas.microsoft.com/office/drawing/2014/main" val="20002"/>
+                    </a:ext>
+                  </a:extLst>
+                </a:gridCol>
               </a:tblGrid>
               <a:tr h="320040">
                 <a:tc>
                   <a:txBody>
-                    <a:bodyPr wrap="square"/>
+                    <a:bodyPr/>
                     <a:lstStyle/>
                     <a:p>
                       <a:pPr algn="l"/>
@@ -10641,7 +11003,7 @@
                 </a:tc>
                 <a:tc>
                   <a:txBody>
-                    <a:bodyPr wrap="square"/>
+                    <a:bodyPr/>
                     <a:lstStyle/>
                     <a:p>
                       <a:pPr algn="r"/>
@@ -10664,7 +11026,7 @@
                 </a:tc>
                 <a:tc>
                   <a:txBody>
-                    <a:bodyPr wrap="square"/>
+                    <a:bodyPr/>
                     <a:lstStyle/>
                     <a:p>
                       <a:pPr algn="r"/>
@@ -10685,11 +11047,16 @@
                     </a:solidFill>
                   </a:tcPr>
                 </a:tc>
+                <a:extLst>
+                  <a:ext uri="{0D108BD9-81ED-4DB2-BD59-A6C34878D82A}">
+                    <a16:rowId xmlns:a16="http://schemas.microsoft.com/office/drawing/2014/main" val="10000"/>
+                  </a:ext>
+                </a:extLst>
               </a:tr>
               <a:tr h="320040">
                 <a:tc>
                   <a:txBody>
-                    <a:bodyPr wrap="square"/>
+                    <a:bodyPr/>
                     <a:lstStyle/>
                     <a:p>
                       <a:pPr algn="l"/>
@@ -10712,7 +11079,7 @@
                 </a:tc>
                 <a:tc>
                   <a:txBody>
-                    <a:bodyPr wrap="square"/>
+                    <a:bodyPr/>
                     <a:lstStyle/>
                     <a:p>
                       <a:pPr algn="r"/>
@@ -10735,7 +11102,7 @@
                 </a:tc>
                 <a:tc>
                   <a:txBody>
-                    <a:bodyPr wrap="square"/>
+                    <a:bodyPr/>
                     <a:lstStyle/>
                     <a:p>
                       <a:pPr algn="r"/>
@@ -10756,11 +11123,16 @@
                     </a:solidFill>
                   </a:tcPr>
                 </a:tc>
+                <a:extLst>
+                  <a:ext uri="{0D108BD9-81ED-4DB2-BD59-A6C34878D82A}">
+                    <a16:rowId xmlns:a16="http://schemas.microsoft.com/office/drawing/2014/main" val="10001"/>
+                  </a:ext>
+                </a:extLst>
               </a:tr>
               <a:tr h="320040">
                 <a:tc>
                   <a:txBody>
-                    <a:bodyPr wrap="square"/>
+                    <a:bodyPr/>
                     <a:lstStyle/>
                     <a:p>
                       <a:pPr algn="l"/>
@@ -10783,7 +11155,7 @@
                 </a:tc>
                 <a:tc>
                   <a:txBody>
-                    <a:bodyPr wrap="square"/>
+                    <a:bodyPr/>
                     <a:lstStyle/>
                     <a:p>
                       <a:pPr algn="r"/>
@@ -10806,7 +11178,7 @@
                 </a:tc>
                 <a:tc>
                   <a:txBody>
-                    <a:bodyPr wrap="square"/>
+                    <a:bodyPr/>
                     <a:lstStyle/>
                     <a:p>
                       <a:pPr algn="r"/>
@@ -10827,6 +11199,11 @@
                     </a:solidFill>
                   </a:tcPr>
                 </a:tc>
+                <a:extLst>
+                  <a:ext uri="{0D108BD9-81ED-4DB2-BD59-A6C34878D82A}">
+                    <a16:rowId xmlns:a16="http://schemas.microsoft.com/office/drawing/2014/main" val="10002"/>
+                  </a:ext>
+                </a:extLst>
               </a:tr>
             </a:tbl>
           </a:graphicData>
@@ -10849,7 +11226,7 @@
           <a:noFill/>
         </p:spPr>
         <p:txBody>
-          <a:bodyPr wrap="square" lIns="0" rIns="0" tIns="0" bIns="0">
+          <a:bodyPr wrap="square" lIns="0" tIns="0" rIns="0" bIns="0">
             <a:spAutoFit/>
           </a:bodyPr>
           <a:lstStyle/>
@@ -10912,7 +11289,7 @@
           <a:noFill/>
         </p:spPr>
         <p:txBody>
-          <a:bodyPr wrap="square" lIns="0" rIns="0" tIns="0" bIns="0">
+          <a:bodyPr wrap="square" lIns="0" tIns="0" rIns="0" bIns="0">
             <a:spAutoFit/>
           </a:bodyPr>
           <a:lstStyle/>
@@ -10954,7 +11331,7 @@
           <a:noFill/>
         </p:spPr>
         <p:txBody>
-          <a:bodyPr wrap="square" lIns="0" rIns="0" tIns="0" bIns="0">
+          <a:bodyPr wrap="square" lIns="0" tIns="0" rIns="0" bIns="0">
             <a:spAutoFit/>
           </a:bodyPr>
           <a:lstStyle/>
@@ -10988,7 +11365,7 @@
 </file>
 
 <file path=ppt/slides/slide7.xml><?xml version="1.0" encoding="utf-8"?>
-<p:sld xmlns:a="http://schemas.openxmlformats.org/drawingml/2006/main" xmlns:p="http://schemas.openxmlformats.org/presentationml/2006/main" xmlns:r="http://schemas.openxmlformats.org/officeDocument/2006/relationships">
+<p:sld xmlns:a="http://schemas.openxmlformats.org/drawingml/2006/main" xmlns:r="http://schemas.openxmlformats.org/officeDocument/2006/relationships" xmlns:p="http://schemas.openxmlformats.org/presentationml/2006/main">
   <p:cSld>
     <p:spTree>
       <p:nvGrpSpPr>
@@ -10996,7 +11373,14 @@
         <p:cNvGrpSpPr/>
         <p:nvPr/>
       </p:nvGrpSpPr>
-      <p:grpSpPr/>
+      <p:grpSpPr>
+        <a:xfrm>
+          <a:off x="0" y="0"/>
+          <a:ext cx="0" cy="0"/>
+          <a:chOff x="0" y="0"/>
+          <a:chExt cx="0" cy="0"/>
+        </a:xfrm>
+      </p:grpSpPr>
       <p:sp>
         <p:nvSpPr>
           <p:cNvPr id="2" name="TextBox 1"/>
@@ -11014,7 +11398,7 @@
           <a:noFill/>
         </p:spPr>
         <p:txBody>
-          <a:bodyPr wrap="square" lIns="0" rIns="0" tIns="0" bIns="0">
+          <a:bodyPr wrap="square" lIns="0" tIns="0" rIns="0" bIns="0">
             <a:spAutoFit/>
           </a:bodyPr>
           <a:lstStyle/>
@@ -11053,7 +11437,7 @@
           <a:noFill/>
         </p:spPr>
         <p:txBody>
-          <a:bodyPr wrap="square" lIns="0" rIns="0" tIns="0" bIns="0">
+          <a:bodyPr wrap="square" lIns="0" tIns="0" rIns="0" bIns="0">
             <a:spAutoFit/>
           </a:bodyPr>
           <a:lstStyle/>
@@ -11094,15 +11478,39 @@
                 <a:tableStyleId>{5C22544A-7EE6-4342-B048-85BDC9FD1C3A}</a:tableStyleId>
               </a:tblPr>
               <a:tblGrid>
-                <a:gridCol w="2560320"/>
-                <a:gridCol w="1083212"/>
-                <a:gridCol w="1132449"/>
-                <a:gridCol w="984738"/>
+                <a:gridCol w="2560320">
+                  <a:extLst>
+                    <a:ext uri="{9D8B030D-6E8A-4147-A177-3AD203B41FA5}">
+                      <a16:colId xmlns:a16="http://schemas.microsoft.com/office/drawing/2014/main" val="20000"/>
+                    </a:ext>
+                  </a:extLst>
+                </a:gridCol>
+                <a:gridCol w="1083212">
+                  <a:extLst>
+                    <a:ext uri="{9D8B030D-6E8A-4147-A177-3AD203B41FA5}">
+                      <a16:colId xmlns:a16="http://schemas.microsoft.com/office/drawing/2014/main" val="20001"/>
+                    </a:ext>
+                  </a:extLst>
+                </a:gridCol>
+                <a:gridCol w="1132449">
+                  <a:extLst>
+                    <a:ext uri="{9D8B030D-6E8A-4147-A177-3AD203B41FA5}">
+                      <a16:colId xmlns:a16="http://schemas.microsoft.com/office/drawing/2014/main" val="20002"/>
+                    </a:ext>
+                  </a:extLst>
+                </a:gridCol>
+                <a:gridCol w="984738">
+                  <a:extLst>
+                    <a:ext uri="{9D8B030D-6E8A-4147-A177-3AD203B41FA5}">
+                      <a16:colId xmlns:a16="http://schemas.microsoft.com/office/drawing/2014/main" val="20003"/>
+                    </a:ext>
+                  </a:extLst>
+                </a:gridCol>
               </a:tblGrid>
               <a:tr h="329184">
                 <a:tc>
                   <a:txBody>
-                    <a:bodyPr wrap="square"/>
+                    <a:bodyPr/>
                     <a:lstStyle/>
                     <a:p>
                       <a:pPr algn="l"/>
@@ -11125,7 +11533,7 @@
                 </a:tc>
                 <a:tc>
                   <a:txBody>
-                    <a:bodyPr wrap="square"/>
+                    <a:bodyPr/>
                     <a:lstStyle/>
                     <a:p>
                       <a:pPr algn="r"/>
@@ -11148,7 +11556,7 @@
                 </a:tc>
                 <a:tc>
                   <a:txBody>
-                    <a:bodyPr wrap="square"/>
+                    <a:bodyPr/>
                     <a:lstStyle/>
                     <a:p>
                       <a:pPr algn="r"/>
@@ -11171,7 +11579,7 @@
                 </a:tc>
                 <a:tc>
                   <a:txBody>
-                    <a:bodyPr wrap="square"/>
+                    <a:bodyPr/>
                     <a:lstStyle/>
                     <a:p>
                       <a:pPr algn="r"/>
@@ -11192,11 +11600,16 @@
                     </a:solidFill>
                   </a:tcPr>
                 </a:tc>
+                <a:extLst>
+                  <a:ext uri="{0D108BD9-81ED-4DB2-BD59-A6C34878D82A}">
+                    <a16:rowId xmlns:a16="http://schemas.microsoft.com/office/drawing/2014/main" val="10000"/>
+                  </a:ext>
+                </a:extLst>
               </a:tr>
               <a:tr h="329184">
                 <a:tc>
                   <a:txBody>
-                    <a:bodyPr wrap="square"/>
+                    <a:bodyPr/>
                     <a:lstStyle/>
                     <a:p>
                       <a:pPr algn="l"/>
@@ -11219,7 +11632,7 @@
                 </a:tc>
                 <a:tc>
                   <a:txBody>
-                    <a:bodyPr wrap="square"/>
+                    <a:bodyPr/>
                     <a:lstStyle/>
                     <a:p>
                       <a:pPr algn="r"/>
@@ -11242,7 +11655,7 @@
                 </a:tc>
                 <a:tc>
                   <a:txBody>
-                    <a:bodyPr wrap="square"/>
+                    <a:bodyPr/>
                     <a:lstStyle/>
                     <a:p>
                       <a:pPr algn="r"/>
@@ -11265,7 +11678,7 @@
                 </a:tc>
                 <a:tc>
                   <a:txBody>
-                    <a:bodyPr wrap="square"/>
+                    <a:bodyPr/>
                     <a:lstStyle/>
                     <a:p>
                       <a:pPr algn="r"/>
@@ -11286,11 +11699,16 @@
                     </a:solidFill>
                   </a:tcPr>
                 </a:tc>
+                <a:extLst>
+                  <a:ext uri="{0D108BD9-81ED-4DB2-BD59-A6C34878D82A}">
+                    <a16:rowId xmlns:a16="http://schemas.microsoft.com/office/drawing/2014/main" val="10001"/>
+                  </a:ext>
+                </a:extLst>
               </a:tr>
               <a:tr h="329184">
                 <a:tc>
                   <a:txBody>
-                    <a:bodyPr wrap="square"/>
+                    <a:bodyPr/>
                     <a:lstStyle/>
                     <a:p>
                       <a:pPr algn="l"/>
@@ -11313,7 +11731,7 @@
                 </a:tc>
                 <a:tc>
                   <a:txBody>
-                    <a:bodyPr wrap="square"/>
+                    <a:bodyPr/>
                     <a:lstStyle/>
                     <a:p>
                       <a:pPr algn="r"/>
@@ -11336,7 +11754,7 @@
                 </a:tc>
                 <a:tc>
                   <a:txBody>
-                    <a:bodyPr wrap="square"/>
+                    <a:bodyPr/>
                     <a:lstStyle/>
                     <a:p>
                       <a:pPr algn="r"/>
@@ -11359,7 +11777,7 @@
                 </a:tc>
                 <a:tc>
                   <a:txBody>
-                    <a:bodyPr wrap="square"/>
+                    <a:bodyPr/>
                     <a:lstStyle/>
                     <a:p>
                       <a:pPr algn="r"/>
@@ -11380,11 +11798,16 @@
                     </a:solidFill>
                   </a:tcPr>
                 </a:tc>
+                <a:extLst>
+                  <a:ext uri="{0D108BD9-81ED-4DB2-BD59-A6C34878D82A}">
+                    <a16:rowId xmlns:a16="http://schemas.microsoft.com/office/drawing/2014/main" val="10002"/>
+                  </a:ext>
+                </a:extLst>
               </a:tr>
               <a:tr h="329184">
                 <a:tc>
                   <a:txBody>
-                    <a:bodyPr wrap="square"/>
+                    <a:bodyPr/>
                     <a:lstStyle/>
                     <a:p>
                       <a:pPr algn="l"/>
@@ -11407,7 +11830,7 @@
                 </a:tc>
                 <a:tc>
                   <a:txBody>
-                    <a:bodyPr wrap="square"/>
+                    <a:bodyPr/>
                     <a:lstStyle/>
                     <a:p>
                       <a:pPr algn="r"/>
@@ -11430,7 +11853,7 @@
                 </a:tc>
                 <a:tc>
                   <a:txBody>
-                    <a:bodyPr wrap="square"/>
+                    <a:bodyPr/>
                     <a:lstStyle/>
                     <a:p>
                       <a:pPr algn="r"/>
@@ -11453,7 +11876,7 @@
                 </a:tc>
                 <a:tc>
                   <a:txBody>
-                    <a:bodyPr wrap="square"/>
+                    <a:bodyPr/>
                     <a:lstStyle/>
                     <a:p>
                       <a:pPr algn="r"/>
@@ -11474,11 +11897,16 @@
                     </a:solidFill>
                   </a:tcPr>
                 </a:tc>
+                <a:extLst>
+                  <a:ext uri="{0D108BD9-81ED-4DB2-BD59-A6C34878D82A}">
+                    <a16:rowId xmlns:a16="http://schemas.microsoft.com/office/drawing/2014/main" val="10003"/>
+                  </a:ext>
+                </a:extLst>
               </a:tr>
               <a:tr h="329184">
                 <a:tc>
                   <a:txBody>
-                    <a:bodyPr wrap="square"/>
+                    <a:bodyPr/>
                     <a:lstStyle/>
                     <a:p>
                       <a:pPr algn="l"/>
@@ -11501,7 +11929,7 @@
                 </a:tc>
                 <a:tc>
                   <a:txBody>
-                    <a:bodyPr wrap="square"/>
+                    <a:bodyPr/>
                     <a:lstStyle/>
                     <a:p>
                       <a:pPr algn="r"/>
@@ -11524,7 +11952,7 @@
                 </a:tc>
                 <a:tc>
                   <a:txBody>
-                    <a:bodyPr wrap="square"/>
+                    <a:bodyPr/>
                     <a:lstStyle/>
                     <a:p>
                       <a:pPr algn="r"/>
@@ -11547,7 +11975,7 @@
                 </a:tc>
                 <a:tc>
                   <a:txBody>
-                    <a:bodyPr wrap="square"/>
+                    <a:bodyPr/>
                     <a:lstStyle/>
                     <a:p>
                       <a:pPr algn="r"/>
@@ -11568,11 +11996,16 @@
                     </a:solidFill>
                   </a:tcPr>
                 </a:tc>
+                <a:extLst>
+                  <a:ext uri="{0D108BD9-81ED-4DB2-BD59-A6C34878D82A}">
+                    <a16:rowId xmlns:a16="http://schemas.microsoft.com/office/drawing/2014/main" val="10004"/>
+                  </a:ext>
+                </a:extLst>
               </a:tr>
               <a:tr h="329184">
                 <a:tc>
                   <a:txBody>
-                    <a:bodyPr wrap="square"/>
+                    <a:bodyPr/>
                     <a:lstStyle/>
                     <a:p>
                       <a:pPr algn="l"/>
@@ -11595,7 +12028,7 @@
                 </a:tc>
                 <a:tc>
                   <a:txBody>
-                    <a:bodyPr wrap="square"/>
+                    <a:bodyPr/>
                     <a:lstStyle/>
                     <a:p>
                       <a:pPr algn="r"/>
@@ -11618,7 +12051,7 @@
                 </a:tc>
                 <a:tc>
                   <a:txBody>
-                    <a:bodyPr wrap="square"/>
+                    <a:bodyPr/>
                     <a:lstStyle/>
                     <a:p>
                       <a:pPr algn="r"/>
@@ -11641,7 +12074,7 @@
                 </a:tc>
                 <a:tc>
                   <a:txBody>
-                    <a:bodyPr wrap="square"/>
+                    <a:bodyPr/>
                     <a:lstStyle/>
                     <a:p>
                       <a:pPr algn="r"/>
@@ -11662,11 +12095,16 @@
                     </a:solidFill>
                   </a:tcPr>
                 </a:tc>
+                <a:extLst>
+                  <a:ext uri="{0D108BD9-81ED-4DB2-BD59-A6C34878D82A}">
+                    <a16:rowId xmlns:a16="http://schemas.microsoft.com/office/drawing/2014/main" val="10005"/>
+                  </a:ext>
+                </a:extLst>
               </a:tr>
               <a:tr h="329184">
                 <a:tc>
                   <a:txBody>
-                    <a:bodyPr wrap="square"/>
+                    <a:bodyPr/>
                     <a:lstStyle/>
                     <a:p>
                       <a:pPr algn="l"/>
@@ -11689,7 +12127,7 @@
                 </a:tc>
                 <a:tc>
                   <a:txBody>
-                    <a:bodyPr wrap="square"/>
+                    <a:bodyPr/>
                     <a:lstStyle/>
                     <a:p>
                       <a:pPr algn="r"/>
@@ -11712,7 +12150,7 @@
                 </a:tc>
                 <a:tc>
                   <a:txBody>
-                    <a:bodyPr wrap="square"/>
+                    <a:bodyPr/>
                     <a:lstStyle/>
                     <a:p>
                       <a:pPr algn="r"/>
@@ -11735,7 +12173,7 @@
                 </a:tc>
                 <a:tc>
                   <a:txBody>
-                    <a:bodyPr wrap="square"/>
+                    <a:bodyPr/>
                     <a:lstStyle/>
                     <a:p>
                       <a:pPr algn="r"/>
@@ -11756,11 +12194,16 @@
                     </a:solidFill>
                   </a:tcPr>
                 </a:tc>
+                <a:extLst>
+                  <a:ext uri="{0D108BD9-81ED-4DB2-BD59-A6C34878D82A}">
+                    <a16:rowId xmlns:a16="http://schemas.microsoft.com/office/drawing/2014/main" val="10006"/>
+                  </a:ext>
+                </a:extLst>
               </a:tr>
               <a:tr h="329184">
                 <a:tc>
                   <a:txBody>
-                    <a:bodyPr wrap="square"/>
+                    <a:bodyPr/>
                     <a:lstStyle/>
                     <a:p>
                       <a:pPr algn="l"/>
@@ -11783,7 +12226,7 @@
                 </a:tc>
                 <a:tc>
                   <a:txBody>
-                    <a:bodyPr wrap="square"/>
+                    <a:bodyPr/>
                     <a:lstStyle/>
                     <a:p>
                       <a:pPr algn="r"/>
@@ -11806,7 +12249,7 @@
                 </a:tc>
                 <a:tc>
                   <a:txBody>
-                    <a:bodyPr wrap="square"/>
+                    <a:bodyPr/>
                     <a:lstStyle/>
                     <a:p>
                       <a:pPr algn="r"/>
@@ -11829,7 +12272,7 @@
                 </a:tc>
                 <a:tc>
                   <a:txBody>
-                    <a:bodyPr wrap="square"/>
+                    <a:bodyPr/>
                     <a:lstStyle/>
                     <a:p>
                       <a:pPr algn="r"/>
@@ -11850,6 +12293,11 @@
                     </a:solidFill>
                   </a:tcPr>
                 </a:tc>
+                <a:extLst>
+                  <a:ext uri="{0D108BD9-81ED-4DB2-BD59-A6C34878D82A}">
+                    <a16:rowId xmlns:a16="http://schemas.microsoft.com/office/drawing/2014/main" val="10007"/>
+                  </a:ext>
+                </a:extLst>
               </a:tr>
             </a:tbl>
           </a:graphicData>
@@ -11896,7 +12344,7 @@
           <a:noFill/>
         </p:spPr>
         <p:txBody>
-          <a:bodyPr wrap="square" lIns="0" rIns="0" tIns="0" bIns="0">
+          <a:bodyPr wrap="square" lIns="0" tIns="0" rIns="0" bIns="0">
             <a:spAutoFit/>
           </a:bodyPr>
           <a:lstStyle/>
@@ -11976,7 +12424,7 @@
           <a:noFill/>
         </p:spPr>
         <p:txBody>
-          <a:bodyPr wrap="square" lIns="0" rIns="0" tIns="0" bIns="0">
+          <a:bodyPr wrap="square" lIns="0" tIns="0" rIns="0" bIns="0">
             <a:spAutoFit/>
           </a:bodyPr>
           <a:lstStyle/>
@@ -12037,7 +12485,7 @@
           <a:noFill/>
         </p:spPr>
         <p:txBody>
-          <a:bodyPr wrap="square" lIns="0" rIns="0" tIns="0" bIns="0">
+          <a:bodyPr wrap="square" lIns="0" tIns="0" rIns="0" bIns="0">
             <a:spAutoFit/>
           </a:bodyPr>
           <a:lstStyle/>
@@ -12071,7 +12519,7 @@
 </file>
 
 <file path=ppt/slides/slide8.xml><?xml version="1.0" encoding="utf-8"?>
-<p:sld xmlns:a="http://schemas.openxmlformats.org/drawingml/2006/main" xmlns:p="http://schemas.openxmlformats.org/presentationml/2006/main" xmlns:r="http://schemas.openxmlformats.org/officeDocument/2006/relationships">
+<p:sld xmlns:a="http://schemas.openxmlformats.org/drawingml/2006/main" xmlns:r="http://schemas.openxmlformats.org/officeDocument/2006/relationships" xmlns:p="http://schemas.openxmlformats.org/presentationml/2006/main">
   <p:cSld>
     <p:spTree>
       <p:nvGrpSpPr>
@@ -12079,7 +12527,14 @@
         <p:cNvGrpSpPr/>
         <p:nvPr/>
       </p:nvGrpSpPr>
-      <p:grpSpPr/>
+      <p:grpSpPr>
+        <a:xfrm>
+          <a:off x="0" y="0"/>
+          <a:ext cx="0" cy="0"/>
+          <a:chOff x="0" y="0"/>
+          <a:chExt cx="0" cy="0"/>
+        </a:xfrm>
+      </p:grpSpPr>
       <p:sp>
         <p:nvSpPr>
           <p:cNvPr id="2" name="TextBox 1"/>
@@ -12097,7 +12552,7 @@
           <a:noFill/>
         </p:spPr>
         <p:txBody>
-          <a:bodyPr wrap="square" lIns="0" rIns="0" tIns="0" bIns="0">
+          <a:bodyPr wrap="square" lIns="0" tIns="0" rIns="0" bIns="0">
             <a:spAutoFit/>
           </a:bodyPr>
           <a:lstStyle/>
@@ -12136,7 +12591,7 @@
           <a:noFill/>
         </p:spPr>
         <p:txBody>
-          <a:bodyPr wrap="square" lIns="0" rIns="0" tIns="0" bIns="0">
+          <a:bodyPr wrap="square" lIns="0" tIns="0" rIns="0" bIns="0">
             <a:spAutoFit/>
           </a:bodyPr>
           <a:lstStyle/>
@@ -12177,16 +12632,46 @@
                 <a:tableStyleId>{5C22544A-7EE6-4342-B048-85BDC9FD1C3A}</a:tableStyleId>
               </a:tblPr>
               <a:tblGrid>
-                <a:gridCol w="1858780"/>
-                <a:gridCol w="929390"/>
-                <a:gridCol w="929390"/>
-                <a:gridCol w="1022329"/>
-                <a:gridCol w="929390"/>
+                <a:gridCol w="1858780">
+                  <a:extLst>
+                    <a:ext uri="{9D8B030D-6E8A-4147-A177-3AD203B41FA5}">
+                      <a16:colId xmlns:a16="http://schemas.microsoft.com/office/drawing/2014/main" val="20000"/>
+                    </a:ext>
+                  </a:extLst>
+                </a:gridCol>
+                <a:gridCol w="929390">
+                  <a:extLst>
+                    <a:ext uri="{9D8B030D-6E8A-4147-A177-3AD203B41FA5}">
+                      <a16:colId xmlns:a16="http://schemas.microsoft.com/office/drawing/2014/main" val="20001"/>
+                    </a:ext>
+                  </a:extLst>
+                </a:gridCol>
+                <a:gridCol w="929390">
+                  <a:extLst>
+                    <a:ext uri="{9D8B030D-6E8A-4147-A177-3AD203B41FA5}">
+                      <a16:colId xmlns:a16="http://schemas.microsoft.com/office/drawing/2014/main" val="20002"/>
+                    </a:ext>
+                  </a:extLst>
+                </a:gridCol>
+                <a:gridCol w="1022329">
+                  <a:extLst>
+                    <a:ext uri="{9D8B030D-6E8A-4147-A177-3AD203B41FA5}">
+                      <a16:colId xmlns:a16="http://schemas.microsoft.com/office/drawing/2014/main" val="20003"/>
+                    </a:ext>
+                  </a:extLst>
+                </a:gridCol>
+                <a:gridCol w="929390">
+                  <a:extLst>
+                    <a:ext uri="{9D8B030D-6E8A-4147-A177-3AD203B41FA5}">
+                      <a16:colId xmlns:a16="http://schemas.microsoft.com/office/drawing/2014/main" val="20004"/>
+                    </a:ext>
+                  </a:extLst>
+                </a:gridCol>
               </a:tblGrid>
               <a:tr h="310896">
                 <a:tc>
                   <a:txBody>
-                    <a:bodyPr wrap="square"/>
+                    <a:bodyPr/>
                     <a:lstStyle/>
                     <a:p>
                       <a:pPr algn="l"/>
@@ -12209,7 +12694,7 @@
                 </a:tc>
                 <a:tc>
                   <a:txBody>
-                    <a:bodyPr wrap="square"/>
+                    <a:bodyPr/>
                     <a:lstStyle/>
                     <a:p>
                       <a:pPr algn="r"/>
@@ -12232,7 +12717,7 @@
                 </a:tc>
                 <a:tc>
                   <a:txBody>
-                    <a:bodyPr wrap="square"/>
+                    <a:bodyPr/>
                     <a:lstStyle/>
                     <a:p>
                       <a:pPr algn="r"/>
@@ -12255,7 +12740,7 @@
                 </a:tc>
                 <a:tc>
                   <a:txBody>
-                    <a:bodyPr wrap="square"/>
+                    <a:bodyPr/>
                     <a:lstStyle/>
                     <a:p>
                       <a:pPr algn="r"/>
@@ -12278,7 +12763,7 @@
                 </a:tc>
                 <a:tc>
                   <a:txBody>
-                    <a:bodyPr wrap="square"/>
+                    <a:bodyPr/>
                     <a:lstStyle/>
                     <a:p>
                       <a:pPr algn="r"/>
@@ -12299,11 +12784,16 @@
                     </a:solidFill>
                   </a:tcPr>
                 </a:tc>
+                <a:extLst>
+                  <a:ext uri="{0D108BD9-81ED-4DB2-BD59-A6C34878D82A}">
+                    <a16:rowId xmlns:a16="http://schemas.microsoft.com/office/drawing/2014/main" val="10000"/>
+                  </a:ext>
+                </a:extLst>
               </a:tr>
               <a:tr h="310896">
                 <a:tc>
                   <a:txBody>
-                    <a:bodyPr wrap="square"/>
+                    <a:bodyPr/>
                     <a:lstStyle/>
                     <a:p>
                       <a:pPr algn="l"/>
@@ -12326,7 +12816,7 @@
                 </a:tc>
                 <a:tc>
                   <a:txBody>
-                    <a:bodyPr wrap="square"/>
+                    <a:bodyPr/>
                     <a:lstStyle/>
                     <a:p>
                       <a:pPr algn="r"/>
@@ -12349,7 +12839,7 @@
                 </a:tc>
                 <a:tc>
                   <a:txBody>
-                    <a:bodyPr wrap="square"/>
+                    <a:bodyPr/>
                     <a:lstStyle/>
                     <a:p>
                       <a:pPr algn="r"/>
@@ -12372,7 +12862,7 @@
                 </a:tc>
                 <a:tc>
                   <a:txBody>
-                    <a:bodyPr wrap="square"/>
+                    <a:bodyPr/>
                     <a:lstStyle/>
                     <a:p>
                       <a:pPr algn="r"/>
@@ -12395,7 +12885,7 @@
                 </a:tc>
                 <a:tc>
                   <a:txBody>
-                    <a:bodyPr wrap="square"/>
+                    <a:bodyPr/>
                     <a:lstStyle/>
                     <a:p>
                       <a:pPr algn="r"/>
@@ -12416,11 +12906,16 @@
                     </a:solidFill>
                   </a:tcPr>
                 </a:tc>
+                <a:extLst>
+                  <a:ext uri="{0D108BD9-81ED-4DB2-BD59-A6C34878D82A}">
+                    <a16:rowId xmlns:a16="http://schemas.microsoft.com/office/drawing/2014/main" val="10001"/>
+                  </a:ext>
+                </a:extLst>
               </a:tr>
               <a:tr h="310896">
                 <a:tc>
                   <a:txBody>
-                    <a:bodyPr wrap="square"/>
+                    <a:bodyPr/>
                     <a:lstStyle/>
                     <a:p>
                       <a:pPr algn="l"/>
@@ -12443,7 +12938,7 @@
                 </a:tc>
                 <a:tc>
                   <a:txBody>
-                    <a:bodyPr wrap="square"/>
+                    <a:bodyPr/>
                     <a:lstStyle/>
                     <a:p>
                       <a:pPr algn="r"/>
@@ -12466,7 +12961,7 @@
                 </a:tc>
                 <a:tc>
                   <a:txBody>
-                    <a:bodyPr wrap="square"/>
+                    <a:bodyPr/>
                     <a:lstStyle/>
                     <a:p>
                       <a:pPr algn="r"/>
@@ -12489,7 +12984,7 @@
                 </a:tc>
                 <a:tc>
                   <a:txBody>
-                    <a:bodyPr wrap="square"/>
+                    <a:bodyPr/>
                     <a:lstStyle/>
                     <a:p>
                       <a:pPr algn="r"/>
@@ -12512,7 +13007,7 @@
                 </a:tc>
                 <a:tc>
                   <a:txBody>
-                    <a:bodyPr wrap="square"/>
+                    <a:bodyPr/>
                     <a:lstStyle/>
                     <a:p>
                       <a:pPr algn="r"/>
@@ -12533,11 +13028,16 @@
                     </a:solidFill>
                   </a:tcPr>
                 </a:tc>
+                <a:extLst>
+                  <a:ext uri="{0D108BD9-81ED-4DB2-BD59-A6C34878D82A}">
+                    <a16:rowId xmlns:a16="http://schemas.microsoft.com/office/drawing/2014/main" val="10002"/>
+                  </a:ext>
+                </a:extLst>
               </a:tr>
               <a:tr h="310896">
                 <a:tc>
                   <a:txBody>
-                    <a:bodyPr wrap="square"/>
+                    <a:bodyPr/>
                     <a:lstStyle/>
                     <a:p>
                       <a:pPr algn="l"/>
@@ -12560,7 +13060,7 @@
                 </a:tc>
                 <a:tc>
                   <a:txBody>
-                    <a:bodyPr wrap="square"/>
+                    <a:bodyPr/>
                     <a:lstStyle/>
                     <a:p>
                       <a:pPr algn="r"/>
@@ -12583,7 +13083,7 @@
                 </a:tc>
                 <a:tc>
                   <a:txBody>
-                    <a:bodyPr wrap="square"/>
+                    <a:bodyPr/>
                     <a:lstStyle/>
                     <a:p>
                       <a:pPr algn="r"/>
@@ -12606,7 +13106,7 @@
                 </a:tc>
                 <a:tc>
                   <a:txBody>
-                    <a:bodyPr wrap="square"/>
+                    <a:bodyPr/>
                     <a:lstStyle/>
                     <a:p>
                       <a:pPr algn="r"/>
@@ -12629,7 +13129,7 @@
                 </a:tc>
                 <a:tc>
                   <a:txBody>
-                    <a:bodyPr wrap="square"/>
+                    <a:bodyPr/>
                     <a:lstStyle/>
                     <a:p>
                       <a:pPr algn="r"/>
@@ -12650,11 +13150,16 @@
                     </a:solidFill>
                   </a:tcPr>
                 </a:tc>
+                <a:extLst>
+                  <a:ext uri="{0D108BD9-81ED-4DB2-BD59-A6C34878D82A}">
+                    <a16:rowId xmlns:a16="http://schemas.microsoft.com/office/drawing/2014/main" val="10003"/>
+                  </a:ext>
+                </a:extLst>
               </a:tr>
               <a:tr h="310896">
                 <a:tc>
                   <a:txBody>
-                    <a:bodyPr wrap="square"/>
+                    <a:bodyPr/>
                     <a:lstStyle/>
                     <a:p>
                       <a:pPr algn="l"/>
@@ -12677,7 +13182,7 @@
                 </a:tc>
                 <a:tc>
                   <a:txBody>
-                    <a:bodyPr wrap="square"/>
+                    <a:bodyPr/>
                     <a:lstStyle/>
                     <a:p>
                       <a:pPr algn="r"/>
@@ -12700,7 +13205,7 @@
                 </a:tc>
                 <a:tc>
                   <a:txBody>
-                    <a:bodyPr wrap="square"/>
+                    <a:bodyPr/>
                     <a:lstStyle/>
                     <a:p>
                       <a:pPr algn="r"/>
@@ -12723,7 +13228,7 @@
                 </a:tc>
                 <a:tc>
                   <a:txBody>
-                    <a:bodyPr wrap="square"/>
+                    <a:bodyPr/>
                     <a:lstStyle/>
                     <a:p>
                       <a:pPr algn="r"/>
@@ -12746,7 +13251,7 @@
                 </a:tc>
                 <a:tc>
                   <a:txBody>
-                    <a:bodyPr wrap="square"/>
+                    <a:bodyPr/>
                     <a:lstStyle/>
                     <a:p>
                       <a:pPr algn="r"/>
@@ -12767,11 +13272,16 @@
                     </a:solidFill>
                   </a:tcPr>
                 </a:tc>
+                <a:extLst>
+                  <a:ext uri="{0D108BD9-81ED-4DB2-BD59-A6C34878D82A}">
+                    <a16:rowId xmlns:a16="http://schemas.microsoft.com/office/drawing/2014/main" val="10004"/>
+                  </a:ext>
+                </a:extLst>
               </a:tr>
               <a:tr h="310896">
                 <a:tc>
                   <a:txBody>
-                    <a:bodyPr wrap="square"/>
+                    <a:bodyPr/>
                     <a:lstStyle/>
                     <a:p>
                       <a:pPr algn="l"/>
@@ -12794,7 +13304,7 @@
                 </a:tc>
                 <a:tc>
                   <a:txBody>
-                    <a:bodyPr wrap="square"/>
+                    <a:bodyPr/>
                     <a:lstStyle/>
                     <a:p>
                       <a:pPr algn="r"/>
@@ -12817,7 +13327,7 @@
                 </a:tc>
                 <a:tc>
                   <a:txBody>
-                    <a:bodyPr wrap="square"/>
+                    <a:bodyPr/>
                     <a:lstStyle/>
                     <a:p>
                       <a:pPr algn="r"/>
@@ -12840,7 +13350,7 @@
                 </a:tc>
                 <a:tc>
                   <a:txBody>
-                    <a:bodyPr wrap="square"/>
+                    <a:bodyPr/>
                     <a:lstStyle/>
                     <a:p>
                       <a:pPr algn="r"/>
@@ -12863,7 +13373,7 @@
                 </a:tc>
                 <a:tc>
                   <a:txBody>
-                    <a:bodyPr wrap="square"/>
+                    <a:bodyPr/>
                     <a:lstStyle/>
                     <a:p>
                       <a:pPr algn="r"/>
@@ -12884,6 +13394,11 @@
                     </a:solidFill>
                   </a:tcPr>
                 </a:tc>
+                <a:extLst>
+                  <a:ext uri="{0D108BD9-81ED-4DB2-BD59-A6C34878D82A}">
+                    <a16:rowId xmlns:a16="http://schemas.microsoft.com/office/drawing/2014/main" val="10005"/>
+                  </a:ext>
+                </a:extLst>
               </a:tr>
             </a:tbl>
           </a:graphicData>
@@ -12906,7 +13421,7 @@
           <a:noFill/>
         </p:spPr>
         <p:txBody>
-          <a:bodyPr wrap="square" lIns="0" rIns="0" tIns="0" bIns="0">
+          <a:bodyPr wrap="square" lIns="0" tIns="0" rIns="0" bIns="0">
             <a:spAutoFit/>
           </a:bodyPr>
           <a:lstStyle/>
@@ -12959,15 +13474,39 @@
                 <a:tableStyleId>{5C22544A-7EE6-4342-B048-85BDC9FD1C3A}</a:tableStyleId>
               </a:tblPr>
               <a:tblGrid>
-                <a:gridCol w="1649245"/>
-                <a:gridCol w="1236933"/>
-                <a:gridCol w="1030778"/>
-                <a:gridCol w="1752322"/>
+                <a:gridCol w="1649245">
+                  <a:extLst>
+                    <a:ext uri="{9D8B030D-6E8A-4147-A177-3AD203B41FA5}">
+                      <a16:colId xmlns:a16="http://schemas.microsoft.com/office/drawing/2014/main" val="20000"/>
+                    </a:ext>
+                  </a:extLst>
+                </a:gridCol>
+                <a:gridCol w="1236933">
+                  <a:extLst>
+                    <a:ext uri="{9D8B030D-6E8A-4147-A177-3AD203B41FA5}">
+                      <a16:colId xmlns:a16="http://schemas.microsoft.com/office/drawing/2014/main" val="20001"/>
+                    </a:ext>
+                  </a:extLst>
+                </a:gridCol>
+                <a:gridCol w="1030778">
+                  <a:extLst>
+                    <a:ext uri="{9D8B030D-6E8A-4147-A177-3AD203B41FA5}">
+                      <a16:colId xmlns:a16="http://schemas.microsoft.com/office/drawing/2014/main" val="20002"/>
+                    </a:ext>
+                  </a:extLst>
+                </a:gridCol>
+                <a:gridCol w="1752322">
+                  <a:extLst>
+                    <a:ext uri="{9D8B030D-6E8A-4147-A177-3AD203B41FA5}">
+                      <a16:colId xmlns:a16="http://schemas.microsoft.com/office/drawing/2014/main" val="20003"/>
+                    </a:ext>
+                  </a:extLst>
+                </a:gridCol>
               </a:tblGrid>
               <a:tr h="310896">
                 <a:tc>
                   <a:txBody>
-                    <a:bodyPr wrap="square"/>
+                    <a:bodyPr/>
                     <a:lstStyle/>
                     <a:p>
                       <a:pPr algn="l"/>
@@ -12990,7 +13529,7 @@
                 </a:tc>
                 <a:tc>
                   <a:txBody>
-                    <a:bodyPr wrap="square"/>
+                    <a:bodyPr/>
                     <a:lstStyle/>
                     <a:p>
                       <a:pPr algn="r"/>
@@ -13013,7 +13552,7 @@
                 </a:tc>
                 <a:tc>
                   <a:txBody>
-                    <a:bodyPr wrap="square"/>
+                    <a:bodyPr/>
                     <a:lstStyle/>
                     <a:p>
                       <a:pPr algn="r"/>
@@ -13036,7 +13575,7 @@
                 </a:tc>
                 <a:tc>
                   <a:txBody>
-                    <a:bodyPr wrap="square"/>
+                    <a:bodyPr/>
                     <a:lstStyle/>
                     <a:p>
                       <a:pPr algn="r"/>
@@ -13057,11 +13596,16 @@
                     </a:solidFill>
                   </a:tcPr>
                 </a:tc>
+                <a:extLst>
+                  <a:ext uri="{0D108BD9-81ED-4DB2-BD59-A6C34878D82A}">
+                    <a16:rowId xmlns:a16="http://schemas.microsoft.com/office/drawing/2014/main" val="10000"/>
+                  </a:ext>
+                </a:extLst>
               </a:tr>
               <a:tr h="310896">
                 <a:tc>
                   <a:txBody>
-                    <a:bodyPr wrap="square"/>
+                    <a:bodyPr/>
                     <a:lstStyle/>
                     <a:p>
                       <a:pPr algn="l"/>
@@ -13084,7 +13628,7 @@
                 </a:tc>
                 <a:tc>
                   <a:txBody>
-                    <a:bodyPr wrap="square"/>
+                    <a:bodyPr/>
                     <a:lstStyle/>
                     <a:p>
                       <a:pPr algn="r"/>
@@ -13107,7 +13651,7 @@
                 </a:tc>
                 <a:tc>
                   <a:txBody>
-                    <a:bodyPr wrap="square"/>
+                    <a:bodyPr/>
                     <a:lstStyle/>
                     <a:p>
                       <a:pPr algn="r"/>
@@ -13130,7 +13674,7 @@
                 </a:tc>
                 <a:tc>
                   <a:txBody>
-                    <a:bodyPr wrap="square"/>
+                    <a:bodyPr/>
                     <a:lstStyle/>
                     <a:p>
                       <a:pPr algn="r"/>
@@ -13151,11 +13695,16 @@
                     </a:solidFill>
                   </a:tcPr>
                 </a:tc>
+                <a:extLst>
+                  <a:ext uri="{0D108BD9-81ED-4DB2-BD59-A6C34878D82A}">
+                    <a16:rowId xmlns:a16="http://schemas.microsoft.com/office/drawing/2014/main" val="10001"/>
+                  </a:ext>
+                </a:extLst>
               </a:tr>
               <a:tr h="310896">
                 <a:tc>
                   <a:txBody>
-                    <a:bodyPr wrap="square"/>
+                    <a:bodyPr/>
                     <a:lstStyle/>
                     <a:p>
                       <a:pPr algn="l"/>
@@ -13178,7 +13727,7 @@
                 </a:tc>
                 <a:tc>
                   <a:txBody>
-                    <a:bodyPr wrap="square"/>
+                    <a:bodyPr/>
                     <a:lstStyle/>
                     <a:p>
                       <a:pPr algn="r"/>
@@ -13201,7 +13750,7 @@
                 </a:tc>
                 <a:tc>
                   <a:txBody>
-                    <a:bodyPr wrap="square"/>
+                    <a:bodyPr/>
                     <a:lstStyle/>
                     <a:p>
                       <a:pPr algn="r"/>
@@ -13224,7 +13773,7 @@
                 </a:tc>
                 <a:tc>
                   <a:txBody>
-                    <a:bodyPr wrap="square"/>
+                    <a:bodyPr/>
                     <a:lstStyle/>
                     <a:p>
                       <a:pPr algn="r"/>
@@ -13245,11 +13794,16 @@
                     </a:solidFill>
                   </a:tcPr>
                 </a:tc>
+                <a:extLst>
+                  <a:ext uri="{0D108BD9-81ED-4DB2-BD59-A6C34878D82A}">
+                    <a16:rowId xmlns:a16="http://schemas.microsoft.com/office/drawing/2014/main" val="10002"/>
+                  </a:ext>
+                </a:extLst>
               </a:tr>
               <a:tr h="310896">
                 <a:tc>
                   <a:txBody>
-                    <a:bodyPr wrap="square"/>
+                    <a:bodyPr/>
                     <a:lstStyle/>
                     <a:p>
                       <a:pPr algn="l"/>
@@ -13272,7 +13826,7 @@
                 </a:tc>
                 <a:tc>
                   <a:txBody>
-                    <a:bodyPr wrap="square"/>
+                    <a:bodyPr/>
                     <a:lstStyle/>
                     <a:p>
                       <a:pPr algn="r"/>
@@ -13295,7 +13849,7 @@
                 </a:tc>
                 <a:tc>
                   <a:txBody>
-                    <a:bodyPr wrap="square"/>
+                    <a:bodyPr/>
                     <a:lstStyle/>
                     <a:p>
                       <a:pPr algn="r"/>
@@ -13318,7 +13872,7 @@
                 </a:tc>
                 <a:tc>
                   <a:txBody>
-                    <a:bodyPr wrap="square"/>
+                    <a:bodyPr/>
                     <a:lstStyle/>
                     <a:p>
                       <a:pPr algn="r"/>
@@ -13339,6 +13893,11 @@
                     </a:solidFill>
                   </a:tcPr>
                 </a:tc>
+                <a:extLst>
+                  <a:ext uri="{0D108BD9-81ED-4DB2-BD59-A6C34878D82A}">
+                    <a16:rowId xmlns:a16="http://schemas.microsoft.com/office/drawing/2014/main" val="10003"/>
+                  </a:ext>
+                </a:extLst>
               </a:tr>
             </a:tbl>
           </a:graphicData>
@@ -13385,7 +13944,7 @@
           <a:noFill/>
         </p:spPr>
         <p:txBody>
-          <a:bodyPr wrap="square" lIns="0" rIns="0" tIns="0" bIns="0">
+          <a:bodyPr wrap="square" lIns="0" tIns="0" rIns="0" bIns="0">
             <a:spAutoFit/>
           </a:bodyPr>
           <a:lstStyle/>
@@ -13484,7 +14043,7 @@
           <a:noFill/>
         </p:spPr>
         <p:txBody>
-          <a:bodyPr wrap="square" lIns="0" rIns="0" tIns="0" bIns="0">
+          <a:bodyPr wrap="square" lIns="0" tIns="0" rIns="0" bIns="0">
             <a:spAutoFit/>
           </a:bodyPr>
           <a:lstStyle/>
@@ -13518,7 +14077,7 @@
 </file>
 
 <file path=ppt/slides/slide9.xml><?xml version="1.0" encoding="utf-8"?>
-<p:sld xmlns:a="http://schemas.openxmlformats.org/drawingml/2006/main" xmlns:p="http://schemas.openxmlformats.org/presentationml/2006/main" xmlns:r="http://schemas.openxmlformats.org/officeDocument/2006/relationships">
+<p:sld xmlns:a="http://schemas.openxmlformats.org/drawingml/2006/main" xmlns:r="http://schemas.openxmlformats.org/officeDocument/2006/relationships" xmlns:p="http://schemas.openxmlformats.org/presentationml/2006/main">
   <p:cSld>
     <p:spTree>
       <p:nvGrpSpPr>
@@ -13526,7 +14085,14 @@
         <p:cNvGrpSpPr/>
         <p:nvPr/>
       </p:nvGrpSpPr>
-      <p:grpSpPr/>
+      <p:grpSpPr>
+        <a:xfrm>
+          <a:off x="0" y="0"/>
+          <a:ext cx="0" cy="0"/>
+          <a:chOff x="0" y="0"/>
+          <a:chExt cx="0" cy="0"/>
+        </a:xfrm>
+      </p:grpSpPr>
       <p:sp>
         <p:nvSpPr>
           <p:cNvPr id="2" name="Oval 1"/>
@@ -13564,7 +14130,7 @@
           </a:fontRef>
         </p:style>
         <p:txBody>
-          <a:bodyPr rtlCol="0" anchor="ctr" lIns="0" rIns="0" tIns="0" bIns="0"/>
+          <a:bodyPr lIns="0" tIns="0" rIns="0" bIns="0" rtlCol="0" anchor="ctr"/>
           <a:lstStyle/>
           <a:p>
             <a:pPr algn="ctr"/>
@@ -13597,7 +14163,7 @@
           <a:noFill/>
         </p:spPr>
         <p:txBody>
-          <a:bodyPr wrap="square" lIns="0" rIns="0" tIns="0" bIns="0">
+          <a:bodyPr wrap="square" lIns="0" tIns="0" rIns="0" bIns="0">
             <a:spAutoFit/>
           </a:bodyPr>
           <a:lstStyle/>
@@ -13636,7 +14202,7 @@
           <a:noFill/>
         </p:spPr>
         <p:txBody>
-          <a:bodyPr wrap="square" lIns="0" rIns="0" tIns="0" bIns="0">
+          <a:bodyPr wrap="square" lIns="0" tIns="0" rIns="0" bIns="0">
             <a:spAutoFit/>
           </a:bodyPr>
           <a:lstStyle/>
@@ -13680,15 +14246,39 @@
                 <a:tableStyleId>{5C22544A-7EE6-4342-B048-85BDC9FD1C3A}</a:tableStyleId>
               </a:tblPr>
               <a:tblGrid>
-                <a:gridCol w="2451735"/>
-                <a:gridCol w="707231"/>
-                <a:gridCol w="2168842"/>
-                <a:gridCol w="707231"/>
+                <a:gridCol w="2451735">
+                  <a:extLst>
+                    <a:ext uri="{9D8B030D-6E8A-4147-A177-3AD203B41FA5}">
+                      <a16:colId xmlns:a16="http://schemas.microsoft.com/office/drawing/2014/main" val="20000"/>
+                    </a:ext>
+                  </a:extLst>
+                </a:gridCol>
+                <a:gridCol w="707231">
+                  <a:extLst>
+                    <a:ext uri="{9D8B030D-6E8A-4147-A177-3AD203B41FA5}">
+                      <a16:colId xmlns:a16="http://schemas.microsoft.com/office/drawing/2014/main" val="20001"/>
+                    </a:ext>
+                  </a:extLst>
+                </a:gridCol>
+                <a:gridCol w="2168842">
+                  <a:extLst>
+                    <a:ext uri="{9D8B030D-6E8A-4147-A177-3AD203B41FA5}">
+                      <a16:colId xmlns:a16="http://schemas.microsoft.com/office/drawing/2014/main" val="20002"/>
+                    </a:ext>
+                  </a:extLst>
+                </a:gridCol>
+                <a:gridCol w="707231">
+                  <a:extLst>
+                    <a:ext uri="{9D8B030D-6E8A-4147-A177-3AD203B41FA5}">
+                      <a16:colId xmlns:a16="http://schemas.microsoft.com/office/drawing/2014/main" val="20003"/>
+                    </a:ext>
+                  </a:extLst>
+                </a:gridCol>
               </a:tblGrid>
               <a:tr h="292608">
                 <a:tc>
                   <a:txBody>
-                    <a:bodyPr wrap="square"/>
+                    <a:bodyPr/>
                     <a:lstStyle/>
                     <a:p>
                       <a:pPr algn="l"/>
@@ -13711,7 +14301,22 @@
                 </a:tc>
                 <a:tc>
                   <a:txBody>
-                    <a:bodyPr wrap="square"/>
+                    <a:bodyPr/>
+                    <a:lstStyle/>
+                    <a:p>
+                      <a:pPr algn="r"/>
+                      <a:endParaRPr/>
+                    </a:p>
+                  </a:txBody>
+                  <a:tcPr marL="64008" marR="64008" marT="9144" marB="9144" anchor="ctr">
+                    <a:solidFill>
+                      <a:srgbClr val="1A1A1A"/>
+                    </a:solidFill>
+                  </a:tcPr>
+                </a:tc>
+                <a:tc>
+                  <a:txBody>
+                    <a:bodyPr/>
                     <a:lstStyle/>
                     <a:p>
                       <a:pPr algn="r"/>
@@ -13722,7 +14327,7 @@
                           </a:solidFill>
                           <a:latin typeface="Calibri"/>
                         </a:rPr>
-                        <a:t/>
+                        <a:t>Fixed, summed by feature</a:t>
                       </a:r>
                     </a:p>
                   </a:txBody>
@@ -13734,19 +14339,11 @@
                 </a:tc>
                 <a:tc>
                   <a:txBody>
-                    <a:bodyPr wrap="square"/>
-                    <a:lstStyle/>
-                    <a:p>
-                      <a:pPr algn="r"/>
-                      <a:r>
-                        <a:rPr sz="1000" b="1">
-                          <a:solidFill>
-                            <a:srgbClr val="FFFFFF"/>
-                          </a:solidFill>
-                          <a:latin typeface="Calibri"/>
-                        </a:rPr>
-                        <a:t>Fixed, summed by feature</a:t>
-                      </a:r>
+                    <a:bodyPr/>
+                    <a:lstStyle/>
+                    <a:p>
+                      <a:pPr algn="r"/>
+                      <a:endParaRPr/>
                     </a:p>
                   </a:txBody>
                   <a:tcPr marL="64008" marR="64008" marT="9144" marB="9144" anchor="ctr">
@@ -13755,34 +14352,16 @@
                     </a:solidFill>
                   </a:tcPr>
                 </a:tc>
-                <a:tc>
-                  <a:txBody>
-                    <a:bodyPr wrap="square"/>
-                    <a:lstStyle/>
-                    <a:p>
-                      <a:pPr algn="r"/>
-                      <a:r>
-                        <a:rPr sz="1000" b="1">
-                          <a:solidFill>
-                            <a:srgbClr val="FFFFFF"/>
-                          </a:solidFill>
-                          <a:latin typeface="Calibri"/>
-                        </a:rPr>
-                        <a:t/>
-                      </a:r>
-                    </a:p>
-                  </a:txBody>
-                  <a:tcPr marL="64008" marR="64008" marT="9144" marB="9144" anchor="ctr">
-                    <a:solidFill>
-                      <a:srgbClr val="1A1A1A"/>
-                    </a:solidFill>
-                  </a:tcPr>
-                </a:tc>
+                <a:extLst>
+                  <a:ext uri="{0D108BD9-81ED-4DB2-BD59-A6C34878D82A}">
+                    <a16:rowId xmlns:a16="http://schemas.microsoft.com/office/drawing/2014/main" val="10000"/>
+                  </a:ext>
+                </a:extLst>
               </a:tr>
               <a:tr h="292608">
                 <a:tc>
                   <a:txBody>
-                    <a:bodyPr wrap="square"/>
+                    <a:bodyPr/>
                     <a:lstStyle/>
                     <a:p>
                       <a:pPr algn="l"/>
@@ -13805,7 +14384,7 @@
                 </a:tc>
                 <a:tc>
                   <a:txBody>
-                    <a:bodyPr wrap="square"/>
+                    <a:bodyPr/>
                     <a:lstStyle/>
                     <a:p>
                       <a:pPr algn="r"/>
@@ -13828,7 +14407,7 @@
                 </a:tc>
                 <a:tc>
                   <a:txBody>
-                    <a:bodyPr wrap="square"/>
+                    <a:bodyPr/>
                     <a:lstStyle/>
                     <a:p>
                       <a:pPr algn="r"/>
@@ -13851,7 +14430,7 @@
                 </a:tc>
                 <a:tc>
                   <a:txBody>
-                    <a:bodyPr wrap="square"/>
+                    <a:bodyPr/>
                     <a:lstStyle/>
                     <a:p>
                       <a:pPr algn="r"/>
@@ -13872,11 +14451,16 @@
                     </a:solidFill>
                   </a:tcPr>
                 </a:tc>
+                <a:extLst>
+                  <a:ext uri="{0D108BD9-81ED-4DB2-BD59-A6C34878D82A}">
+                    <a16:rowId xmlns:a16="http://schemas.microsoft.com/office/drawing/2014/main" val="10001"/>
+                  </a:ext>
+                </a:extLst>
               </a:tr>
               <a:tr h="292608">
                 <a:tc>
                   <a:txBody>
-                    <a:bodyPr wrap="square"/>
+                    <a:bodyPr/>
                     <a:lstStyle/>
                     <a:p>
                       <a:pPr algn="l"/>
@@ -13899,7 +14483,7 @@
                 </a:tc>
                 <a:tc>
                   <a:txBody>
-                    <a:bodyPr wrap="square"/>
+                    <a:bodyPr/>
                     <a:lstStyle/>
                     <a:p>
                       <a:pPr algn="r"/>
@@ -13922,7 +14506,7 @@
                 </a:tc>
                 <a:tc>
                   <a:txBody>
-                    <a:bodyPr wrap="square"/>
+                    <a:bodyPr/>
                     <a:lstStyle/>
                     <a:p>
                       <a:pPr algn="r"/>
@@ -13945,7 +14529,7 @@
                 </a:tc>
                 <a:tc>
                   <a:txBody>
-                    <a:bodyPr wrap="square"/>
+                    <a:bodyPr/>
                     <a:lstStyle/>
                     <a:p>
                       <a:pPr algn="r"/>
@@ -13966,11 +14550,16 @@
                     </a:solidFill>
                   </a:tcPr>
                 </a:tc>
+                <a:extLst>
+                  <a:ext uri="{0D108BD9-81ED-4DB2-BD59-A6C34878D82A}">
+                    <a16:rowId xmlns:a16="http://schemas.microsoft.com/office/drawing/2014/main" val="10002"/>
+                  </a:ext>
+                </a:extLst>
               </a:tr>
               <a:tr h="292608">
                 <a:tc>
                   <a:txBody>
-                    <a:bodyPr wrap="square"/>
+                    <a:bodyPr/>
                     <a:lstStyle/>
                     <a:p>
                       <a:pPr algn="l"/>
@@ -13993,7 +14582,7 @@
                 </a:tc>
                 <a:tc>
                   <a:txBody>
-                    <a:bodyPr wrap="square"/>
+                    <a:bodyPr/>
                     <a:lstStyle/>
                     <a:p>
                       <a:pPr algn="r"/>
@@ -14016,7 +14605,7 @@
                 </a:tc>
                 <a:tc>
                   <a:txBody>
-                    <a:bodyPr wrap="square"/>
+                    <a:bodyPr/>
                     <a:lstStyle/>
                     <a:p>
                       <a:pPr algn="r"/>
@@ -14039,7 +14628,7 @@
                 </a:tc>
                 <a:tc>
                   <a:txBody>
-                    <a:bodyPr wrap="square"/>
+                    <a:bodyPr/>
                     <a:lstStyle/>
                     <a:p>
                       <a:pPr algn="r"/>
@@ -14060,11 +14649,16 @@
                     </a:solidFill>
                   </a:tcPr>
                 </a:tc>
+                <a:extLst>
+                  <a:ext uri="{0D108BD9-81ED-4DB2-BD59-A6C34878D82A}">
+                    <a16:rowId xmlns:a16="http://schemas.microsoft.com/office/drawing/2014/main" val="10003"/>
+                  </a:ext>
+                </a:extLst>
               </a:tr>
               <a:tr h="292608">
                 <a:tc>
                   <a:txBody>
-                    <a:bodyPr wrap="square"/>
+                    <a:bodyPr/>
                     <a:lstStyle/>
                     <a:p>
                       <a:pPr algn="l"/>
@@ -14087,7 +14681,7 @@
                 </a:tc>
                 <a:tc>
                   <a:txBody>
-                    <a:bodyPr wrap="square"/>
+                    <a:bodyPr/>
                     <a:lstStyle/>
                     <a:p>
                       <a:pPr algn="r"/>
@@ -14110,7 +14704,7 @@
                 </a:tc>
                 <a:tc>
                   <a:txBody>
-                    <a:bodyPr wrap="square"/>
+                    <a:bodyPr/>
                     <a:lstStyle/>
                     <a:p>
                       <a:pPr algn="r"/>
@@ -14133,7 +14727,7 @@
                 </a:tc>
                 <a:tc>
                   <a:txBody>
-                    <a:bodyPr wrap="square"/>
+                    <a:bodyPr/>
                     <a:lstStyle/>
                     <a:p>
                       <a:pPr algn="r"/>
@@ -14154,11 +14748,16 @@
                     </a:solidFill>
                   </a:tcPr>
                 </a:tc>
+                <a:extLst>
+                  <a:ext uri="{0D108BD9-81ED-4DB2-BD59-A6C34878D82A}">
+                    <a16:rowId xmlns:a16="http://schemas.microsoft.com/office/drawing/2014/main" val="10004"/>
+                  </a:ext>
+                </a:extLst>
               </a:tr>
               <a:tr h="292608">
                 <a:tc>
                   <a:txBody>
-                    <a:bodyPr wrap="square"/>
+                    <a:bodyPr/>
                     <a:lstStyle/>
                     <a:p>
                       <a:pPr algn="l"/>
@@ -14181,7 +14780,7 @@
                 </a:tc>
                 <a:tc>
                   <a:txBody>
-                    <a:bodyPr wrap="square"/>
+                    <a:bodyPr/>
                     <a:lstStyle/>
                     <a:p>
                       <a:pPr algn="r"/>
@@ -14204,7 +14803,7 @@
                 </a:tc>
                 <a:tc>
                   <a:txBody>
-                    <a:bodyPr wrap="square"/>
+                    <a:bodyPr/>
                     <a:lstStyle/>
                     <a:p>
                       <a:pPr algn="r"/>
@@ -14227,7 +14826,7 @@
                 </a:tc>
                 <a:tc>
                   <a:txBody>
-                    <a:bodyPr wrap="square"/>
+                    <a:bodyPr/>
                     <a:lstStyle/>
                     <a:p>
                       <a:pPr algn="r"/>
@@ -14248,11 +14847,16 @@
                     </a:solidFill>
                   </a:tcPr>
                 </a:tc>
+                <a:extLst>
+                  <a:ext uri="{0D108BD9-81ED-4DB2-BD59-A6C34878D82A}">
+                    <a16:rowId xmlns:a16="http://schemas.microsoft.com/office/drawing/2014/main" val="10005"/>
+                  </a:ext>
+                </a:extLst>
               </a:tr>
               <a:tr h="292608">
                 <a:tc>
                   <a:txBody>
-                    <a:bodyPr wrap="square"/>
+                    <a:bodyPr/>
                     <a:lstStyle/>
                     <a:p>
                       <a:pPr algn="l"/>
@@ -14275,7 +14879,7 @@
                 </a:tc>
                 <a:tc>
                   <a:txBody>
-                    <a:bodyPr wrap="square"/>
+                    <a:bodyPr/>
                     <a:lstStyle/>
                     <a:p>
                       <a:pPr algn="r"/>
@@ -14298,7 +14902,7 @@
                 </a:tc>
                 <a:tc>
                   <a:txBody>
-                    <a:bodyPr wrap="square"/>
+                    <a:bodyPr/>
                     <a:lstStyle/>
                     <a:p>
                       <a:pPr algn="r"/>
@@ -14321,7 +14925,7 @@
                 </a:tc>
                 <a:tc>
                   <a:txBody>
-                    <a:bodyPr wrap="square"/>
+                    <a:bodyPr/>
                     <a:lstStyle/>
                     <a:p>
                       <a:pPr algn="r"/>
@@ -14342,6 +14946,11 @@
                     </a:solidFill>
                   </a:tcPr>
                 </a:tc>
+                <a:extLst>
+                  <a:ext uri="{0D108BD9-81ED-4DB2-BD59-A6C34878D82A}">
+                    <a16:rowId xmlns:a16="http://schemas.microsoft.com/office/drawing/2014/main" val="10006"/>
+                  </a:ext>
+                </a:extLst>
               </a:tr>
             </a:tbl>
           </a:graphicData>
@@ -14364,7 +14973,7 @@
           <a:noFill/>
         </p:spPr>
         <p:txBody>
-          <a:bodyPr wrap="square" lIns="0" rIns="0" tIns="0" bIns="0">
+          <a:bodyPr wrap="square" lIns="0" tIns="0" rIns="0" bIns="0">
             <a:spAutoFit/>
           </a:bodyPr>
           <a:lstStyle/>
@@ -14463,7 +15072,7 @@
           <a:noFill/>
         </p:spPr>
         <p:txBody>
-          <a:bodyPr wrap="square" lIns="0" rIns="0" tIns="0" bIns="0">
+          <a:bodyPr wrap="square" lIns="0" tIns="0" rIns="0" bIns="0">
             <a:spAutoFit/>
           </a:bodyPr>
           <a:lstStyle/>
@@ -14502,7 +15111,7 @@
           <a:noFill/>
         </p:spPr>
         <p:txBody>
-          <a:bodyPr wrap="square" lIns="0" rIns="0" tIns="0" bIns="0">
+          <a:bodyPr wrap="square" lIns="0" tIns="0" rIns="0" bIns="0">
             <a:spAutoFit/>
           </a:bodyPr>
           <a:lstStyle/>
